--- a/Near_Null_Magnetic_Fields_Lunar_Plant_Biology_Presentation.pptx
+++ b/Near_Null_Magnetic_Fields_Lunar_Plant_Biology_Presentation.pptx
@@ -8080,7 +8080,7 @@
             </a:r>
             <a:br/>
             <a:r>
-              <a:t>• BibTeX Library: references_LSSR.bib (80 audited references; CrossRef-verified)</a:t>
+              <a:t>• BibTeX Library: references_LSSR.bib (79 audited references; CrossRef-verified)</a:t>
             </a:r>
             <a:br/>
             <a:r>

--- a/Near_Null_Magnetic_Fields_Lunar_Plant_Biology_Presentation.pptx
+++ b/Near_Null_Magnetic_Fields_Lunar_Plant_Biology_Presentation.pptx
@@ -531,7 +531,7 @@
           </a:p>
           <a:p>
             <a:r>
-              <a:t>• Co-authored with Marshall Porterfield, Caue Borlina, Aubrey O'Rourke, Ray Wheeler and Gioia Massa at NASA KSC, Barbara Demmig-Adams at CU Boulder, and Christine Chamberlain at Space Lab Technologies.</a:t>
+              <a:t>• Co-authored with Marshall Porterfield, Caue Borlina, Aubrey O'Rourke, Adriana Sanchez, Manisha Dagar, Sofia Leiva Aldana, Ray Wheeler, Gioia Massa, Barbara Demmig-Adams, Marta Peirats-Llobet, Pamela Flores, Anirudha Dixit, and Christine Chamberlain.</a:t>
             </a:r>
           </a:p>
           <a:p>
@@ -5105,11 +5105,11 @@
               </a:defRPr>
             </a:pPr>
             <a:r>
-              <a:t>D. Marshall Porterfield*, Richard J. Barker*, Caue Borlina, Aubrey O’Rourke, Adriana Sanchez, Manisha Dagar,</a:t>
+              <a:t>Richard J. Barker*, Caue Borlina, Aubrey O’Rourke, Adriana Sanchez, Manisha Dagar, Sofia Leiva Aldana,</a:t>
             </a:r>
             <a:br/>
             <a:r>
-              <a:t>Sofia Leiva Aldana, Ray Wheeler, Gioia Massa, Barbara Demmig-Adams, Marta Peirats-Llobet, Pamela Flores, Anirudha Dixit, Christine Chamberlain</a:t>
+              <a:t>Ray Wheeler, Gioia Massa, Barbara Demmig-Adams, Marta Peirats-Llobet, Pamela Flores, Anirudha Dixit, Christine Chamberlain, D. Marshall Porterfield*</a:t>
             </a:r>
           </a:p>
           <a:p>
@@ -5121,11 +5121,11 @@
               </a:defRPr>
             </a:pPr>
             <a:r>
-              <a:t>Purdue University • NASA Kennedy Space Center • University of Colorado Boulder • Space Lab Technologies • La Trobe University</a:t>
+              <a:t>La Trobe University • Space Lab Technologies • NASA Kennedy Space Center • University of Colorado Boulder • Purdue University</a:t>
             </a:r>
             <a:br/>
             <a:r>
-              <a:t>*Corresponding Authors: porterf@purdue.edu, dr.richard.barker@gmail.com</a:t>
+              <a:t>*Corresponding Authors: dr.richard.barker@gmail.com, porterf@purdue.edu</a:t>
             </a:r>
           </a:p>
         </p:txBody>

--- a/Near_Null_Magnetic_Fields_Lunar_Plant_Biology_Presentation.pptx
+++ b/Near_Null_Magnetic_Fields_Lunar_Plant_Biology_Presentation.pptx
@@ -711,27 +711,27 @@
           </a:p>
           <a:p>
             <a:r>
-              <a:t>• Figure 5 is our operational blueprint for NASA and commercial spaceflight developers.</a:t>
-            </a:r>
-          </a:p>
-          <a:p>
-            <a:r>
-              <a:t>• Panel (a) lays out our 3-chamber ground simulation standard. Historically, studies compared an ambient room to a mu-metal box without controlling for ohmic heat or fan airflow. We mandate: Chamber 1 (GMF control), Chamber 2 (Shielded/Cancelled NNMF), and Chamber 3 (Bifilar sham control with current matched but net magnetic field zero).</a:t>
-            </a:r>
-          </a:p>
-          <a:p>
-            <a:r>
-              <a:t>• Panel (b) illustrates flight hardware integration. A miniature 3-axis fluxgate sensor (0.1 nT resolution) placed equidistant between seedling cassettes records real-time exposure.</a:t>
-            </a:r>
-          </a:p>
-          <a:p>
-            <a:r>
-              <a:t>• Panel (c) is the causal rescue protocol: Re-applying a 45 µT vector inside the chamber rescues germination speed and HY5 pigment accumulation, establishing definitive causal proof.</a:t>
-            </a:r>
-          </a:p>
-          <a:p>
-            <a:r>
-              <a:t>• Panel (d) defines predeclared operational flight decision gates: Green, Amber, and Red.</a:t>
+              <a:t>• Figure 5 establishes our translational roadmap, strictly separating laboratory ground standards from flight engineering trade spaces.</a:t>
+            </a:r>
+          </a:p>
+          <a:p>
+            <a:r>
+              <a:t>• Panel (a) sets the 3-chamber ground standard: Chamber 1 (GMF control), Chamber 2 (Shielded/Cancelled NNMF), and Chamber 3 (Bifilar sham control matching current, heat, and vibration without magnetic fields).</a:t>
+            </a:r>
+          </a:p>
+          <a:p>
+            <a:r>
+              <a:t>• Panel (b) addresses a critical question from flight engineers: What can realistically be accommodated? We recommend passive 3-axis magnetometry (&lt;1 W, grams of mass) at the plant canopy level, while leaving heavy active cancellation coils in ground facilities.</a:t>
+            </a:r>
+          </a:p>
+          <a:p>
+            <a:r>
+              <a:t>• Panel (c) demonstrates in situ causal rescue: Restoring 45 µT inside magnetic shielding rescues emergence speed and pigment accumulation, definitively ruling out microclimatic or enclosure artifacts.</a:t>
+            </a:r>
+          </a:p>
+          <a:p>
+            <a:r>
+              <a:t>• Panel (d) introduces our post-flight phenotypic disambiguation framework to distinguish hypomagnetic effects from microgravity and cosmic radiation.</a:t>
             </a:r>
           </a:p>
         </p:txBody>
@@ -801,37 +801,42 @@
           <a:lstStyle/>
           <a:p>
             <a:r>
-              <a:t>TALKING POINTS (SLIDE 12 - TABLE 3 DEEP DIVE):</a:t>
-            </a:r>
-          </a:p>
-          <a:p>
-            <a:r>
-              <a:t>• This is Table 3 from the paper, built as a native PowerPoint table so you can edit the numbers or thresholds directly for specific payload proposals.</a:t>
-            </a:r>
-          </a:p>
-          <a:p>
-            <a:r>
-              <a:t>• Spaceflight payload teams often struggle because decision criteria are not declared in advance. If seedlings don't emerge as planned on the Moon, payload operators are caught off guard.</a:t>
-            </a:r>
-          </a:p>
-          <a:p>
-            <a:r>
-              <a:t>• Green Gate represents nominal science: field is below 5 nT, germination is normal (≥85%), we proceed autonomously.</a:t>
-            </a:r>
-          </a:p>
-          <a:p>
-            <a:r>
-              <a:t>• Amber Gate is triggered if field ripples between 5 and 50 nT, or if emergence lags by 18 hours. We increase optical imaging frequency and correlate with lander bus power telemetry.</a:t>
-            </a:r>
-          </a:p>
-          <a:p>
-            <a:r>
-              <a:t>• Red Gate is our contingency countermeasure: If germination drops by more than 30%, or seedlings exhibit severe chlorosis, the ground team commands the activation of active 45 µT Helmholtz coils to re-apply Earth's geomagnetic field.</a:t>
-            </a:r>
-          </a:p>
-          <a:p>
-            <a:r>
-              <a:t>• This rescues crop viability and provides an ironclad causal demonstration.</a:t>
+              <a:t>TALKING POINTS (SLIDE 12 - PHENOTYPIC DISAMBIGUATION MATRIX):</a:t>
+            </a:r>
+          </a:p>
+          <a:p>
+            <a:r>
+              <a:t>• This table represents our key translational science recommendation for Artemis payloads and lunar greenhouses.</a:t>
+            </a:r>
+          </a:p>
+          <a:p>
+            <a:r>
+              <a:t>• When plants show stress on the lunar surface, how do we know if it was hypomagnetic stress, partial gravity (0.166 g), or radiation?</a:t>
+            </a:r>
+          </a:p>
+          <a:p>
+            <a:r>
+              <a:t>• This matrix provides unambiguous diagnostic markers:</a:t>
+            </a:r>
+          </a:p>
+          <a:p>
+            <a:r>
+              <a:t>  1. Hypomagnetic field delays emergence velocity (Δt50 = +12–36 h), represses chlorophyll/anthocyanin synthesis via cryptochromes, and triggers mitochondrial AOX1D without nuclear DNA damage. In ground controls, it is fully rescued by a 45 µT vector.</a:t>
+            </a:r>
+          </a:p>
+          <a:p>
+            <a:r>
+              <a:t>  2. Lunar partial gravity causes directional skewing and cell wall changes, but germination rate and greening are normal. It is rescued by a 1g centrifuge, but unaffected by magnetic fields.</a:t>
+            </a:r>
+          </a:p>
+          <a:p>
+            <a:r>
+              <a:t>  3. Radiation causes double-strand DNA breaks and γ-H2AX foci, which are independent of magnetic fields or gravity.</a:t>
+            </a:r>
+          </a:p>
+          <a:p>
+            <a:r>
+              <a:t>• This framework replaces arbitrary mission abort criteria with a rigorous post-flight diagnostic methodology.</a:t>
             </a:r>
           </a:p>
         </p:txBody>
@@ -5105,11 +5110,11 @@
               </a:defRPr>
             </a:pPr>
             <a:r>
-              <a:t>Richard J. Barker*, Caue Borlina, Aubrey O’Rourke, Adriana Sanchez, Manisha Dagar, Sofia Leiva Aldana,</a:t>
+              <a:t>D. Marshall Porterfield*, Richard J. Barker*, Caue Borlina, Aubrey O’Rourke, Adriana Sanchez, Manisha Dagar, Sofia Leiva Aldana,</a:t>
             </a:r>
             <a:br/>
             <a:r>
-              <a:t>Ray Wheeler, Gioia Massa, Barbara Demmig-Adams, Marta Peirats-Llobet, Pamela Flores, Anirudha Dixit, Christine Chamberlain, D. Marshall Porterfield*</a:t>
+              <a:t>Ray Wheeler, Gioia Massa, Barbara Demmig-Adams, Marta Peirats-Llobet, Pamela Flores, Anirudha Dixit, Christine Chamberlain</a:t>
             </a:r>
           </a:p>
           <a:p>
@@ -5729,7 +5734,7 @@
               </a:defRPr>
             </a:pPr>
             <a:r>
-              <a:t>Flight Validation, Causal Rescue &amp; Artemis Risk Pipeline</a:t>
+              <a:t>Scientific Knowledge Gap Retirement &amp; Flight Trade Space</a:t>
             </a:r>
           </a:p>
         </p:txBody>
@@ -5764,7 +5769,7 @@
               </a:defRPr>
             </a:pPr>
             <a:r>
-              <a:t>3-chamber ground controls, in-situ 3-axis fluxgate telemetry, active 45 µT rescue coils, and predeclared flight gates</a:t>
+              <a:t>3-chamber ground controls, in situ causal rescue, flight payload constraints, and phenotypic disambiguation</a:t>
             </a:r>
           </a:p>
         </p:txBody>
@@ -5972,7 +5977,7 @@
               </a:defRPr>
             </a:pPr>
             <a:r>
-              <a:t>(b) In-Chamber 3-Axis Fluxgate Magnetometer Telemetry</a:t>
+              <a:t>(b) Flight Payload Trade Space: Science Gaps vs. Engineering Limits</a:t>
             </a:r>
           </a:p>
         </p:txBody>
@@ -6076,7 +6081,7 @@
               </a:defRPr>
             </a:pPr>
             <a:r>
-              <a:t>(c) Active Causal Rescue: 40–50 µT Vector Re-Application</a:t>
+              <a:t>(c) In Situ Causal Rescue: 45 µT Vector Re-Application Proof</a:t>
             </a:r>
           </a:p>
         </p:txBody>
@@ -6180,7 +6185,7 @@
               </a:defRPr>
             </a:pPr>
             <a:r>
-              <a:t>(d) Predeclared Operational Flight Decision Gates</a:t>
+              <a:t>(d) Post-Flight Phenotypic Disambiguation Framework</a:t>
             </a:r>
           </a:p>
         </p:txBody>
@@ -6311,7 +6316,7 @@
               </a:defRPr>
             </a:pPr>
             <a:r>
-              <a:t>Artemis III LEAF Predeclared Operational Decision Gates</a:t>
+              <a:t>Phenotypic Risk Disambiguation Matrix for Lunar Plant Biology</a:t>
             </a:r>
           </a:p>
         </p:txBody>
@@ -6346,7 +6351,7 @@
               </a:defRPr>
             </a:pPr>
             <a:r>
-              <a:t>Pre-agreed quantitative decision thresholds to ensure rigorous science and safeguard lunar crop viability</a:t>
+              <a:t>Diagnostic criteria to decouple Near-Null Magnetic Fields from Lunar Partial Gravity and Deep-Space Radiation</a:t>
             </a:r>
           </a:p>
         </p:txBody>
@@ -6370,10 +6375,10 @@
                 <a:tableStyleId>{5C22544A-7EE6-4342-B048-85BDC9FD1C3A}</a:tableStyleId>
               </a:tblPr>
               <a:tblGrid>
-                <a:gridCol w="1645920"/>
-                <a:gridCol w="2377440"/>
-                <a:gridCol w="2926080"/>
-                <a:gridCol w="3779215"/>
+                <a:gridCol w="2011680"/>
+                <a:gridCol w="2560320"/>
+                <a:gridCol w="3291840"/>
+                <a:gridCol w="2864815"/>
               </a:tblGrid>
               <a:tr h="1120140">
                 <a:tc>
@@ -6382,14 +6387,14 @@
                     <a:lstStyle/>
                     <a:p>
                       <a:pPr>
-                        <a:defRPr sz="1000" b="1">
+                        <a:defRPr sz="950" b="1">
                           <a:solidFill>
                             <a:srgbClr val="F8FAFC"/>
                           </a:solidFill>
                         </a:defRPr>
                       </a:pPr>
                       <a:r>
-                        <a:t>Flight Decision Gate</a:t>
+                        <a:t>Environmental Stressor</a:t>
                       </a:r>
                     </a:p>
                   </a:txBody>
@@ -6405,14 +6410,14 @@
                     <a:lstStyle/>
                     <a:p>
                       <a:pPr>
-                        <a:defRPr sz="1000" b="1">
+                        <a:defRPr sz="950" b="1">
                           <a:solidFill>
                             <a:srgbClr val="F8FAFC"/>
                           </a:solidFill>
                         </a:defRPr>
                       </a:pPr>
                       <a:r>
-                        <a:t>Magnetic Field Telemetry</a:t>
+                        <a:t>Primary Cellular Target</a:t>
                       </a:r>
                     </a:p>
                   </a:txBody>
@@ -6428,14 +6433,14 @@
                     <a:lstStyle/>
                     <a:p>
                       <a:pPr>
-                        <a:defRPr sz="1000" b="1">
+                        <a:defRPr sz="950" b="1">
                           <a:solidFill>
                             <a:srgbClr val="F8FAFC"/>
                           </a:solidFill>
                         </a:defRPr>
                       </a:pPr>
                       <a:r>
-                        <a:t>Biological Metric Threshold</a:t>
+                        <a:t>Phenotypic Diagnostic Signature (Days 0–5)</a:t>
                       </a:r>
                     </a:p>
                   </a:txBody>
@@ -6451,14 +6456,14 @@
                     <a:lstStyle/>
                     <a:p>
                       <a:pPr>
-                        <a:defRPr sz="1000" b="1">
+                        <a:defRPr sz="950" b="1">
                           <a:solidFill>
                             <a:srgbClr val="F8FAFC"/>
                           </a:solidFill>
                         </a:defRPr>
                       </a:pPr>
                       <a:r>
-                        <a:t>Predeclared Operational Action</a:t>
+                        <a:t>Disambiguation Strategy</a:t>
                       </a:r>
                     </a:p>
                   </a:txBody>
@@ -6478,17 +6483,156 @@
                       <a:pPr>
                         <a:defRPr sz="900" b="1">
                           <a:solidFill>
+                            <a:srgbClr val="DC2626"/>
+                          </a:solidFill>
+                        </a:defRPr>
+                      </a:pPr>
+                      <a:r>
+                        <a:t>Near-Null Magnetic Field</a:t>
+                      </a:r>
+                    </a:p>
+                    <a:p>
+                      <a:r>
+                        <a:t>(NNMF, &lt; 10 nT)</a:t>
+                      </a:r>
+                    </a:p>
+                  </a:txBody>
+                  <a:tcPr anchor="ctr">
+                    <a:solidFill>
+                      <a:srgbClr val="FEF2F2"/>
+                    </a:solidFill>
+                  </a:tcPr>
+                </a:tc>
+                <a:tc>
+                  <a:txBody>
+                    <a:bodyPr/>
+                    <a:lstStyle/>
+                    <a:p>
+                      <a:pPr>
+                        <a:defRPr sz="850">
+                          <a:solidFill>
+                            <a:srgbClr val="0F172A"/>
+                          </a:solidFill>
+                        </a:defRPr>
+                      </a:pPr>
+                      <a:r>
+                        <a:t>Cryptochrome radical pairs</a:t>
+                      </a:r>
+                    </a:p>
+                    <a:p>
+                      <a:r>
+                        <a:t>[FAD•- ... TrpH•+];</a:t>
+                      </a:r>
+                    </a:p>
+                    <a:p>
+                      <a:r>
+                        <a:t>SDP1 triacylglycerol lipase.</a:t>
+                      </a:r>
+                    </a:p>
+                  </a:txBody>
+                  <a:tcPr anchor="ctr">
+                    <a:solidFill>
+                      <a:srgbClr val="F8FAFC"/>
+                    </a:solidFill>
+                  </a:tcPr>
+                </a:tc>
+                <a:tc>
+                  <a:txBody>
+                    <a:bodyPr/>
+                    <a:lstStyle/>
+                    <a:p>
+                      <a:pPr>
+                        <a:defRPr sz="800">
+                          <a:solidFill>
+                            <a:srgbClr val="0F172A"/>
+                          </a:solidFill>
+                        </a:defRPr>
+                      </a:pPr>
+                      <a:r>
+                        <a:t>• Emergence lag (Δt50 = +12–36 h)</a:t>
+                      </a:r>
+                    </a:p>
+                    <a:p>
+                      <a:r>
+                        <a:t>• 10%–30% capacity drop; chlorosis</a:t>
+                      </a:r>
+                    </a:p>
+                    <a:p>
+                      <a:r>
+                        <a:t>• Downregulated HEMA1/CHLH/POR</a:t>
+                      </a:r>
+                    </a:p>
+                    <a:p>
+                      <a:r>
+                        <a:t>• Mitochondrial AOX1D &amp; CAT3 leak</a:t>
+                      </a:r>
+                    </a:p>
+                    <a:p>
+                      <a:r>
+                        <a:t>• Minimal nuclear DNA breaks</a:t>
+                      </a:r>
+                    </a:p>
+                  </a:txBody>
+                  <a:tcPr anchor="ctr">
+                    <a:solidFill>
+                      <a:srgbClr val="F8FAFC"/>
+                    </a:solidFill>
+                  </a:tcPr>
+                </a:tc>
+                <a:tc>
+                  <a:txBody>
+                    <a:bodyPr/>
+                    <a:lstStyle/>
+                    <a:p>
+                      <a:pPr>
+                        <a:defRPr sz="819">
+                          <a:solidFill>
+                            <a:srgbClr val="0F172A"/>
+                          </a:solidFill>
+                        </a:defRPr>
+                      </a:pPr>
+                      <a:r>
+                        <a:t>• Reversible by in situ 45 µT vector re-application (causal rescue).</a:t>
+                      </a:r>
+                    </a:p>
+                    <a:p>
+                      <a:r>
+                        <a:t>• Insensitive to 1g spin centrifugation.</a:t>
+                      </a:r>
+                    </a:p>
+                    <a:p>
+                      <a:r>
+                        <a:t>• Correlates with 3-axis magnetometer canopy telemetry.</a:t>
+                      </a:r>
+                    </a:p>
+                  </a:txBody>
+                  <a:tcPr anchor="ctr">
+                    <a:solidFill>
+                      <a:srgbClr val="F8FAFC"/>
+                    </a:solidFill>
+                  </a:tcPr>
+                </a:tc>
+              </a:tr>
+              <a:tr h="1120140">
+                <a:tc>
+                  <a:txBody>
+                    <a:bodyPr/>
+                    <a:lstStyle/>
+                    <a:p>
+                      <a:pPr>
+                        <a:defRPr sz="900" b="1">
+                          <a:solidFill>
                             <a:srgbClr val="16A34A"/>
                           </a:solidFill>
                         </a:defRPr>
                       </a:pPr>
                       <a:r>
-                        <a:t>GREEN GATE</a:t>
+                        <a:t>Lunar Partial Gravity</a:t>
                       </a:r>
                     </a:p>
                     <a:p>
                       <a:r>
-                        <a:t>(Nominal Flight)</a:t>
+                        <a:t>(0.166 g) / Microgravity</a:t>
                       </a:r>
                     </a:p>
                   </a:txBody>
@@ -6504,30 +6648,30 @@
                     <a:lstStyle/>
                     <a:p>
                       <a:pPr>
-                        <a:defRPr sz="900">
+                        <a:defRPr sz="850">
                           <a:solidFill>
                             <a:srgbClr val="0F172A"/>
                           </a:solidFill>
                         </a:defRPr>
                       </a:pPr>
                       <a:r>
-                        <a:t>|B_total| &lt; 5.0 nT</a:t>
+                        <a:t>Amyloplast statolith sedimentation;</a:t>
                       </a:r>
                     </a:p>
                     <a:p>
                       <a:r>
-                        <a:t>Steady-state near-null field;</a:t>
+                        <a:t>Mechanosensitive ion channels (MSL/MCA);</a:t>
                       </a:r>
                     </a:p>
                     <a:p>
                       <a:r>
-                        <a:t>No lander EMI spikes (&gt;10 nT).</a:t>
+                        <a:t>PIN auxin carrier polarity.</a:t>
                       </a:r>
                     </a:p>
                   </a:txBody>
                   <a:tcPr anchor="ctr">
                     <a:solidFill>
-                      <a:srgbClr val="FFFFFF"/>
+                      <a:srgbClr val="F8FAFC"/>
                     </a:solidFill>
                   </a:tcPr>
                 </a:tc>
@@ -6537,30 +6681,40 @@
                     <a:lstStyle/>
                     <a:p>
                       <a:pPr>
-                        <a:defRPr sz="900">
+                        <a:defRPr sz="800">
                           <a:solidFill>
                             <a:srgbClr val="0F172A"/>
                           </a:solidFill>
                         </a:defRPr>
                       </a:pPr>
                       <a:r>
-                        <a:t>Germination Capacity ≥ 85%</a:t>
+                        <a:t>• Normal germination capacity</a:t>
                       </a:r>
                     </a:p>
                     <a:p>
                       <a:r>
-                        <a:t>Normal t50 emergence velocity;</a:t>
+                        <a:t>• Negligible emergence lag (Δt50 &lt; 4 h)</a:t>
                       </a:r>
                     </a:p>
                     <a:p>
                       <a:r>
-                        <a:t>Active hypocotyl greening.</a:t>
+                        <a:t>• Random root waving &amp; directional skewing</a:t>
+                      </a:r>
+                    </a:p>
+                    <a:p>
+                      <a:r>
+                        <a:t>• Normal plastid greening under PAR</a:t>
+                      </a:r>
+                    </a:p>
+                    <a:p>
+                      <a:r>
+                        <a:t>• Localized apoplastic ROS (RBOHD/F)</a:t>
                       </a:r>
                     </a:p>
                   </a:txBody>
                   <a:tcPr anchor="ctr">
                     <a:solidFill>
-                      <a:srgbClr val="FFFFFF"/>
+                      <a:srgbClr val="F8FAFC"/>
                     </a:solidFill>
                   </a:tcPr>
                 </a:tc>
@@ -6570,35 +6724,30 @@
                     <a:lstStyle/>
                     <a:p>
                       <a:pPr>
-                        <a:defRPr sz="900">
+                        <a:defRPr sz="819">
                           <a:solidFill>
                             <a:srgbClr val="0F172A"/>
                           </a:solidFill>
                         </a:defRPr>
                       </a:pPr>
                       <a:r>
-                        <a:t>Continue nominal autonomous flight timeline.</a:t>
+                        <a:t>• Fully rescued by onboard 1g centrifuge controls.</a:t>
                       </a:r>
                     </a:p>
                     <a:p>
                       <a:r>
-                        <a:t>• 10 Hz magnetometer logging.</a:t>
+                        <a:t>• Completely insensitive to static magnetic field manipulation.</a:t>
                       </a:r>
                     </a:p>
                     <a:p>
                       <a:r>
-                        <a:t>• 30-minute multispectral camera imaging.</a:t>
-                      </a:r>
-                    </a:p>
-                    <a:p>
-                      <a:r>
-                        <a:t>• Standard environmental controls.</a:t>
+                        <a:t>• Quantified via camera morphometry.</a:t>
                       </a:r>
                     </a:p>
                   </a:txBody>
                   <a:tcPr anchor="ctr">
                     <a:solidFill>
-                      <a:srgbClr val="FFFFFF"/>
+                      <a:srgbClr val="F8FAFC"/>
                     </a:solidFill>
                   </a:tcPr>
                 </a:tc>
@@ -6617,12 +6766,12 @@
                         </a:defRPr>
                       </a:pPr>
                       <a:r>
-                        <a:t>AMBER GATE</a:t>
+                        <a:t>Deep-Space Radiation</a:t>
                       </a:r>
                     </a:p>
                     <a:p>
                       <a:r>
-                        <a:t>(Investigation / Caution)</a:t>
+                        <a:t>(GCR / SPE)</a:t>
                       </a:r>
                     </a:p>
                   </a:txBody>
@@ -6638,30 +6787,30 @@
                     <a:lstStyle/>
                     <a:p>
                       <a:pPr>
-                        <a:defRPr sz="900">
+                        <a:defRPr sz="850">
                           <a:solidFill>
                             <a:srgbClr val="0F172A"/>
                           </a:solidFill>
                         </a:defRPr>
                       </a:pPr>
                       <a:r>
-                        <a:t>5.0 nT ≤ |B_total| ≤ 50 nT</a:t>
+                        <a:t>Direct nuclear DNA ionization;</a:t>
                       </a:r>
                     </a:p>
                     <a:p>
                       <a:r>
-                        <a:t>Intermittent lander DC ripple</a:t>
+                        <a:t>Radiolysis of H2O producing •OH;</a:t>
                       </a:r>
                     </a:p>
                     <a:p>
                       <a:r>
-                        <a:t>or unexpected local anomaly.</a:t>
+                        <a:t>Oxidation of Fe-S clusters.</a:t>
                       </a:r>
                     </a:p>
                   </a:txBody>
                   <a:tcPr anchor="ctr">
                     <a:solidFill>
-                      <a:srgbClr val="FFFFFF"/>
+                      <a:srgbClr val="F8FAFC"/>
                     </a:solidFill>
                   </a:tcPr>
                 </a:tc>
@@ -6671,30 +6820,40 @@
                     <a:lstStyle/>
                     <a:p>
                       <a:pPr>
-                        <a:defRPr sz="900">
+                        <a:defRPr sz="800">
                           <a:solidFill>
                             <a:srgbClr val="0F172A"/>
                           </a:solidFill>
                         </a:defRPr>
                       </a:pPr>
                       <a:r>
-                        <a:t>15% to 30% Emergence Delay</a:t>
+                        <a:t>• Emergence failure only at lethal doses</a:t>
                       </a:r>
                     </a:p>
                     <a:p>
                       <a:r>
-                        <a:t>(t50 lag &gt; 18 h) or mild seedling</a:t>
+                        <a:t>• Mitotic apical cell cycle arrest</a:t>
                       </a:r>
                     </a:p>
                     <a:p>
                       <a:r>
-                        <a:t>chlorosis detected.</a:t>
+                        <a:t>• Severe chromosomal aberrations</a:t>
+                      </a:r>
+                    </a:p>
+                    <a:p>
+                      <a:r>
+                        <a:t>• High γ-H2AX phosphorylated foci</a:t>
+                      </a:r>
+                    </a:p>
+                    <a:p>
+                      <a:r>
+                        <a:t>• Marked lipid peroxidation (MDA)</a:t>
                       </a:r>
                     </a:p>
                   </a:txBody>
                   <a:tcPr anchor="ctr">
                     <a:solidFill>
-                      <a:srgbClr val="FFFFFF"/>
+                      <a:srgbClr val="F8FAFC"/>
                     </a:solidFill>
                   </a:tcPr>
                 </a:tc>
@@ -6704,169 +6863,30 @@
                     <a:lstStyle/>
                     <a:p>
                       <a:pPr>
-                        <a:defRPr sz="900">
+                        <a:defRPr sz="819">
                           <a:solidFill>
                             <a:srgbClr val="0F172A"/>
                           </a:solidFill>
                         </a:defRPr>
                       </a:pPr>
                       <a:r>
-                        <a:t>Initiate secondary optical diagnostics.</a:t>
+                        <a:t>• Mitigated by passive polyethylene or water-wall shielding.</a:t>
                       </a:r>
                     </a:p>
                     <a:p>
                       <a:r>
-                        <a:t>• Command high-frequency imaging.</a:t>
+                        <a:t>• Independent of magnetic coils or centrifuges.</a:t>
                       </a:r>
                     </a:p>
                     <a:p>
                       <a:r>
-                        <a:t>• Cross-reference lander power bus telemetry.</a:t>
-                      </a:r>
-                    </a:p>
-                    <a:p>
-                      <a:r>
-                        <a:t>• Log potential electromagnetic interference.</a:t>
+                        <a:t>• Directly calibrated against active dosimeter telemetry (Gy).</a:t>
                       </a:r>
                     </a:p>
                   </a:txBody>
                   <a:tcPr anchor="ctr">
                     <a:solidFill>
-                      <a:srgbClr val="FFFFFF"/>
-                    </a:solidFill>
-                  </a:tcPr>
-                </a:tc>
-              </a:tr>
-              <a:tr h="1120140">
-                <a:tc>
-                  <a:txBody>
-                    <a:bodyPr/>
-                    <a:lstStyle/>
-                    <a:p>
-                      <a:pPr>
-                        <a:defRPr sz="900" b="1">
-                          <a:solidFill>
-                            <a:srgbClr val="DC2626"/>
-                          </a:solidFill>
-                        </a:defRPr>
-                      </a:pPr>
-                      <a:r>
-                        <a:t>RED GATE</a:t>
-                      </a:r>
-                    </a:p>
-                    <a:p>
-                      <a:r>
-                        <a:t>(Causal Intervention)</a:t>
-                      </a:r>
-                    </a:p>
-                  </a:txBody>
-                  <a:tcPr anchor="ctr">
-                    <a:solidFill>
-                      <a:srgbClr val="FEF2F2"/>
-                    </a:solidFill>
-                  </a:tcPr>
-                </a:tc>
-                <a:tc>
-                  <a:txBody>
-                    <a:bodyPr/>
-                    <a:lstStyle/>
-                    <a:p>
-                      <a:pPr>
-                        <a:defRPr sz="900">
-                          <a:solidFill>
-                            <a:srgbClr val="0F172A"/>
-                          </a:solidFill>
-                        </a:defRPr>
-                      </a:pPr>
-                      <a:r>
-                        <a:t>|B_total| &lt; 1.0 nT (Deep void)</a:t>
-                      </a:r>
-                    </a:p>
-                    <a:p>
-                      <a:r>
-                        <a:t>OR extreme uncontrolled</a:t>
-                      </a:r>
-                    </a:p>
-                    <a:p>
-                      <a:r>
-                        <a:t>EMI excursion (&gt;100 µT).</a:t>
-                      </a:r>
-                    </a:p>
-                  </a:txBody>
-                  <a:tcPr anchor="ctr">
-                    <a:solidFill>
-                      <a:srgbClr val="FFFFFF"/>
-                    </a:solidFill>
-                  </a:tcPr>
-                </a:tc>
-                <a:tc>
-                  <a:txBody>
-                    <a:bodyPr/>
-                    <a:lstStyle/>
-                    <a:p>
-                      <a:pPr>
-                        <a:defRPr sz="900">
-                          <a:solidFill>
-                            <a:srgbClr val="0F172A"/>
-                          </a:solidFill>
-                        </a:defRPr>
-                      </a:pPr>
-                      <a:r>
-                        <a:t>Germination Capacity Drop &gt; 30%</a:t>
-                      </a:r>
-                    </a:p>
-                    <a:p>
-                      <a:r>
-                        <a:t>or severe arrest of de-etiolation</a:t>
-                      </a:r>
-                    </a:p>
-                    <a:p>
-                      <a:r>
-                        <a:t>and visible chlorosis by Day 5.</a:t>
-                      </a:r>
-                    </a:p>
-                  </a:txBody>
-                  <a:tcPr anchor="ctr">
-                    <a:solidFill>
-                      <a:srgbClr val="FFFFFF"/>
-                    </a:solidFill>
-                  </a:tcPr>
-                </a:tc>
-                <a:tc>
-                  <a:txBody>
-                    <a:bodyPr/>
-                    <a:lstStyle/>
-                    <a:p>
-                      <a:pPr>
-                        <a:defRPr sz="900">
-                          <a:solidFill>
-                            <a:srgbClr val="0F172A"/>
-                          </a:solidFill>
-                        </a:defRPr>
-                      </a:pPr>
-                      <a:r>
-                        <a:t>EXECUTE ACTIVE CAUSAL RESCUE:</a:t>
-                      </a:r>
-                    </a:p>
-                    <a:p>
-                      <a:r>
-                        <a:t>• Energize 3-axis compensation coils to re-apply 45 µT vector.</a:t>
-                      </a:r>
-                    </a:p>
-                    <a:p>
-                      <a:r>
-                        <a:t>• Restore terrestrial geomagnetic conditions.</a:t>
-                      </a:r>
-                    </a:p>
-                    <a:p>
-                      <a:r>
-                        <a:t>• Evaluate rescue of post-emergence seedling vigor.</a:t>
-                      </a:r>
-                    </a:p>
-                  </a:txBody>
-                  <a:tcPr anchor="ctr">
-                    <a:solidFill>
-                      <a:srgbClr val="FFFFFF"/>
+                      <a:srgbClr val="F8FAFC"/>
                     </a:solidFill>
                   </a:tcPr>
                 </a:tc>

--- a/Near_Null_Magnetic_Fields_Lunar_Plant_Biology_Presentation.pptx
+++ b/Near_Null_Magnetic_Fields_Lunar_Plant_Biology_Presentation.pptx
@@ -711,27 +711,22 @@
           </a:p>
           <a:p>
             <a:r>
-              <a:t>• Figure 5 establishes our translational roadmap, strictly separating laboratory ground standards from flight engineering trade spaces.</a:t>
-            </a:r>
-          </a:p>
-          <a:p>
-            <a:r>
-              <a:t>• Panel (a) sets the 3-chamber ground standard: Chamber 1 (GMF control), Chamber 2 (Shielded/Cancelled NNMF), and Chamber 3 (Bifilar sham control matching current, heat, and vibration without magnetic fields).</a:t>
-            </a:r>
-          </a:p>
-          <a:p>
-            <a:r>
-              <a:t>• Panel (b) addresses a critical question from flight engineers: What can realistically be accommodated? We recommend passive 3-axis magnetometry (&lt;1 W, grams of mass) at the plant canopy level, while leaving heavy active cancellation coils in ground facilities.</a:t>
-            </a:r>
-          </a:p>
-          <a:p>
-            <a:r>
-              <a:t>• Panel (c) demonstrates in situ causal rescue: Restoring 45 µT inside magnetic shielding rescues emergence speed and pigment accumulation, definitively ruling out microclimatic or enclosure artifacts.</a:t>
-            </a:r>
-          </a:p>
-          <a:p>
-            <a:r>
-              <a:t>• Panel (d) introduces our post-flight phenotypic disambiguation framework to distinguish hypomagnetic effects from microgravity and cosmic radiation.</a:t>
+              <a:t>• Figure 5 establishes our translational roadmap, focusing on rigorous ground simulation methods and post-flight disambiguation.</a:t>
+            </a:r>
+          </a:p>
+          <a:p>
+            <a:r>
+              <a:t>• Panel (a) sets the 3-chamber ground standard: Chamber 1 (GMF terrestrial control), Chamber 2 (Shielded/Cancelled NNMF lunar simulation), and Chamber 3 (Bifilar sham control matching current, heat, and vibration without magnetic fields).</a:t>
+            </a:r>
+          </a:p>
+          <a:p>
+            <a:r>
+              <a:t>• Panel (b) demonstrates the gold-standard in situ causal reversal protocol: Restoring a calibrated 45 µT vector inside magnetic shielding rescues emergence speed and pigment accumulation, definitively ruling out microclimatic, ethylene, or enclosure artifacts.</a:t>
+            </a:r>
+          </a:p>
+          <a:p>
+            <a:r>
+              <a:t>• Panel (c) provides our post-flight phenotypic disambiguation framework: A full comparative matrix distinguishing hypomagnetic lesions from lunar partial gravity (0.166 g) and deep-space cosmic radiation (GCR) using specific cellular targets and diagnostic rescue strategies.</a:t>
             </a:r>
           </a:p>
         </p:txBody>
@@ -5734,7 +5729,7 @@
               </a:defRPr>
             </a:pPr>
             <a:r>
-              <a:t>Scientific Knowledge Gap Retirement &amp; Flight Trade Space</a:t>
+              <a:t>Ground Simulation Standards &amp; Post-Flight Disambiguation</a:t>
             </a:r>
           </a:p>
         </p:txBody>
@@ -5769,7 +5764,7 @@
               </a:defRPr>
             </a:pPr>
             <a:r>
-              <a:t>3-chamber ground controls, in situ causal rescue, flight payload constraints, and phenotypic disambiguation</a:t>
+              <a:t>3-chamber ground controls, in situ causal rescue proof-of-concept, and post-flight phenotypic disambiguation framework</a:t>
             </a:r>
           </a:p>
         </p:txBody>
@@ -5783,7 +5778,7 @@
         <p:spPr>
           <a:xfrm>
             <a:off x="731520" y="1600200"/>
-            <a:ext cx="5212080" cy="2240280"/>
+            <a:ext cx="5212080" cy="2194560"/>
           </a:xfrm>
           <a:prstGeom prst="roundRect">
             <a:avLst/>
@@ -5836,7 +5831,7 @@
         <p:spPr>
           <a:xfrm>
             <a:off x="822960" y="1920240"/>
-            <a:ext cx="5029200" cy="1856232"/>
+            <a:ext cx="5029200" cy="1810512"/>
           </a:xfrm>
           <a:prstGeom prst="rect">
             <a:avLst/>
@@ -5873,7 +5868,7 @@
               </a:defRPr>
             </a:pPr>
             <a:r>
-              <a:t>(a) Methodological Ground Simulation &amp; 3-Chamber Parity</a:t>
+              <a:t>(a) Methodological Ground Simulation Standards (3-Chamber Parity)</a:t>
             </a:r>
           </a:p>
         </p:txBody>
@@ -5887,7 +5882,7 @@
         <p:spPr>
           <a:xfrm>
             <a:off x="6248095" y="1600200"/>
-            <a:ext cx="5212080" cy="2240280"/>
+            <a:ext cx="5212080" cy="2194560"/>
           </a:xfrm>
           <a:prstGeom prst="roundRect">
             <a:avLst/>
@@ -5925,7 +5920,7 @@
       </p:sp>
       <p:pic>
         <p:nvPicPr>
-          <p:cNvPr id="9" name="Picture 8" descr="Fig5b_flight_telemetry.png"/>
+          <p:cNvPr id="9" name="Picture 8" descr="Fig5b_causal_rescue.png"/>
           <p:cNvPicPr>
             <a:picLocks noChangeAspect="1"/>
           </p:cNvPicPr>
@@ -5940,7 +5935,7 @@
         <p:spPr>
           <a:xfrm>
             <a:off x="6339535" y="1920240"/>
-            <a:ext cx="5029200" cy="1856232"/>
+            <a:ext cx="5029200" cy="1810512"/>
           </a:xfrm>
           <a:prstGeom prst="rect">
             <a:avLst/>
@@ -5977,7 +5972,7 @@
               </a:defRPr>
             </a:pPr>
             <a:r>
-              <a:t>(b) Flight Payload Trade Space: Science Gaps vs. Engineering Limits</a:t>
+              <a:t>(b) In Situ Causal Reversal Protocol (Proof of Concept)</a:t>
             </a:r>
           </a:p>
         </p:txBody>
@@ -5990,8 +5985,8 @@
         </p:nvSpPr>
         <p:spPr>
           <a:xfrm>
-            <a:off x="731520" y="4069080"/>
-            <a:ext cx="5212080" cy="2240280"/>
+            <a:off x="731520" y="3977639"/>
+            <a:ext cx="10728655" cy="2331720"/>
           </a:xfrm>
           <a:prstGeom prst="roundRect">
             <a:avLst/>
@@ -6029,7 +6024,7 @@
       </p:sp>
       <p:pic>
         <p:nvPicPr>
-          <p:cNvPr id="12" name="Picture 11" descr="Fig5c_causal_rescue.png"/>
+          <p:cNvPr id="12" name="Picture 11" descr="Fig5c_decision_matrix.png"/>
           <p:cNvPicPr>
             <a:picLocks noChangeAspect="1"/>
           </p:cNvPicPr>
@@ -6043,8 +6038,8 @@
         </p:blipFill>
         <p:spPr>
           <a:xfrm>
-            <a:off x="822960" y="4389120"/>
-            <a:ext cx="5029200" cy="1856232"/>
+            <a:off x="822960" y="4297679"/>
+            <a:ext cx="10545775" cy="1947672"/>
           </a:xfrm>
           <a:prstGeom prst="rect">
             <a:avLst/>
@@ -6059,8 +6054,8 @@
         </p:nvSpPr>
         <p:spPr>
           <a:xfrm>
-            <a:off x="868680" y="4114800"/>
-            <a:ext cx="5212080" cy="274320"/>
+            <a:off x="868680" y="4023359"/>
+            <a:ext cx="10728655" cy="274320"/>
           </a:xfrm>
           <a:prstGeom prst="rect">
             <a:avLst/>
@@ -6081,118 +6076,14 @@
               </a:defRPr>
             </a:pPr>
             <a:r>
-              <a:t>(c) In Situ Causal Rescue: 45 µT Vector Re-Application Proof</a:t>
-            </a:r>
-          </a:p>
-        </p:txBody>
-      </p:sp>
-      <p:sp>
-        <p:nvSpPr>
-          <p:cNvPr id="14" name="Rounded Rectangle 13"/>
-          <p:cNvSpPr/>
-          <p:nvPr/>
-        </p:nvSpPr>
-        <p:spPr>
-          <a:xfrm>
-            <a:off x="6248095" y="4069080"/>
-            <a:ext cx="5212080" cy="2240280"/>
-          </a:xfrm>
-          <a:prstGeom prst="roundRect">
-            <a:avLst/>
-          </a:prstGeom>
-          <a:solidFill>
-            <a:srgbClr val="FFFFFF"/>
-          </a:solidFill>
-          <a:ln w="12700">
-            <a:solidFill>
-              <a:srgbClr val="E2E8F0"/>
-            </a:solidFill>
-          </a:ln>
-        </p:spPr>
-        <p:style>
-          <a:lnRef idx="1">
-            <a:schemeClr val="accent1"/>
-          </a:lnRef>
-          <a:fillRef idx="3">
-            <a:schemeClr val="accent1"/>
-          </a:fillRef>
-          <a:effectRef idx="2">
-            <a:schemeClr val="accent1"/>
-          </a:effectRef>
-          <a:fontRef idx="minor">
-            <a:schemeClr val="lt1"/>
-          </a:fontRef>
-        </p:style>
-        <p:txBody>
-          <a:bodyPr rtlCol="0" anchor="ctr"/>
-          <a:lstStyle/>
-          <a:p>
-            <a:pPr algn="ctr"/>
-          </a:p>
-        </p:txBody>
-      </p:sp>
-      <p:pic>
-        <p:nvPicPr>
-          <p:cNvPr id="15" name="Picture 14" descr="Fig5d_decision_matrix.png"/>
-          <p:cNvPicPr>
-            <a:picLocks noChangeAspect="1"/>
-          </p:cNvPicPr>
-          <p:nvPr/>
-        </p:nvPicPr>
-        <p:blipFill>
-          <a:blip r:embed="rId5"/>
-          <a:stretch>
-            <a:fillRect/>
-          </a:stretch>
-        </p:blipFill>
-        <p:spPr>
-          <a:xfrm>
-            <a:off x="6339535" y="4389120"/>
-            <a:ext cx="5029200" cy="1856232"/>
-          </a:xfrm>
-          <a:prstGeom prst="rect">
-            <a:avLst/>
-          </a:prstGeom>
-        </p:spPr>
-      </p:pic>
-      <p:sp>
-        <p:nvSpPr>
-          <p:cNvPr id="16" name="TextBox 15"/>
-          <p:cNvSpPr txBox="1"/>
-          <p:nvPr/>
-        </p:nvSpPr>
-        <p:spPr>
-          <a:xfrm>
-            <a:off x="6385255" y="4114800"/>
-            <a:ext cx="5212080" cy="274320"/>
-          </a:xfrm>
-          <a:prstGeom prst="rect">
-            <a:avLst/>
-          </a:prstGeom>
-          <a:noFill/>
-        </p:spPr>
-        <p:txBody>
-          <a:bodyPr wrap="none">
-            <a:spAutoFit/>
-          </a:bodyPr>
-          <a:lstStyle/>
-          <a:p>
-            <a:pPr>
-              <a:defRPr sz="900" b="1">
-                <a:solidFill>
-                  <a:srgbClr val="0284C7"/>
-                </a:solidFill>
-              </a:defRPr>
-            </a:pPr>
-            <a:r>
-              <a:t>(d) Post-Flight Phenotypic Disambiguation Framework</a:t>
-            </a:r>
-          </a:p>
-        </p:txBody>
-      </p:sp>
-      <p:sp>
-        <p:nvSpPr>
-          <p:cNvPr id="17" name="TextBox 16"/>
+              <a:t>(c) Post-Flight Phenotypic Risk Disambiguation Framework (Comparative Matrix)</a:t>
+            </a:r>
+          </a:p>
+        </p:txBody>
+      </p:sp>
+      <p:sp>
+        <p:nvSpPr>
+          <p:cNvPr id="14" name="TextBox 13"/>
           <p:cNvSpPr txBox="1"/>
           <p:nvPr/>
         </p:nvSpPr>

--- a/Near_Null_Magnetic_Fields_Lunar_Plant_Biology_Presentation.pptx
+++ b/Near_Null_Magnetic_Fields_Lunar_Plant_Biology_Presentation.pptx
@@ -721,7 +721,7 @@
           </a:p>
           <a:p>
             <a:r>
-              <a:t>• Panel (b) demonstrates the gold-standard in situ causal reversal protocol: Restoring a calibrated 45 µT vector inside magnetic shielding rescues emergence speed and pigment accumulation, definitively ruling out microclimatic, ethylene, or enclosure artifacts.</a:t>
+              <a:t>• Panel (b) introduces our hardware self-magnetic assessment protocol: Characterizing induced magnetic fields across subsystem operating states (LED PAR lighting, fluidic pumps, thermal heaters, and avionics bus) to establish empirical transfer functions that subtract hardware self-fields without requiring active coils in flight.</a:t>
             </a:r>
           </a:p>
           <a:p>
@@ -5920,7 +5920,7 @@
       </p:sp>
       <p:pic>
         <p:nvPicPr>
-          <p:cNvPr id="9" name="Picture 8" descr="Fig5b_causal_rescue.png"/>
+          <p:cNvPr id="9" name="Picture 8" descr="Fig5b_hardware_assessment.png"/>
           <p:cNvPicPr>
             <a:picLocks noChangeAspect="1"/>
           </p:cNvPicPr>
@@ -5972,7 +5972,7 @@
               </a:defRPr>
             </a:pPr>
             <a:r>
-              <a:t>(b) In Situ Causal Reversal Protocol (Proof of Concept)</a:t>
+              <a:t>(b) Hardware Self-Magnetic Assessment Protocol (Power-State Mapping)</a:t>
             </a:r>
           </a:p>
         </p:txBody>

--- a/Near_Null_Magnetic_Fields_Lunar_Plant_Biology_Presentation.pptx
+++ b/Near_Null_Magnetic_Fields_Lunar_Plant_Biology_Presentation.pptx
@@ -20,6 +20,7 @@
     <p:sldId id="268" r:id="rId20"/>
     <p:sldId id="269" r:id="rId21"/>
     <p:sldId id="270" r:id="rId22"/>
+    <p:sldId id="271" r:id="rId23"/>
   </p:sldIdLst>
   <p:sldSz cx="12191695" cy="6858000" type="screen4x3"/>
   <p:notesSz cx="6858000" cy="9144000"/>
@@ -606,37 +607,42 @@
           <a:lstStyle/>
           <a:p>
             <a:r>
-              <a:t>TALKING POINTS (SLIDE 10 - FIGURE 4 DEEP DIVE):</a:t>
-            </a:r>
-          </a:p>
-          <a:p>
-            <a:r>
-              <a:t>• This cross-kingdom connection is one of the most exciting takeaways of our review paper.</a:t>
-            </a:r>
-          </a:p>
-          <a:p>
-            <a:r>
-              <a:t>• In 2020, Afshinnekoo and a large international team published a landmark paper in Cell analyzing 29 spaceflight omics datasets.</a:t>
-            </a:r>
-          </a:p>
-          <a:p>
-            <a:r>
-              <a:t>• They found that whether you look at astronaut muscle, liver, immune cells, or mouse models, mitochondrial dysregulation is the central master biomarker of spaceflight stress.</a:t>
-            </a:r>
-          </a:p>
-          <a:p>
-            <a:r>
-              <a:t>• In plants, mitochondria face the exact same problem: hypobaric atmospheres, radiation, and near-null magnetic fields all force electron leakage at Complexes I and III.</a:t>
-            </a:r>
-          </a:p>
-          <a:p>
-            <a:r>
-              <a:t>• Plants survive this using Alternative Oxidase (AOX1D), which vents excess electrons. Humans do not have AOX, and therefore suffer severe mitochondrial oxidative damage.</a:t>
-            </a:r>
-          </a:p>
-          <a:p>
-            <a:r>
-              <a:t>• This elevates plant space biology from an isolated agricultural study to a fundamental pillar of comparative space bioenergetics.</a:t>
+              <a:t>TALKING POINTS (SLIDE 9 - FIGURE 4 MONTAGE):</a:t>
+            </a:r>
+          </a:p>
+          <a:p>
+            <a:r>
+              <a:t>• Figure 4 brings together the environmental multi-stressor nexus.</a:t>
+            </a:r>
+          </a:p>
+          <a:p>
+            <a:r>
+              <a:t>• In real exploration missions, plants will not experience hypomagnetic fields in isolation. They will face them simultaneously with NASA's exploration atmosphere (56.5 kPa / 8.2 psia, 34% O2, and 1200–3000 ppm CO2) and chronic GCR radiation.</a:t>
+            </a:r>
+          </a:p>
+          <a:p>
+            <a:r>
+              <a:t>• Panel (a) contrasts these baseline environmental parameters.</a:t>
+            </a:r>
+          </a:p>
+          <a:p>
+            <a:r>
+              <a:t>• Panel (b) shows how these stressors interact at the biochemical level. Elevated CO2 suppresses RuBisCO oxygenation, shutting down peroxisomal H2O2 production. That shifts the electron burden onto mitochondria. When the ubiquinone pool becomes over-reduced, electrons leak, forming superoxide.</a:t>
+            </a:r>
+          </a:p>
+          <a:p>
+            <a:r>
+              <a:t>• Alternative Oxidase (AOX1D) acts as an uncoupled safety valve, directly dumping electrons to oxygen without ATP synthesis to prevent ROS bursts.</a:t>
+            </a:r>
+          </a:p>
+          <a:p>
+            <a:r>
+              <a:t>• In Panel (c), we validate this empirically: NASA OSDR dataset OSD-782 (ionizing radiation) and Parmagnani 2022 (near-null magnetic field) show concordant upregulation of AOX1D and CAT3.</a:t>
+            </a:r>
+          </a:p>
+          <a:p>
+            <a:r>
+              <a:t>• Panel (d) reveals the profound cross-kingdom parallel: human astronauts in the NASA Twins Study and Cell 2020 multi-omics exhibit the exact same mitochondrial stress phenotype!</a:t>
             </a:r>
           </a:p>
         </p:txBody>
@@ -706,27 +712,37 @@
           <a:lstStyle/>
           <a:p>
             <a:r>
-              <a:t>TALKING POINTS (SLIDE 11 - FIGURE 5 MONTAGE):</a:t>
-            </a:r>
-          </a:p>
-          <a:p>
-            <a:r>
-              <a:t>• Figure 5 establishes our translational roadmap, focusing on rigorous ground simulation methods and post-flight disambiguation.</a:t>
-            </a:r>
-          </a:p>
-          <a:p>
-            <a:r>
-              <a:t>• Panel (a) sets the 3-chamber ground standard: Chamber 1 (GMF terrestrial control), Chamber 2 (Shielded/Cancelled NNMF lunar simulation), and Chamber 3 (Bifilar sham control matching current, heat, and vibration without magnetic fields).</a:t>
-            </a:r>
-          </a:p>
-          <a:p>
-            <a:r>
-              <a:t>• Panel (b) introduces our hardware self-magnetic assessment protocol: Characterizing induced magnetic fields across subsystem operating states (LED PAR lighting, fluidic pumps, thermal heaters, and avionics bus) to establish empirical transfer functions that subtract hardware self-fields without requiring active coils in flight.</a:t>
-            </a:r>
-          </a:p>
-          <a:p>
-            <a:r>
-              <a:t>• Panel (c) provides our post-flight phenotypic disambiguation framework: A full comparative matrix distinguishing hypomagnetic lesions from lunar partial gravity (0.166 g) and deep-space cosmic radiation (GCR) using specific cellular targets and diagnostic rescue strategies.</a:t>
+              <a:t>TALKING POINTS (SLIDE 10 - FIGURE 4 DEEP DIVE):</a:t>
+            </a:r>
+          </a:p>
+          <a:p>
+            <a:r>
+              <a:t>• This cross-kingdom connection is one of the most exciting takeaways of our review paper.</a:t>
+            </a:r>
+          </a:p>
+          <a:p>
+            <a:r>
+              <a:t>• In 2020, Afshinnekoo and a large international team published a landmark paper in Cell analyzing 29 spaceflight omics datasets.</a:t>
+            </a:r>
+          </a:p>
+          <a:p>
+            <a:r>
+              <a:t>• They found that whether you look at astronaut muscle, liver, immune cells, or mouse models, mitochondrial dysregulation is the central master biomarker of spaceflight stress.</a:t>
+            </a:r>
+          </a:p>
+          <a:p>
+            <a:r>
+              <a:t>• In plants, mitochondria face the exact same problem: hypobaric atmospheres, radiation, and near-null magnetic fields all force electron leakage at Complexes I and III.</a:t>
+            </a:r>
+          </a:p>
+          <a:p>
+            <a:r>
+              <a:t>• Plants survive this using Alternative Oxidase (AOX1D), which vents excess electrons. Humans do not have AOX, and therefore suffer severe mitochondrial oxidative damage.</a:t>
+            </a:r>
+          </a:p>
+          <a:p>
+            <a:r>
+              <a:t>• This elevates plant space biology from an isolated agricultural study to a fundamental pillar of comparative space bioenergetics.</a:t>
             </a:r>
           </a:p>
         </p:txBody>
@@ -796,42 +812,27 @@
           <a:lstStyle/>
           <a:p>
             <a:r>
-              <a:t>TALKING POINTS (SLIDE 12 - PHENOTYPIC DISAMBIGUATION MATRIX):</a:t>
-            </a:r>
-          </a:p>
-          <a:p>
-            <a:r>
-              <a:t>• This table represents our key translational science recommendation for Artemis payloads and lunar greenhouses.</a:t>
-            </a:r>
-          </a:p>
-          <a:p>
-            <a:r>
-              <a:t>• When plants show stress on the lunar surface, how do we know if it was hypomagnetic stress, partial gravity (0.166 g), or radiation?</a:t>
-            </a:r>
-          </a:p>
-          <a:p>
-            <a:r>
-              <a:t>• This matrix provides unambiguous diagnostic markers:</a:t>
-            </a:r>
-          </a:p>
-          <a:p>
-            <a:r>
-              <a:t>  1. Hypomagnetic field delays emergence velocity (Δt50 = +12–36 h), represses chlorophyll/anthocyanin synthesis via cryptochromes, and triggers mitochondrial AOX1D without nuclear DNA damage. In ground controls, it is fully rescued by a 45 µT vector.</a:t>
-            </a:r>
-          </a:p>
-          <a:p>
-            <a:r>
-              <a:t>  2. Lunar partial gravity causes directional skewing and cell wall changes, but germination rate and greening are normal. It is rescued by a 1g centrifuge, but unaffected by magnetic fields.</a:t>
-            </a:r>
-          </a:p>
-          <a:p>
-            <a:r>
-              <a:t>  3. Radiation causes double-strand DNA breaks and γ-H2AX foci, which are independent of magnetic fields or gravity.</a:t>
-            </a:r>
-          </a:p>
-          <a:p>
-            <a:r>
-              <a:t>• This framework replaces arbitrary mission abort criteria with a rigorous post-flight diagnostic methodology.</a:t>
+              <a:t>TALKING POINTS (SLIDE 11 - FIGURE 5 MONTAGE):</a:t>
+            </a:r>
+          </a:p>
+          <a:p>
+            <a:r>
+              <a:t>• Figure 5 establishes our translational roadmap, focusing on rigorous ground simulation methods and post-flight disambiguation.</a:t>
+            </a:r>
+          </a:p>
+          <a:p>
+            <a:r>
+              <a:t>• Panel (a) sets the 3-chamber ground standard: Chamber 1 (GMF terrestrial control), Chamber 2 (Shielded/Cancelled NNMF lunar simulation), and Chamber 3 (Bifilar sham control matching current, heat, and vibration without magnetic fields).</a:t>
+            </a:r>
+          </a:p>
+          <a:p>
+            <a:r>
+              <a:t>• Panel (b) introduces our hardware self-magnetic assessment protocol: Characterizing induced magnetic fields across subsystem operating states (LED PAR lighting, fluidic pumps, thermal heaters, and avionics bus) to establish empirical transfer functions that subtract hardware self-fields without requiring active coils in flight.</a:t>
+            </a:r>
+          </a:p>
+          <a:p>
+            <a:r>
+              <a:t>• Panel (c) provides our post-flight phenotypic disambiguation framework: A full comparative matrix distinguishing hypomagnetic lesions from lunar partial gravity (0.166 g) and deep-space cosmic radiation (GCR) using specific cellular targets and diagnostic rescue strategies.</a:t>
             </a:r>
           </a:p>
         </p:txBody>
@@ -901,27 +902,42 @@
           <a:lstStyle/>
           <a:p>
             <a:r>
-              <a:t>TALKING POINTS (SLIDE 13 - GRAPHICAL ABSTRACT):</a:t>
-            </a:r>
-          </a:p>
-          <a:p>
-            <a:r>
-              <a:t>• If you have only two minutes to pitch this paper to an executive or conference audience, this slide tells the entire story.</a:t>
-            </a:r>
-          </a:p>
-          <a:p>
-            <a:r>
-              <a:t>• Panel 1 (The Lunar Reality): As missions travel beyond low Earth orbit to the Moon, ambient magnetic fields collapse from Earth's 50 µT to less than 0.8 nT at Artemis South Pole sites. This variable is currently unmonitored in flight payloads.</a:t>
-            </a:r>
-          </a:p>
-          <a:p>
-            <a:r>
-              <a:t>• Panel 2 (The 0–5 Day Vulnerability): Removal of the geomagnetic field causes delayed water uptake, a 12–36 hour emergence velocity lag, a 28% biomass yield loss, and cryptochrome-driven chlorosis.</a:t>
-            </a:r>
-          </a:p>
-          <a:p>
-            <a:r>
-              <a:t>• Panel 3 (The Solution): We establish a standard flight risk-retirement protocol: in-situ 3-axis magnetometry, 3-chamber ground controls, active causal rescue coils, and predeclared Green/Amber/Red operational decision gates.</a:t>
+              <a:t>TALKING POINTS (SLIDE 12 - PHENOTYPIC DISAMBIGUATION MATRIX):</a:t>
+            </a:r>
+          </a:p>
+          <a:p>
+            <a:r>
+              <a:t>• This table represents our key translational science recommendation for Artemis payloads and lunar greenhouses.</a:t>
+            </a:r>
+          </a:p>
+          <a:p>
+            <a:r>
+              <a:t>• When plants show stress on the lunar surface, how do we know if it was hypomagnetic stress, partial gravity (0.166 g), or radiation?</a:t>
+            </a:r>
+          </a:p>
+          <a:p>
+            <a:r>
+              <a:t>• This matrix provides unambiguous diagnostic markers:</a:t>
+            </a:r>
+          </a:p>
+          <a:p>
+            <a:r>
+              <a:t>  1. Hypomagnetic field delays emergence velocity (Δt50 = +12–36 h), represses chlorophyll/anthocyanin synthesis via cryptochromes, and triggers mitochondrial AOX1D without nuclear DNA damage. In ground controls, it is fully rescued by a 45 µT vector.</a:t>
+            </a:r>
+          </a:p>
+          <a:p>
+            <a:r>
+              <a:t>  2. Lunar partial gravity causes directional skewing and cell wall changes, but germination rate and greening are normal. It is rescued by a 1g centrifuge, but unaffected by magnetic fields.</a:t>
+            </a:r>
+          </a:p>
+          <a:p>
+            <a:r>
+              <a:t>  3. Radiation causes double-strand DNA breaks and γ-H2AX foci, which are independent of magnetic fields or gravity.</a:t>
+            </a:r>
+          </a:p>
+          <a:p>
+            <a:r>
+              <a:t>• This framework replaces arbitrary mission abort criteria with a rigorous post-flight diagnostic methodology.</a:t>
             </a:r>
           </a:p>
         </p:txBody>
@@ -991,32 +1007,27 @@
           <a:lstStyle/>
           <a:p>
             <a:r>
-              <a:t>TALKING POINTS (SLIDE 14 - DISCUSSION &amp; ROADMAP):</a:t>
-            </a:r>
-          </a:p>
-          <a:p>
-            <a:r>
-              <a:t>• Now I'd like to open up the floor to the group for discussion around these three strategic questions.</a:t>
-            </a:r>
-          </a:p>
-          <a:p>
-            <a:r>
-              <a:t>• First: Hardware integration. In LEAF, space is tight. Can we place miniature commercial fluxgate sensors inside the cassette volume, or should they be mounted externally with a calibrated transfer function?</a:t>
-            </a:r>
-          </a:p>
-          <a:p>
-            <a:r>
-              <a:t>• Second: Genetic tolerance and seed priming. Are there specific cultivars that don't suffer the 28% biomass deficit? Can we prime seeds on Earth with specific magnetic exposures prior to launch?</a:t>
-            </a:r>
-          </a:p>
-          <a:p>
-            <a:r>
-              <a:t>• Third: Future lunar infrastructure. If long-term lunar greenhouses are built at Shackleton Crater, should active magnetic coils be part of the baseline environmental control system alongside lighting and HVAC?</a:t>
-            </a:r>
-          </a:p>
-          <a:p>
-            <a:r>
-              <a:t>• Let's hear your thoughts.</a:t>
+              <a:t>TALKING POINTS (SLIDE 13 - GRAPHICAL ABSTRACT):</a:t>
+            </a:r>
+          </a:p>
+          <a:p>
+            <a:r>
+              <a:t>• If you have only two minutes to pitch this paper to an executive or conference audience, this slide tells the entire story.</a:t>
+            </a:r>
+          </a:p>
+          <a:p>
+            <a:r>
+              <a:t>• Panel 1 (The Lunar Reality): As missions travel beyond low Earth orbit to the Moon, ambient magnetic fields collapse from Earth's 50 µT to less than 0.8 nT at Artemis South Pole sites. This variable is currently unmonitored in flight payloads.</a:t>
+            </a:r>
+          </a:p>
+          <a:p>
+            <a:r>
+              <a:t>• Panel 2 (The 0–5 Day Vulnerability): Removal of the geomagnetic field causes delayed water uptake, a 12–36 hour emergence velocity lag, a 28% biomass yield loss, and cryptochrome-driven chlorosis.</a:t>
+            </a:r>
+          </a:p>
+          <a:p>
+            <a:r>
+              <a:t>• Panel 3 (The Solution): We establish a standard flight risk-retirement protocol: in-situ 3-axis magnetometry, 3-chamber ground controls, active causal rescue coils, and predeclared Green/Amber/Red operational decision gates.</a:t>
             </a:r>
           </a:p>
         </p:txBody>
@@ -1086,6 +1097,101 @@
           <a:lstStyle/>
           <a:p>
             <a:r>
+              <a:t>TALKING POINTS (SLIDE 14 - DISCUSSION &amp; ROADMAP):</a:t>
+            </a:r>
+          </a:p>
+          <a:p>
+            <a:r>
+              <a:t>• Now I'd like to open up the floor to the group for discussion around these three strategic questions.</a:t>
+            </a:r>
+          </a:p>
+          <a:p>
+            <a:r>
+              <a:t>• First: Hardware integration. In LEAF, space is tight. Can we place miniature commercial fluxgate sensors inside the cassette volume, or should they be mounted externally with a calibrated transfer function?</a:t>
+            </a:r>
+          </a:p>
+          <a:p>
+            <a:r>
+              <a:t>• Second: Genetic tolerance and seed priming. Are there specific cultivars that don't suffer the 28% biomass deficit? Can we prime seeds on Earth with specific magnetic exposures prior to launch?</a:t>
+            </a:r>
+          </a:p>
+          <a:p>
+            <a:r>
+              <a:t>• Third: Future lunar infrastructure. If long-term lunar greenhouses are built at Shackleton Crater, should active magnetic coils be part of the baseline environmental control system alongside lighting and HVAC?</a:t>
+            </a:r>
+          </a:p>
+          <a:p>
+            <a:r>
+              <a:t>• Let's hear your thoughts.</a:t>
+            </a:r>
+          </a:p>
+        </p:txBody>
+      </p:sp>
+      <p:sp>
+        <p:nvSpPr>
+          <p:cNvPr id="4" name="Slide Number Placeholder 3"/>
+          <p:cNvSpPr>
+            <a:spLocks noGrp="1"/>
+          </p:cNvSpPr>
+          <p:nvPr>
+            <p:ph type="sldNum" idx="5" sz="quarter"/>
+          </p:nvPr>
+        </p:nvSpPr>
+        <p:spPr/>
+      </p:sp>
+    </p:spTree>
+  </p:cSld>
+  <p:clrMapOvr>
+    <a:masterClrMapping/>
+  </p:clrMapOvr>
+</p:notes>
+</file>
+
+<file path=ppt/notesSlides/notesSlide16.xml><?xml version="1.0" encoding="utf-8"?>
+<p:notes xmlns:a="http://schemas.openxmlformats.org/drawingml/2006/main" xmlns:p="http://schemas.openxmlformats.org/presentationml/2006/main" xmlns:r="http://schemas.openxmlformats.org/officeDocument/2006/relationships">
+  <p:cSld>
+    <p:spTree>
+      <p:nvGrpSpPr>
+        <p:cNvPr id="1" name=""/>
+        <p:cNvGrpSpPr/>
+        <p:nvPr/>
+      </p:nvGrpSpPr>
+      <p:grpSpPr>
+        <a:xfrm>
+          <a:off x="0" y="0"/>
+          <a:ext cx="0" cy="0"/>
+          <a:chOff x="0" y="0"/>
+          <a:chExt cx="0" cy="0"/>
+        </a:xfrm>
+      </p:grpSpPr>
+      <p:sp>
+        <p:nvSpPr>
+          <p:cNvPr id="2" name="Slide Image Placeholder 1"/>
+          <p:cNvSpPr>
+            <a:spLocks noGrp="1"/>
+          </p:cNvSpPr>
+          <p:nvPr>
+            <p:ph type="sldImg" idx="2"/>
+          </p:nvPr>
+        </p:nvSpPr>
+        <p:spPr/>
+      </p:sp>
+      <p:sp>
+        <p:nvSpPr>
+          <p:cNvPr id="3" name="Notes Placeholder 2"/>
+          <p:cNvSpPr>
+            <a:spLocks noGrp="1"/>
+          </p:cNvSpPr>
+          <p:nvPr>
+            <p:ph type="body" idx="3" sz="quarter"/>
+          </p:nvPr>
+        </p:nvSpPr>
+        <p:spPr/>
+        <p:txBody>
+          <a:bodyPr/>
+          <a:lstStyle/>
+          <a:p>
+            <a:r>
               <a:t>TALKING POINTS (SLIDE 15 - APPENDIX &amp; OPEN SCIENCE):</a:t>
             </a:r>
           </a:p>
@@ -1486,32 +1592,37 @@
           <a:lstStyle/>
           <a:p>
             <a:r>
-              <a:t>TALKING POINTS (SLIDE 5 - FIGURE 2 MONTAGE):</a:t>
-            </a:r>
-          </a:p>
-          <a:p>
-            <a:r>
-              <a:t>• Figure 2 focuses on the biological core of the paper: the first 5 days of growth (0–120 hours).</a:t>
-            </a:r>
-          </a:p>
-          <a:p>
-            <a:r>
-              <a:t>• Panel (a) breaks down the developmental timeline into 4 distinct phases: Phase I imbibition (0–12 h), Phase II peroxisomal catabolism (12–48 h), Phase III radicle emergence (48–72 h), and Phase IV de-etiolation and autotrophic greening (72–120 h).</a:t>
-            </a:r>
-          </a:p>
-          <a:p>
-            <a:r>
-              <a:t>• Panel (b) shows empirical germination kinetics. Under near-null magnetic fields, two critical defects occur: first, the total number of germinated seeds drops by 10–30%; second, the emergence speed (t50) is delayed by 12–36 hours.</a:t>
-            </a:r>
-          </a:p>
-          <a:p>
-            <a:r>
-              <a:t>• Panel (c) shows the vegetative yield consequences: radicle elongation is reduced by 33%, hypocotyl height by 31%, and total fresh/dry biomass by 28.5% on Day 5.</a:t>
-            </a:r>
-          </a:p>
-          <a:p>
-            <a:r>
-              <a:t>• Panel (d) maps the molecular pathway: cryptochromes perceive blue light and form radical pairs. Under near-null fields, HY5 transcription factor stabilization is impaired, downregulating rate-limiting chlorophyll genes (HEMA1, POR) and anthocyanin genes (CHS, CHI), creating severe seedling chlorosis.</a:t>
+              <a:t>TALKING POINTS (SLIDE 5 - INTEGRATIVE REVIEW METHODOLOGY):</a:t>
+            </a:r>
+          </a:p>
+          <a:p>
+            <a:r>
+              <a:t>• Before diving into the plant developmental phenotypes, this slide establishes our formal review methodology.</a:t>
+            </a:r>
+          </a:p>
+          <a:p>
+            <a:r>
+              <a:t>• Following the Scale for the Assessment of Narrative Review Articles (SANRA) guidelines, we structured this work as an Integrative Review.</a:t>
+            </a:r>
+          </a:p>
+          <a:p>
+            <a:r>
+              <a:t>• On the left panel (a), notice our conceptual framework: we formulate 4 research questions spanning from planetary geophysics to quantum radical pairs.</a:t>
+            </a:r>
+          </a:p>
+          <a:p>
+            <a:r>
+              <a:t>• On the right panel (b), our PRISMA/SANRA-compliant flow diagram documents the rigorous screening process: we surveyed 1,428 database records across PubMed, Web of Science, Scopus, Europe PMC, and NASA OSDR, plus 6 primary repositories.</a:t>
+            </a:r>
+          </a:p>
+          <a:p>
+            <a:r>
+              <a:t>• After deduplication and screening against explicit inclusion/exclusion criteria, 80 audited peer-reviewed publications and 6 public datasets were synthesized.</a:t>
+            </a:r>
+          </a:p>
+          <a:p>
+            <a:r>
+              <a:t>• All non-linear Weibull and logistic germination kinetics, vector superposition equations, and multi-omics gene overlap matrices were executed using our open-source Python package on GitHub and Zenodo.</a:t>
             </a:r>
           </a:p>
         </p:txBody>
@@ -1581,32 +1692,32 @@
           <a:lstStyle/>
           <a:p>
             <a:r>
-              <a:t>TALKING POINTS (SLIDE 6 - FIGURE 2 DEEP DIVE):</a:t>
-            </a:r>
-          </a:p>
-          <a:p>
-            <a:r>
-              <a:t>• Why does a delay of 12 to 36 hours in germination matter on the Moon?</a:t>
-            </a:r>
-          </a:p>
-          <a:p>
-            <a:r>
-              <a:t>• In field agriculture on Earth, seeds have excess time and buffer. In a tightly scheduled spaceflight payload like LEAF on Artemis III, or a lunar greenhouse, mission timelines are strictly constrained.</a:t>
-            </a:r>
-          </a:p>
-          <a:p>
-            <a:r>
-              <a:t>• LEAF is designed for a nominal mission duration of around 7 to 10 days. If seed germination is delayed by 36 hours, you lose 30% to 50% of your autotrophic growth window!</a:t>
-            </a:r>
-          </a:p>
-          <a:p>
-            <a:r>
-              <a:t>• Furthermore, at the cellular level, near-null fields reduce cell division in the root apical meristem and disrupt PIN2 auxin carriers. That means roots grow slower, are more disoriented, and absorb water and nutrients less efficiently.</a:t>
-            </a:r>
-          </a:p>
-          <a:p>
-            <a:r>
-              <a:t>• The resulting 28% drop in biomass is not an academic curiosity—it is a direct hit to the caloric and nutrient yield of space crops.</a:t>
+              <a:t>TALKING POINTS (SLIDE 5 - FIGURE 2 MONTAGE):</a:t>
+            </a:r>
+          </a:p>
+          <a:p>
+            <a:r>
+              <a:t>• Figure 2 focuses on the biological core of the paper: the first 5 days of growth (0–120 hours).</a:t>
+            </a:r>
+          </a:p>
+          <a:p>
+            <a:r>
+              <a:t>• Panel (a) breaks down the developmental timeline into 4 distinct phases: Phase I imbibition (0–12 h), Phase II peroxisomal catabolism (12–48 h), Phase III radicle emergence (48–72 h), and Phase IV de-etiolation and autotrophic greening (72–120 h).</a:t>
+            </a:r>
+          </a:p>
+          <a:p>
+            <a:r>
+              <a:t>• Panel (b) shows empirical germination kinetics. Under near-null magnetic fields, two critical defects occur: first, the total number of germinated seeds drops by 10–30%; second, the emergence speed (t50) is delayed by 12–36 hours.</a:t>
+            </a:r>
+          </a:p>
+          <a:p>
+            <a:r>
+              <a:t>• Panel (c) shows the vegetative yield consequences: radicle elongation is reduced by 33%, hypocotyl height by 31%, and total fresh/dry biomass by 28.5% on Day 5.</a:t>
+            </a:r>
+          </a:p>
+          <a:p>
+            <a:r>
+              <a:t>• Panel (d) maps the molecular pathway: cryptochromes perceive blue light and form radical pairs. Under near-null fields, HY5 transcription factor stabilization is impaired, downregulating rate-limiting chlorophyll genes (HEMA1, POR) and anthocyanin genes (CHS, CHI), creating severe seedling chlorosis.</a:t>
             </a:r>
           </a:p>
         </p:txBody>
@@ -1676,37 +1787,32 @@
           <a:lstStyle/>
           <a:p>
             <a:r>
-              <a:t>TALKING POINTS (SLIDE 7 - FIGURE 3 MONTAGE):</a:t>
-            </a:r>
-          </a:p>
-          <a:p>
-            <a:r>
-              <a:t>• In Figure 3, we address the biophysical mechanism: How can an ambient magnetic field of less than 1 nanotesla produce measurable macroscopic changes in plant growth?</a:t>
-            </a:r>
-          </a:p>
-          <a:p>
-            <a:r>
-              <a:t>• Thermal energy at room temperature (k_B * T) is orders of magnitude larger than magnetic Zeeman energy. Traditional thermodynamic arguments claimed magnetic fields couldn't affect biology.</a:t>
-            </a:r>
-          </a:p>
-          <a:p>
-            <a:r>
-              <a:t>• The radical pair mechanism circumvents this thermodynamic equilibrium constraint. When cryptochromes absorb blue light, they form transient radical pairs between flavin adenine dinucleotide (FAD) and a triad of tryptophan residues.</a:t>
-            </a:r>
-          </a:p>
-          <a:p>
-            <a:r>
-              <a:t>• Panel (a) illustrates the metabolic highway: triacylglycerols in peroxisomes undergo beta-oxidation, producing succinate which enters the mitochondrial electron transport chain.</a:t>
-            </a:r>
-          </a:p>
-          <a:p>
-            <a:r>
-              <a:t>• Panel (b) introduces our rigorous 4-tier evidentiary hierarchy: T1 represents demonstrated quantum biology in cryptochromes; T2 represents plausible enzymatic radical pairs; T3 and T4 are speculative or context-based.</a:t>
-            </a:r>
-          </a:p>
-          <a:p>
-            <a:r>
-              <a:t>• Panel (c) shows how chloroplasts and mitochondria act as the dual bioenergetic hubs that absorb these quantum perturbations.</a:t>
+              <a:t>TALKING POINTS (SLIDE 6 - FIGURE 2 DEEP DIVE):</a:t>
+            </a:r>
+          </a:p>
+          <a:p>
+            <a:r>
+              <a:t>• Why does a delay of 12 to 36 hours in germination matter on the Moon?</a:t>
+            </a:r>
+          </a:p>
+          <a:p>
+            <a:r>
+              <a:t>• In field agriculture on Earth, seeds have excess time and buffer. In a tightly scheduled spaceflight payload like LEAF on Artemis III, or a lunar greenhouse, mission timelines are strictly constrained.</a:t>
+            </a:r>
+          </a:p>
+          <a:p>
+            <a:r>
+              <a:t>• LEAF is designed for a nominal mission duration of around 7 to 10 days. If seed germination is delayed by 36 hours, you lose 30% to 50% of your autotrophic growth window!</a:t>
+            </a:r>
+          </a:p>
+          <a:p>
+            <a:r>
+              <a:t>• Furthermore, at the cellular level, near-null fields reduce cell division in the root apical meristem and disrupt PIN2 auxin carriers. That means roots grow slower, are more disoriented, and absorb water and nutrients less efficiently.</a:t>
+            </a:r>
+          </a:p>
+          <a:p>
+            <a:r>
+              <a:t>• The resulting 28% drop in biomass is not an academic curiosity—it is a direct hit to the caloric and nutrient yield of space crops.</a:t>
             </a:r>
           </a:p>
         </p:txBody>
@@ -1776,37 +1882,37 @@
           <a:lstStyle/>
           <a:p>
             <a:r>
-              <a:t>TALKING POINTS (SLIDE 8 - FIGURE 3 DEEP DIVE):</a:t>
-            </a:r>
-          </a:p>
-          <a:p>
-            <a:r>
-              <a:t>• This slide is essential for defending our paper against skeptical reviewers.</a:t>
-            </a:r>
-          </a:p>
-          <a:p>
-            <a:r>
-              <a:t>• Often when people hear 'quantum biology', they immediately think of speculative claims about macroscopic room-temperature coherence.</a:t>
-            </a:r>
-          </a:p>
-          <a:p>
-            <a:r>
-              <a:t>• We make it crystal clear: Cryptochrome magnetoreception is grounded in rigorous spin chemistry, established over 20 years by Ritz, Hore, Ahmad, and others.</a:t>
-            </a:r>
-          </a:p>
-          <a:p>
-            <a:r>
-              <a:t>• The radical pair [FAD•- ... TrpH•+] lives for microseconds. During that brief nanosecond-to-microsecond window, the electron spins are entangled. The presence or absence of an external magnetic field changes whether the pair recombines as a singlet or diffuses as a triplet.</a:t>
-            </a:r>
-          </a:p>
-          <a:p>
-            <a:r>
-              <a:t>• In near-null fields, that interconversion is shifted, which alters the lifetime of the signaling state of cryptochrome.</a:t>
-            </a:r>
-          </a:p>
-          <a:p>
-            <a:r>
-              <a:t>• This directly explains why cryptochrome-regulated genes like HY5, HEMA1, and CHS are downregulated in hypomagnetic chambers!</a:t>
+              <a:t>TALKING POINTS (SLIDE 7 - FIGURE 3 MONTAGE):</a:t>
+            </a:r>
+          </a:p>
+          <a:p>
+            <a:r>
+              <a:t>• In Figure 3, we address the biophysical mechanism: How can an ambient magnetic field of less than 1 nanotesla produce measurable macroscopic changes in plant growth?</a:t>
+            </a:r>
+          </a:p>
+          <a:p>
+            <a:r>
+              <a:t>• Thermal energy at room temperature (k_B * T) is orders of magnitude larger than magnetic Zeeman energy. Traditional thermodynamic arguments claimed magnetic fields couldn't affect biology.</a:t>
+            </a:r>
+          </a:p>
+          <a:p>
+            <a:r>
+              <a:t>• The radical pair mechanism circumvents this thermodynamic equilibrium constraint. When cryptochromes absorb blue light, they form transient radical pairs between flavin adenine dinucleotide (FAD) and a triad of tryptophan residues.</a:t>
+            </a:r>
+          </a:p>
+          <a:p>
+            <a:r>
+              <a:t>• Panel (a) illustrates the metabolic highway: triacylglycerols in peroxisomes undergo beta-oxidation, producing succinate which enters the mitochondrial electron transport chain.</a:t>
+            </a:r>
+          </a:p>
+          <a:p>
+            <a:r>
+              <a:t>• Panel (b) introduces our rigorous 4-tier evidentiary hierarchy: T1 represents demonstrated quantum biology in cryptochromes; T2 represents plausible enzymatic radical pairs; T3 and T4 are speculative or context-based.</a:t>
+            </a:r>
+          </a:p>
+          <a:p>
+            <a:r>
+              <a:t>• Panel (c) shows how chloroplasts and mitochondria act as the dual bioenergetic hubs that absorb these quantum perturbations.</a:t>
             </a:r>
           </a:p>
         </p:txBody>
@@ -1876,42 +1982,37 @@
           <a:lstStyle/>
           <a:p>
             <a:r>
-              <a:t>TALKING POINTS (SLIDE 9 - FIGURE 4 MONTAGE):</a:t>
-            </a:r>
-          </a:p>
-          <a:p>
-            <a:r>
-              <a:t>• Figure 4 brings together the environmental multi-stressor nexus.</a:t>
-            </a:r>
-          </a:p>
-          <a:p>
-            <a:r>
-              <a:t>• In real exploration missions, plants will not experience hypomagnetic fields in isolation. They will face them simultaneously with NASA's exploration atmosphere (56.5 kPa / 8.2 psia, 34% O2, and 1200–3000 ppm CO2) and chronic GCR radiation.</a:t>
-            </a:r>
-          </a:p>
-          <a:p>
-            <a:r>
-              <a:t>• Panel (a) contrasts these baseline environmental parameters.</a:t>
-            </a:r>
-          </a:p>
-          <a:p>
-            <a:r>
-              <a:t>• Panel (b) shows how these stressors interact at the biochemical level. Elevated CO2 suppresses RuBisCO oxygenation, shutting down peroxisomal H2O2 production. That shifts the electron burden onto mitochondria. When the ubiquinone pool becomes over-reduced, electrons leak, forming superoxide.</a:t>
-            </a:r>
-          </a:p>
-          <a:p>
-            <a:r>
-              <a:t>• Alternative Oxidase (AOX1D) acts as an uncoupled safety valve, directly dumping electrons to oxygen without ATP synthesis to prevent ROS bursts.</a:t>
-            </a:r>
-          </a:p>
-          <a:p>
-            <a:r>
-              <a:t>• In Panel (c), we validate this empirically: NASA OSDR dataset OSD-782 (ionizing radiation) and Parmagnani 2022 (near-null magnetic field) show concordant upregulation of AOX1D and CAT3.</a:t>
-            </a:r>
-          </a:p>
-          <a:p>
-            <a:r>
-              <a:t>• Panel (d) reveals the profound cross-kingdom parallel: human astronauts in the NASA Twins Study and Cell 2020 multi-omics exhibit the exact same mitochondrial stress phenotype!</a:t>
+              <a:t>TALKING POINTS (SLIDE 8 - FIGURE 3 DEEP DIVE):</a:t>
+            </a:r>
+          </a:p>
+          <a:p>
+            <a:r>
+              <a:t>• This slide is essential for defending our paper against skeptical reviewers.</a:t>
+            </a:r>
+          </a:p>
+          <a:p>
+            <a:r>
+              <a:t>• Often when people hear 'quantum biology', they immediately think of speculative claims about macroscopic room-temperature coherence.</a:t>
+            </a:r>
+          </a:p>
+          <a:p>
+            <a:r>
+              <a:t>• We make it crystal clear: Cryptochrome magnetoreception is grounded in rigorous spin chemistry, established over 20 years by Ritz, Hore, Ahmad, and others.</a:t>
+            </a:r>
+          </a:p>
+          <a:p>
+            <a:r>
+              <a:t>• The radical pair [FAD•- ... TrpH•+] lives for microseconds. During that brief nanosecond-to-microsecond window, the electron spins are entangled. The presence or absence of an external magnetic field changes whether the pair recombines as a singlet or diffuses as a triplet.</a:t>
+            </a:r>
+          </a:p>
+          <a:p>
+            <a:r>
+              <a:t>• In near-null fields, that interconversion is shifted, which alters the lifetime of the signaling state of cryptochrome.</a:t>
+            </a:r>
+          </a:p>
+          <a:p>
+            <a:r>
+              <a:t>• This directly explains why cryptochrome-regulated genes like HY5, HEMA1, and CHS are downregulated in hypomagnetic chambers!</a:t>
             </a:r>
           </a:p>
         </p:txBody>
@@ -5195,7 +5296,7 @@
               </a:defRPr>
             </a:pPr>
             <a:r>
-              <a:t>Life Sciences in Space Research (2026) | Artemis III LEAF Perspective              Slide 1 of 15</a:t>
+              <a:t>Life Sciences in Space Research (2026) | Artemis III LEAF Perspective              Slide 1 of 16</a:t>
             </a:r>
           </a:p>
         </p:txBody>
@@ -5256,7 +5357,7 @@
               </a:defRPr>
             </a:pPr>
             <a:r>
-              <a:t>FIGURE 4 DEEP DIVE</a:t>
+              <a:t>FIGURE 5 MONTAGE | EDITABLE LAYOUT</a:t>
             </a:r>
           </a:p>
         </p:txBody>
@@ -5291,7 +5392,7 @@
               </a:defRPr>
             </a:pPr>
             <a:r>
-              <a:t>Mitochondrial Bioenergetics &amp; Human Astronaut Parallels</a:t>
+              <a:t>Multi-Stressor Convergence: The CO2 &lt;-&gt; O2 &lt;-&gt; ROS Nexus</a:t>
             </a:r>
           </a:p>
         </p:txBody>
@@ -5326,7 +5427,7 @@
               </a:defRPr>
             </a:pPr>
             <a:r>
-              <a:t>Mitochondrial dysfunction is the universal biological signature linking space crops and astronaut crews</a:t>
+              <a:t>Exploration atmospheres, hypomagnetic fields, and ionizing radiation converge on mitochondrial Alternative Oxidase (AOX1D)</a:t>
             </a:r>
           </a:p>
         </p:txBody>
@@ -5340,7 +5441,7 @@
         <p:spPr>
           <a:xfrm>
             <a:off x="731520" y="1600200"/>
-            <a:ext cx="5120640" cy="2286000"/>
+            <a:ext cx="5212080" cy="2240280"/>
           </a:xfrm>
           <a:prstGeom prst="roundRect">
             <a:avLst/>
@@ -5378,7 +5479,7 @@
       </p:sp>
       <p:pic>
         <p:nvPicPr>
-          <p:cNvPr id="6" name="Picture 5" descr="Fig4c_multiomics_overlap.png"/>
+          <p:cNvPr id="6" name="Picture 5" descr="Fig4a_multistressor_space.png"/>
           <p:cNvPicPr>
             <a:picLocks noChangeAspect="1"/>
           </p:cNvPicPr>
@@ -5392,8 +5493,8 @@
         </p:blipFill>
         <p:spPr>
           <a:xfrm>
-            <a:off x="822960" y="1691640"/>
-            <a:ext cx="4937760" cy="2103120"/>
+            <a:off x="822960" y="1920240"/>
+            <a:ext cx="5029200" cy="1856232"/>
           </a:xfrm>
           <a:prstGeom prst="rect">
             <a:avLst/>
@@ -5402,14 +5503,49 @@
       </p:pic>
       <p:sp>
         <p:nvSpPr>
-          <p:cNvPr id="7" name="Rounded Rectangle 6"/>
+          <p:cNvPr id="7" name="TextBox 6"/>
+          <p:cNvSpPr txBox="1"/>
+          <p:nvPr/>
+        </p:nvSpPr>
+        <p:spPr>
+          <a:xfrm>
+            <a:off x="868680" y="1645920"/>
+            <a:ext cx="5212080" cy="274320"/>
+          </a:xfrm>
+          <a:prstGeom prst="rect">
+            <a:avLst/>
+          </a:prstGeom>
+          <a:noFill/>
+        </p:spPr>
+        <p:txBody>
+          <a:bodyPr wrap="none">
+            <a:spAutoFit/>
+          </a:bodyPr>
+          <a:lstStyle/>
+          <a:p>
+            <a:pPr>
+              <a:defRPr sz="900" b="1">
+                <a:solidFill>
+                  <a:srgbClr val="0284C7"/>
+                </a:solidFill>
+              </a:defRPr>
+            </a:pPr>
+            <a:r>
+              <a:t>(a) Multi-Stressor Space: Exploration Atmosphere, NNMF &amp; Radiation</a:t>
+            </a:r>
+          </a:p>
+        </p:txBody>
+      </p:sp>
+      <p:sp>
+        <p:nvSpPr>
+          <p:cNvPr id="8" name="Rounded Rectangle 7"/>
           <p:cNvSpPr/>
           <p:nvPr/>
         </p:nvSpPr>
         <p:spPr>
           <a:xfrm>
-            <a:off x="731520" y="4023360"/>
-            <a:ext cx="5120640" cy="2286000"/>
+            <a:off x="6248095" y="1600200"/>
+            <a:ext cx="5212080" cy="2240280"/>
           </a:xfrm>
           <a:prstGeom prst="roundRect">
             <a:avLst/>
@@ -5447,7 +5583,7 @@
       </p:sp>
       <p:pic>
         <p:nvPicPr>
-          <p:cNvPr id="8" name="Picture 7" descr="Fig4d_crosskingdom_astronaut.png"/>
+          <p:cNvPr id="9" name="Picture 8" descr="Fig4b_bioenergetic_engine.png"/>
           <p:cNvPicPr>
             <a:picLocks noChangeAspect="1"/>
           </p:cNvPicPr>
@@ -5461,8 +5597,8 @@
         </p:blipFill>
         <p:spPr>
           <a:xfrm>
-            <a:off x="822960" y="4114800"/>
-            <a:ext cx="4937760" cy="2103120"/>
+            <a:off x="6339535" y="1920240"/>
+            <a:ext cx="5029200" cy="1856232"/>
           </a:xfrm>
           <a:prstGeom prst="rect">
             <a:avLst/>
@@ -5471,14 +5607,49 @@
       </p:pic>
       <p:sp>
         <p:nvSpPr>
-          <p:cNvPr id="9" name="Rounded Rectangle 8"/>
+          <p:cNvPr id="10" name="TextBox 9"/>
+          <p:cNvSpPr txBox="1"/>
+          <p:nvPr/>
+        </p:nvSpPr>
+        <p:spPr>
+          <a:xfrm>
+            <a:off x="6385255" y="1645920"/>
+            <a:ext cx="5212080" cy="274320"/>
+          </a:xfrm>
+          <a:prstGeom prst="rect">
+            <a:avLst/>
+          </a:prstGeom>
+          <a:noFill/>
+        </p:spPr>
+        <p:txBody>
+          <a:bodyPr wrap="none">
+            <a:spAutoFit/>
+          </a:bodyPr>
+          <a:lstStyle/>
+          <a:p>
+            <a:pPr>
+              <a:defRPr sz="900" b="1">
+                <a:solidFill>
+                  <a:srgbClr val="0284C7"/>
+                </a:solidFill>
+              </a:defRPr>
+            </a:pPr>
+            <a:r>
+              <a:t>(b) The Mitochondrial &amp; Peroxisomal CO2 &lt;-&gt; O2 &lt;-&gt; ROS Engine</a:t>
+            </a:r>
+          </a:p>
+        </p:txBody>
+      </p:sp>
+      <p:sp>
+        <p:nvSpPr>
+          <p:cNvPr id="11" name="Rounded Rectangle 10"/>
           <p:cNvSpPr/>
           <p:nvPr/>
         </p:nvSpPr>
         <p:spPr>
           <a:xfrm>
-            <a:off x="6035040" y="1600200"/>
-            <a:ext cx="5425135" cy="4709160"/>
+            <a:off x="731520" y="4069080"/>
+            <a:ext cx="5212080" cy="2240280"/>
           </a:xfrm>
           <a:prstGeom prst="roundRect">
             <a:avLst/>
@@ -5514,105 +5685,40 @@
           </a:p>
         </p:txBody>
       </p:sp>
-      <p:sp>
-        <p:nvSpPr>
-          <p:cNvPr id="10" name="TextBox 9"/>
+      <p:pic>
+        <p:nvPicPr>
+          <p:cNvPr id="12" name="Picture 11" descr="Fig4c_multiomics_overlap.png"/>
+          <p:cNvPicPr>
+            <a:picLocks noChangeAspect="1"/>
+          </p:cNvPicPr>
+          <p:nvPr/>
+        </p:nvPicPr>
+        <p:blipFill>
+          <a:blip r:embed="rId4"/>
+          <a:stretch>
+            <a:fillRect/>
+          </a:stretch>
+        </p:blipFill>
+        <p:spPr>
+          <a:xfrm>
+            <a:off x="822960" y="4389120"/>
+            <a:ext cx="5029200" cy="1856232"/>
+          </a:xfrm>
+          <a:prstGeom prst="rect">
+            <a:avLst/>
+          </a:prstGeom>
+        </p:spPr>
+      </p:pic>
+      <p:sp>
+        <p:nvSpPr>
+          <p:cNvPr id="13" name="TextBox 12"/>
           <p:cNvSpPr txBox="1"/>
           <p:nvPr/>
         </p:nvSpPr>
         <p:spPr>
           <a:xfrm>
-            <a:off x="6217920" y="1737360"/>
-            <a:ext cx="5059375" cy="4434840"/>
-          </a:xfrm>
-          <a:prstGeom prst="rect">
-            <a:avLst/>
-          </a:prstGeom>
-          <a:noFill/>
-        </p:spPr>
-        <p:txBody>
-          <a:bodyPr wrap="square">
-            <a:spAutoFit/>
-          </a:bodyPr>
-          <a:lstStyle/>
-          <a:p>
-            <a:pPr>
-              <a:defRPr sz="1100" b="1">
-                <a:solidFill>
-                  <a:srgbClr val="0284C7"/>
-                </a:solidFill>
-              </a:defRPr>
-            </a:pPr>
-            <a:r>
-              <a:t>THE SHARED BIOENERGETIC PHENOTYPE:</a:t>
-            </a:r>
-          </a:p>
-          <a:p>
-            <a:pPr>
-              <a:defRPr sz="900">
-                <a:solidFill>
-                  <a:srgbClr val="0F172A"/>
-                </a:solidFill>
-              </a:defRPr>
-            </a:pPr>
-            <a:r>
-              <a:t>1. The Alternative Oxidase (AOX) Safety Valve:</a:t>
-            </a:r>
-            <a:br/>
-            <a:r>
-              <a:t>   • In plants, Alternative Oxidase (AOX1D, AT1G32350) acts as an uncoupled terminal oxidase.</a:t>
-            </a:r>
-            <a:br/>
-            <a:r>
-              <a:t>   • Bypasses Complexes III and IV to oxidize ubiquinol directly to H2O without pumping protons.</a:t>
-            </a:r>
-            <a:br/>
-            <a:r>
-              <a:t>   • Prevents runaway superoxide (O2•-) formation at Complex I and III.</a:t>
-            </a:r>
-            <a:br/>
-            <a:br/>
-            <a:r>
-              <a:t>2. Empirical Concordance (NASA OSDR OSD-782 vs. NNMF):</a:t>
-            </a:r>
-            <a:br/>
-            <a:r>
-              <a:t>   • AOX1D: +2.45 log2FC (Radiation) | +1.88 log2FC (NNMF)</a:t>
-            </a:r>
-            <a:br/>
-            <a:r>
-              <a:t>   • CAT3: +1.92 log2FC (Radiation) | +1.45 log2FC (NNMF)</a:t>
-            </a:r>
-            <a:br/>
-            <a:r>
-              <a:t>   • HEMA1: -1.85 log2FC (Radiation) | -2.10 log2FC (NNMF)</a:t>
-            </a:r>
-            <a:br/>
-            <a:br/>
-            <a:r>
-              <a:t>3. Cross-Kingdom Spaceflight Nexus:</a:t>
-            </a:r>
-            <a:br/>
-            <a:r>
-              <a:t>   • Afshinnekoo et al. (Cell 2020) and the NASA Twins Study identified mitochondrial dysfunction as the single most conserved hallmark across astronaut tissues.</a:t>
-            </a:r>
-            <a:br/>
-            <a:r>
-              <a:t>   • High cell-free mitochondrial DNA (cf-mtDNA), elevated ROS, and respiratory chain decoupling occur in both human astronauts and lunar plants!</a:t>
-            </a:r>
-          </a:p>
-        </p:txBody>
-      </p:sp>
-      <p:sp>
-        <p:nvSpPr>
-          <p:cNvPr id="11" name="TextBox 10"/>
-          <p:cNvSpPr txBox="1"/>
-          <p:nvPr/>
-        </p:nvSpPr>
-        <p:spPr>
-          <a:xfrm>
-            <a:off x="731520" y="6446520"/>
-            <a:ext cx="10728655" cy="274320"/>
+            <a:off x="868680" y="4114800"/>
+            <a:ext cx="5212080" cy="274320"/>
           </a:xfrm>
           <a:prstGeom prst="rect">
             <a:avLst/>
@@ -5626,6 +5732,145 @@
           <a:lstStyle/>
           <a:p>
             <a:pPr>
+              <a:defRPr sz="900" b="1">
+                <a:solidFill>
+                  <a:srgbClr val="0284C7"/>
+                </a:solidFill>
+              </a:defRPr>
+            </a:pPr>
+            <a:r>
+              <a:t>(c) Multi-Omics Empirical Overlap: OSD-782 Radiation vs. NNMF Loci</a:t>
+            </a:r>
+          </a:p>
+        </p:txBody>
+      </p:sp>
+      <p:sp>
+        <p:nvSpPr>
+          <p:cNvPr id="14" name="Rounded Rectangle 13"/>
+          <p:cNvSpPr/>
+          <p:nvPr/>
+        </p:nvSpPr>
+        <p:spPr>
+          <a:xfrm>
+            <a:off x="6248095" y="4069080"/>
+            <a:ext cx="5212080" cy="2240280"/>
+          </a:xfrm>
+          <a:prstGeom prst="roundRect">
+            <a:avLst/>
+          </a:prstGeom>
+          <a:solidFill>
+            <a:srgbClr val="FFFFFF"/>
+          </a:solidFill>
+          <a:ln w="12700">
+            <a:solidFill>
+              <a:srgbClr val="E2E8F0"/>
+            </a:solidFill>
+          </a:ln>
+        </p:spPr>
+        <p:style>
+          <a:lnRef idx="1">
+            <a:schemeClr val="accent1"/>
+          </a:lnRef>
+          <a:fillRef idx="3">
+            <a:schemeClr val="accent1"/>
+          </a:fillRef>
+          <a:effectRef idx="2">
+            <a:schemeClr val="accent1"/>
+          </a:effectRef>
+          <a:fontRef idx="minor">
+            <a:schemeClr val="lt1"/>
+          </a:fontRef>
+        </p:style>
+        <p:txBody>
+          <a:bodyPr rtlCol="0" anchor="ctr"/>
+          <a:lstStyle/>
+          <a:p>
+            <a:pPr algn="ctr"/>
+          </a:p>
+        </p:txBody>
+      </p:sp>
+      <p:pic>
+        <p:nvPicPr>
+          <p:cNvPr id="15" name="Picture 14" descr="Fig4d_crosskingdom_astronaut.png"/>
+          <p:cNvPicPr>
+            <a:picLocks noChangeAspect="1"/>
+          </p:cNvPicPr>
+          <p:nvPr/>
+        </p:nvPicPr>
+        <p:blipFill>
+          <a:blip r:embed="rId5"/>
+          <a:stretch>
+            <a:fillRect/>
+          </a:stretch>
+        </p:blipFill>
+        <p:spPr>
+          <a:xfrm>
+            <a:off x="6339535" y="4389120"/>
+            <a:ext cx="5029200" cy="1856232"/>
+          </a:xfrm>
+          <a:prstGeom prst="rect">
+            <a:avLst/>
+          </a:prstGeom>
+        </p:spPr>
+      </p:pic>
+      <p:sp>
+        <p:nvSpPr>
+          <p:cNvPr id="16" name="TextBox 15"/>
+          <p:cNvSpPr txBox="1"/>
+          <p:nvPr/>
+        </p:nvSpPr>
+        <p:spPr>
+          <a:xfrm>
+            <a:off x="6385255" y="4114800"/>
+            <a:ext cx="5212080" cy="274320"/>
+          </a:xfrm>
+          <a:prstGeom prst="rect">
+            <a:avLst/>
+          </a:prstGeom>
+          <a:noFill/>
+        </p:spPr>
+        <p:txBody>
+          <a:bodyPr wrap="none">
+            <a:spAutoFit/>
+          </a:bodyPr>
+          <a:lstStyle/>
+          <a:p>
+            <a:pPr>
+              <a:defRPr sz="900" b="1">
+                <a:solidFill>
+                  <a:srgbClr val="0284C7"/>
+                </a:solidFill>
+              </a:defRPr>
+            </a:pPr>
+            <a:r>
+              <a:t>(d) Cross-Kingdom Convergence: Plant BLSS &amp; Human Astronaut Health</a:t>
+            </a:r>
+          </a:p>
+        </p:txBody>
+      </p:sp>
+      <p:sp>
+        <p:nvSpPr>
+          <p:cNvPr id="17" name="TextBox 16"/>
+          <p:cNvSpPr txBox="1"/>
+          <p:nvPr/>
+        </p:nvSpPr>
+        <p:spPr>
+          <a:xfrm>
+            <a:off x="731520" y="6446520"/>
+            <a:ext cx="10728655" cy="274320"/>
+          </a:xfrm>
+          <a:prstGeom prst="rect">
+            <a:avLst/>
+          </a:prstGeom>
+          <a:noFill/>
+        </p:spPr>
+        <p:txBody>
+          <a:bodyPr wrap="none">
+            <a:spAutoFit/>
+          </a:bodyPr>
+          <a:lstStyle/>
+          <a:p>
+            <a:pPr>
               <a:defRPr sz="850">
                 <a:solidFill>
                   <a:srgbClr val="64748B"/>
@@ -5633,7 +5878,7 @@
               </a:defRPr>
             </a:pPr>
             <a:r>
-              <a:t>Life Sciences in Space Research (2026) | Artemis III LEAF Perspective              Slide 10 of 15</a:t>
+              <a:t>Life Sciences in Space Research (2026) | Artemis III LEAF Perspective              Slide 10 of 16</a:t>
             </a:r>
           </a:p>
         </p:txBody>
@@ -5694,7 +5939,7 @@
               </a:defRPr>
             </a:pPr>
             <a:r>
-              <a:t>FIGURE 5 MONTAGE | EDITABLE LAYOUT</a:t>
+              <a:t>FIGURE 5 DEEP DIVE</a:t>
             </a:r>
           </a:p>
         </p:txBody>
@@ -5729,7 +5974,7 @@
               </a:defRPr>
             </a:pPr>
             <a:r>
-              <a:t>Ground Simulation Standards &amp; Post-Flight Disambiguation</a:t>
+              <a:t>Mitochondrial Bioenergetics &amp; Human Astronaut Parallels</a:t>
             </a:r>
           </a:p>
         </p:txBody>
@@ -5764,7 +6009,7 @@
               </a:defRPr>
             </a:pPr>
             <a:r>
-              <a:t>3-chamber ground controls, in situ causal rescue proof-of-concept, and post-flight phenotypic disambiguation framework</a:t>
+              <a:t>Mitochondrial dysfunction is the universal biological signature linking space crops and astronaut crews</a:t>
             </a:r>
           </a:p>
         </p:txBody>
@@ -5778,7 +6023,7 @@
         <p:spPr>
           <a:xfrm>
             <a:off x="731520" y="1600200"/>
-            <a:ext cx="5212080" cy="2194560"/>
+            <a:ext cx="5120640" cy="2286000"/>
           </a:xfrm>
           <a:prstGeom prst="roundRect">
             <a:avLst/>
@@ -5816,7 +6061,7 @@
       </p:sp>
       <p:pic>
         <p:nvPicPr>
-          <p:cNvPr id="6" name="Picture 5" descr="Fig5a_ground_chambers.png"/>
+          <p:cNvPr id="6" name="Picture 5" descr="Fig4c_multiomics_overlap.png"/>
           <p:cNvPicPr>
             <a:picLocks noChangeAspect="1"/>
           </p:cNvPicPr>
@@ -5830,8 +6075,8 @@
         </p:blipFill>
         <p:spPr>
           <a:xfrm>
-            <a:off x="822960" y="1920240"/>
-            <a:ext cx="5029200" cy="1810512"/>
+            <a:off x="822960" y="1691640"/>
+            <a:ext cx="4937760" cy="2103120"/>
           </a:xfrm>
           <a:prstGeom prst="rect">
             <a:avLst/>
@@ -5840,49 +6085,14 @@
       </p:pic>
       <p:sp>
         <p:nvSpPr>
-          <p:cNvPr id="7" name="TextBox 6"/>
-          <p:cNvSpPr txBox="1"/>
-          <p:nvPr/>
-        </p:nvSpPr>
-        <p:spPr>
-          <a:xfrm>
-            <a:off x="868680" y="1645920"/>
-            <a:ext cx="5212080" cy="274320"/>
-          </a:xfrm>
-          <a:prstGeom prst="rect">
-            <a:avLst/>
-          </a:prstGeom>
-          <a:noFill/>
-        </p:spPr>
-        <p:txBody>
-          <a:bodyPr wrap="none">
-            <a:spAutoFit/>
-          </a:bodyPr>
-          <a:lstStyle/>
-          <a:p>
-            <a:pPr>
-              <a:defRPr sz="900" b="1">
-                <a:solidFill>
-                  <a:srgbClr val="0284C7"/>
-                </a:solidFill>
-              </a:defRPr>
-            </a:pPr>
-            <a:r>
-              <a:t>(a) Methodological Ground Simulation Standards (3-Chamber Parity)</a:t>
-            </a:r>
-          </a:p>
-        </p:txBody>
-      </p:sp>
-      <p:sp>
-        <p:nvSpPr>
-          <p:cNvPr id="8" name="Rounded Rectangle 7"/>
+          <p:cNvPr id="7" name="Rounded Rectangle 6"/>
           <p:cNvSpPr/>
           <p:nvPr/>
         </p:nvSpPr>
         <p:spPr>
           <a:xfrm>
-            <a:off x="6248095" y="1600200"/>
-            <a:ext cx="5212080" cy="2194560"/>
+            <a:off x="731520" y="4023360"/>
+            <a:ext cx="5120640" cy="2286000"/>
           </a:xfrm>
           <a:prstGeom prst="roundRect">
             <a:avLst/>
@@ -5920,7 +6130,7 @@
       </p:sp>
       <p:pic>
         <p:nvPicPr>
-          <p:cNvPr id="9" name="Picture 8" descr="Fig5b_hardware_assessment.png"/>
+          <p:cNvPr id="8" name="Picture 7" descr="Fig4d_crosskingdom_astronaut.png"/>
           <p:cNvPicPr>
             <a:picLocks noChangeAspect="1"/>
           </p:cNvPicPr>
@@ -5934,8 +6144,8 @@
         </p:blipFill>
         <p:spPr>
           <a:xfrm>
-            <a:off x="6339535" y="1920240"/>
-            <a:ext cx="5029200" cy="1810512"/>
+            <a:off x="822960" y="4114800"/>
+            <a:ext cx="4937760" cy="2103120"/>
           </a:xfrm>
           <a:prstGeom prst="rect">
             <a:avLst/>
@@ -5944,49 +6154,14 @@
       </p:pic>
       <p:sp>
         <p:nvSpPr>
-          <p:cNvPr id="10" name="TextBox 9"/>
-          <p:cNvSpPr txBox="1"/>
-          <p:nvPr/>
-        </p:nvSpPr>
-        <p:spPr>
-          <a:xfrm>
-            <a:off x="6385255" y="1645920"/>
-            <a:ext cx="5212080" cy="274320"/>
-          </a:xfrm>
-          <a:prstGeom prst="rect">
-            <a:avLst/>
-          </a:prstGeom>
-          <a:noFill/>
-        </p:spPr>
-        <p:txBody>
-          <a:bodyPr wrap="none">
-            <a:spAutoFit/>
-          </a:bodyPr>
-          <a:lstStyle/>
-          <a:p>
-            <a:pPr>
-              <a:defRPr sz="900" b="1">
-                <a:solidFill>
-                  <a:srgbClr val="0284C7"/>
-                </a:solidFill>
-              </a:defRPr>
-            </a:pPr>
-            <a:r>
-              <a:t>(b) Hardware Self-Magnetic Assessment Protocol (Power-State Mapping)</a:t>
-            </a:r>
-          </a:p>
-        </p:txBody>
-      </p:sp>
-      <p:sp>
-        <p:nvSpPr>
-          <p:cNvPr id="11" name="Rounded Rectangle 10"/>
+          <p:cNvPr id="9" name="Rounded Rectangle 8"/>
           <p:cNvSpPr/>
           <p:nvPr/>
         </p:nvSpPr>
         <p:spPr>
           <a:xfrm>
-            <a:off x="731520" y="3977639"/>
-            <a:ext cx="10728655" cy="2331720"/>
+            <a:off x="6035040" y="1600200"/>
+            <a:ext cx="5425135" cy="4709160"/>
           </a:xfrm>
           <a:prstGeom prst="roundRect">
             <a:avLst/>
@@ -6022,39 +6197,104 @@
           </a:p>
         </p:txBody>
       </p:sp>
-      <p:pic>
-        <p:nvPicPr>
-          <p:cNvPr id="12" name="Picture 11" descr="Fig5c_decision_matrix.png"/>
-          <p:cNvPicPr>
-            <a:picLocks noChangeAspect="1"/>
-          </p:cNvPicPr>
-          <p:nvPr/>
-        </p:nvPicPr>
-        <p:blipFill>
-          <a:blip r:embed="rId4"/>
-          <a:stretch>
-            <a:fillRect/>
-          </a:stretch>
-        </p:blipFill>
-        <p:spPr>
-          <a:xfrm>
-            <a:off x="822960" y="4297679"/>
-            <a:ext cx="10545775" cy="1947672"/>
-          </a:xfrm>
-          <a:prstGeom prst="rect">
-            <a:avLst/>
-          </a:prstGeom>
-        </p:spPr>
-      </p:pic>
-      <p:sp>
-        <p:nvSpPr>
-          <p:cNvPr id="13" name="TextBox 12"/>
+      <p:sp>
+        <p:nvSpPr>
+          <p:cNvPr id="10" name="TextBox 9"/>
           <p:cNvSpPr txBox="1"/>
           <p:nvPr/>
         </p:nvSpPr>
         <p:spPr>
           <a:xfrm>
-            <a:off x="868680" y="4023359"/>
+            <a:off x="6217920" y="1737360"/>
+            <a:ext cx="5059375" cy="4434840"/>
+          </a:xfrm>
+          <a:prstGeom prst="rect">
+            <a:avLst/>
+          </a:prstGeom>
+          <a:noFill/>
+        </p:spPr>
+        <p:txBody>
+          <a:bodyPr wrap="square">
+            <a:spAutoFit/>
+          </a:bodyPr>
+          <a:lstStyle/>
+          <a:p>
+            <a:pPr>
+              <a:defRPr sz="1100" b="1">
+                <a:solidFill>
+                  <a:srgbClr val="0284C7"/>
+                </a:solidFill>
+              </a:defRPr>
+            </a:pPr>
+            <a:r>
+              <a:t>THE SHARED BIOENERGETIC PHENOTYPE:</a:t>
+            </a:r>
+          </a:p>
+          <a:p>
+            <a:pPr>
+              <a:defRPr sz="900">
+                <a:solidFill>
+                  <a:srgbClr val="0F172A"/>
+                </a:solidFill>
+              </a:defRPr>
+            </a:pPr>
+            <a:r>
+              <a:t>1. The Alternative Oxidase (AOX) Safety Valve:</a:t>
+            </a:r>
+            <a:br/>
+            <a:r>
+              <a:t>   • In plants, Alternative Oxidase (AOX1D, AT1G32350) acts as an uncoupled terminal oxidase.</a:t>
+            </a:r>
+            <a:br/>
+            <a:r>
+              <a:t>   • Bypasses Complexes III and IV to oxidize ubiquinol directly to H2O without pumping protons.</a:t>
+            </a:r>
+            <a:br/>
+            <a:r>
+              <a:t>   • Prevents runaway superoxide (O2•-) formation at Complex I and III.</a:t>
+            </a:r>
+            <a:br/>
+            <a:br/>
+            <a:r>
+              <a:t>2. Empirical Concordance (NASA OSDR OSD-782 vs. NNMF):</a:t>
+            </a:r>
+            <a:br/>
+            <a:r>
+              <a:t>   • AOX1D: +2.45 log2FC (Radiation) | +1.88 log2FC (NNMF)</a:t>
+            </a:r>
+            <a:br/>
+            <a:r>
+              <a:t>   • CAT3: +1.92 log2FC (Radiation) | +1.45 log2FC (NNMF)</a:t>
+            </a:r>
+            <a:br/>
+            <a:r>
+              <a:t>   • HEMA1: -1.85 log2FC (Radiation) | -2.10 log2FC (NNMF)</a:t>
+            </a:r>
+            <a:br/>
+            <a:br/>
+            <a:r>
+              <a:t>3. Cross-Kingdom Spaceflight Nexus:</a:t>
+            </a:r>
+            <a:br/>
+            <a:r>
+              <a:t>   • Afshinnekoo et al. (Cell 2020) and the NASA Twins Study identified mitochondrial dysfunction as the single most conserved hallmark across astronaut tissues.</a:t>
+            </a:r>
+            <a:br/>
+            <a:r>
+              <a:t>   • High cell-free mitochondrial DNA (cf-mtDNA), elevated ROS, and respiratory chain decoupling occur in both human astronauts and lunar plants!</a:t>
+            </a:r>
+          </a:p>
+        </p:txBody>
+      </p:sp>
+      <p:sp>
+        <p:nvSpPr>
+          <p:cNvPr id="11" name="TextBox 10"/>
+          <p:cNvSpPr txBox="1"/>
+          <p:nvPr/>
+        </p:nvSpPr>
+        <p:spPr>
+          <a:xfrm>
+            <a:off x="731520" y="6446520"/>
             <a:ext cx="10728655" cy="274320"/>
           </a:xfrm>
           <a:prstGeom prst="rect">
@@ -6069,49 +6309,14 @@
           <a:lstStyle/>
           <a:p>
             <a:pPr>
-              <a:defRPr sz="900" b="1">
-                <a:solidFill>
-                  <a:srgbClr val="0284C7"/>
+              <a:defRPr sz="850">
+                <a:solidFill>
+                  <a:srgbClr val="64748B"/>
                 </a:solidFill>
               </a:defRPr>
             </a:pPr>
             <a:r>
-              <a:t>(c) Post-Flight Phenotypic Risk Disambiguation Framework (Comparative Matrix)</a:t>
-            </a:r>
-          </a:p>
-        </p:txBody>
-      </p:sp>
-      <p:sp>
-        <p:nvSpPr>
-          <p:cNvPr id="14" name="TextBox 13"/>
-          <p:cNvSpPr txBox="1"/>
-          <p:nvPr/>
-        </p:nvSpPr>
-        <p:spPr>
-          <a:xfrm>
-            <a:off x="731520" y="6446520"/>
-            <a:ext cx="10728655" cy="274320"/>
-          </a:xfrm>
-          <a:prstGeom prst="rect">
-            <a:avLst/>
-          </a:prstGeom>
-          <a:noFill/>
-        </p:spPr>
-        <p:txBody>
-          <a:bodyPr wrap="none">
-            <a:spAutoFit/>
-          </a:bodyPr>
-          <a:lstStyle/>
-          <a:p>
-            <a:pPr>
-              <a:defRPr sz="850">
-                <a:solidFill>
-                  <a:srgbClr val="64748B"/>
-                </a:solidFill>
-              </a:defRPr>
-            </a:pPr>
-            <a:r>
-              <a:t>Life Sciences in Space Research (2026) | Artemis III LEAF Perspective              Slide 11 of 15</a:t>
+              <a:t>Life Sciences in Space Research (2026) | Artemis III LEAF Perspective              Slide 11 of 16</a:t>
             </a:r>
           </a:p>
         </p:txBody>
@@ -6125,6 +6330,484 @@
 </file>
 
 <file path=ppt/slides/slide12.xml><?xml version="1.0" encoding="utf-8"?>
+<p:sld xmlns:a="http://schemas.openxmlformats.org/drawingml/2006/main" xmlns:p="http://schemas.openxmlformats.org/presentationml/2006/main" xmlns:r="http://schemas.openxmlformats.org/officeDocument/2006/relationships">
+  <p:cSld>
+    <p:bg>
+      <p:bgPr>
+        <a:solidFill>
+          <a:srgbClr val="F8FAFC"/>
+        </a:solidFill>
+        <a:effectLst/>
+      </p:bgPr>
+    </p:bg>
+    <p:spTree>
+      <p:nvGrpSpPr>
+        <p:cNvPr id="1" name=""/>
+        <p:cNvGrpSpPr/>
+        <p:nvPr/>
+      </p:nvGrpSpPr>
+      <p:grpSpPr/>
+      <p:sp>
+        <p:nvSpPr>
+          <p:cNvPr id="2" name="TextBox 1"/>
+          <p:cNvSpPr txBox="1"/>
+          <p:nvPr/>
+        </p:nvSpPr>
+        <p:spPr>
+          <a:xfrm>
+            <a:off x="731520" y="365760"/>
+            <a:ext cx="10728655" cy="320040"/>
+          </a:xfrm>
+          <a:prstGeom prst="rect">
+            <a:avLst/>
+          </a:prstGeom>
+          <a:noFill/>
+        </p:spPr>
+        <p:txBody>
+          <a:bodyPr wrap="square">
+            <a:spAutoFit/>
+          </a:bodyPr>
+          <a:lstStyle/>
+          <a:p>
+            <a:pPr>
+              <a:defRPr sz="950" b="1">
+                <a:solidFill>
+                  <a:srgbClr val="0284C7"/>
+                </a:solidFill>
+              </a:defRPr>
+            </a:pPr>
+            <a:r>
+              <a:t>FIGURE 6 MONTAGE | EDITABLE LAYOUT</a:t>
+            </a:r>
+          </a:p>
+        </p:txBody>
+      </p:sp>
+      <p:sp>
+        <p:nvSpPr>
+          <p:cNvPr id="3" name="TextBox 2"/>
+          <p:cNvSpPr txBox="1"/>
+          <p:nvPr/>
+        </p:nvSpPr>
+        <p:spPr>
+          <a:xfrm>
+            <a:off x="731520" y="658368"/>
+            <a:ext cx="10728655" cy="502920"/>
+          </a:xfrm>
+          <a:prstGeom prst="rect">
+            <a:avLst/>
+          </a:prstGeom>
+          <a:noFill/>
+        </p:spPr>
+        <p:txBody>
+          <a:bodyPr wrap="square">
+            <a:spAutoFit/>
+          </a:bodyPr>
+          <a:lstStyle/>
+          <a:p>
+            <a:pPr>
+              <a:defRPr sz="2000" b="1">
+                <a:solidFill>
+                  <a:srgbClr val="0F172A"/>
+                </a:solidFill>
+              </a:defRPr>
+            </a:pPr>
+            <a:r>
+              <a:t>Ground Simulation Standards &amp; Post-Flight Disambiguation</a:t>
+            </a:r>
+          </a:p>
+        </p:txBody>
+      </p:sp>
+      <p:sp>
+        <p:nvSpPr>
+          <p:cNvPr id="4" name="TextBox 3"/>
+          <p:cNvSpPr txBox="1"/>
+          <p:nvPr/>
+        </p:nvSpPr>
+        <p:spPr>
+          <a:xfrm>
+            <a:off x="731520" y="1115568"/>
+            <a:ext cx="10728655" cy="365760"/>
+          </a:xfrm>
+          <a:prstGeom prst="rect">
+            <a:avLst/>
+          </a:prstGeom>
+          <a:noFill/>
+        </p:spPr>
+        <p:txBody>
+          <a:bodyPr wrap="square">
+            <a:spAutoFit/>
+          </a:bodyPr>
+          <a:lstStyle/>
+          <a:p>
+            <a:pPr>
+              <a:defRPr sz="1100" i="1">
+                <a:solidFill>
+                  <a:srgbClr val="475569"/>
+                </a:solidFill>
+              </a:defRPr>
+            </a:pPr>
+            <a:r>
+              <a:t>3-chamber ground controls, in situ causal rescue proof-of-concept, and post-flight phenotypic disambiguation framework</a:t>
+            </a:r>
+          </a:p>
+        </p:txBody>
+      </p:sp>
+      <p:sp>
+        <p:nvSpPr>
+          <p:cNvPr id="5" name="Rounded Rectangle 4"/>
+          <p:cNvSpPr/>
+          <p:nvPr/>
+        </p:nvSpPr>
+        <p:spPr>
+          <a:xfrm>
+            <a:off x="731520" y="1600200"/>
+            <a:ext cx="5212080" cy="2194560"/>
+          </a:xfrm>
+          <a:prstGeom prst="roundRect">
+            <a:avLst/>
+          </a:prstGeom>
+          <a:solidFill>
+            <a:srgbClr val="FFFFFF"/>
+          </a:solidFill>
+          <a:ln w="12700">
+            <a:solidFill>
+              <a:srgbClr val="E2E8F0"/>
+            </a:solidFill>
+          </a:ln>
+        </p:spPr>
+        <p:style>
+          <a:lnRef idx="1">
+            <a:schemeClr val="accent1"/>
+          </a:lnRef>
+          <a:fillRef idx="3">
+            <a:schemeClr val="accent1"/>
+          </a:fillRef>
+          <a:effectRef idx="2">
+            <a:schemeClr val="accent1"/>
+          </a:effectRef>
+          <a:fontRef idx="minor">
+            <a:schemeClr val="lt1"/>
+          </a:fontRef>
+        </p:style>
+        <p:txBody>
+          <a:bodyPr rtlCol="0" anchor="ctr"/>
+          <a:lstStyle/>
+          <a:p>
+            <a:pPr algn="ctr"/>
+          </a:p>
+        </p:txBody>
+      </p:sp>
+      <p:pic>
+        <p:nvPicPr>
+          <p:cNvPr id="6" name="Picture 5" descr="Fig5a_ground_chambers.png"/>
+          <p:cNvPicPr>
+            <a:picLocks noChangeAspect="1"/>
+          </p:cNvPicPr>
+          <p:nvPr/>
+        </p:nvPicPr>
+        <p:blipFill>
+          <a:blip r:embed="rId2"/>
+          <a:stretch>
+            <a:fillRect/>
+          </a:stretch>
+        </p:blipFill>
+        <p:spPr>
+          <a:xfrm>
+            <a:off x="822960" y="1920240"/>
+            <a:ext cx="5029200" cy="1810512"/>
+          </a:xfrm>
+          <a:prstGeom prst="rect">
+            <a:avLst/>
+          </a:prstGeom>
+        </p:spPr>
+      </p:pic>
+      <p:sp>
+        <p:nvSpPr>
+          <p:cNvPr id="7" name="TextBox 6"/>
+          <p:cNvSpPr txBox="1"/>
+          <p:nvPr/>
+        </p:nvSpPr>
+        <p:spPr>
+          <a:xfrm>
+            <a:off x="868680" y="1645920"/>
+            <a:ext cx="5212080" cy="274320"/>
+          </a:xfrm>
+          <a:prstGeom prst="rect">
+            <a:avLst/>
+          </a:prstGeom>
+          <a:noFill/>
+        </p:spPr>
+        <p:txBody>
+          <a:bodyPr wrap="none">
+            <a:spAutoFit/>
+          </a:bodyPr>
+          <a:lstStyle/>
+          <a:p>
+            <a:pPr>
+              <a:defRPr sz="900" b="1">
+                <a:solidFill>
+                  <a:srgbClr val="0284C7"/>
+                </a:solidFill>
+              </a:defRPr>
+            </a:pPr>
+            <a:r>
+              <a:t>(a) Methodological Ground Simulation Standards (3-Chamber Parity)</a:t>
+            </a:r>
+          </a:p>
+        </p:txBody>
+      </p:sp>
+      <p:sp>
+        <p:nvSpPr>
+          <p:cNvPr id="8" name="Rounded Rectangle 7"/>
+          <p:cNvSpPr/>
+          <p:nvPr/>
+        </p:nvSpPr>
+        <p:spPr>
+          <a:xfrm>
+            <a:off x="6248095" y="1600200"/>
+            <a:ext cx="5212080" cy="2194560"/>
+          </a:xfrm>
+          <a:prstGeom prst="roundRect">
+            <a:avLst/>
+          </a:prstGeom>
+          <a:solidFill>
+            <a:srgbClr val="FFFFFF"/>
+          </a:solidFill>
+          <a:ln w="12700">
+            <a:solidFill>
+              <a:srgbClr val="E2E8F0"/>
+            </a:solidFill>
+          </a:ln>
+        </p:spPr>
+        <p:style>
+          <a:lnRef idx="1">
+            <a:schemeClr val="accent1"/>
+          </a:lnRef>
+          <a:fillRef idx="3">
+            <a:schemeClr val="accent1"/>
+          </a:fillRef>
+          <a:effectRef idx="2">
+            <a:schemeClr val="accent1"/>
+          </a:effectRef>
+          <a:fontRef idx="minor">
+            <a:schemeClr val="lt1"/>
+          </a:fontRef>
+        </p:style>
+        <p:txBody>
+          <a:bodyPr rtlCol="0" anchor="ctr"/>
+          <a:lstStyle/>
+          <a:p>
+            <a:pPr algn="ctr"/>
+          </a:p>
+        </p:txBody>
+      </p:sp>
+      <p:pic>
+        <p:nvPicPr>
+          <p:cNvPr id="9" name="Picture 8" descr="Fig5b_hardware_assessment.png"/>
+          <p:cNvPicPr>
+            <a:picLocks noChangeAspect="1"/>
+          </p:cNvPicPr>
+          <p:nvPr/>
+        </p:nvPicPr>
+        <p:blipFill>
+          <a:blip r:embed="rId3"/>
+          <a:stretch>
+            <a:fillRect/>
+          </a:stretch>
+        </p:blipFill>
+        <p:spPr>
+          <a:xfrm>
+            <a:off x="6339535" y="1920240"/>
+            <a:ext cx="5029200" cy="1810512"/>
+          </a:xfrm>
+          <a:prstGeom prst="rect">
+            <a:avLst/>
+          </a:prstGeom>
+        </p:spPr>
+      </p:pic>
+      <p:sp>
+        <p:nvSpPr>
+          <p:cNvPr id="10" name="TextBox 9"/>
+          <p:cNvSpPr txBox="1"/>
+          <p:nvPr/>
+        </p:nvSpPr>
+        <p:spPr>
+          <a:xfrm>
+            <a:off x="6385255" y="1645920"/>
+            <a:ext cx="5212080" cy="274320"/>
+          </a:xfrm>
+          <a:prstGeom prst="rect">
+            <a:avLst/>
+          </a:prstGeom>
+          <a:noFill/>
+        </p:spPr>
+        <p:txBody>
+          <a:bodyPr wrap="none">
+            <a:spAutoFit/>
+          </a:bodyPr>
+          <a:lstStyle/>
+          <a:p>
+            <a:pPr>
+              <a:defRPr sz="900" b="1">
+                <a:solidFill>
+                  <a:srgbClr val="0284C7"/>
+                </a:solidFill>
+              </a:defRPr>
+            </a:pPr>
+            <a:r>
+              <a:t>(b) Hardware Self-Magnetic Assessment Protocol (Power-State Mapping)</a:t>
+            </a:r>
+          </a:p>
+        </p:txBody>
+      </p:sp>
+      <p:sp>
+        <p:nvSpPr>
+          <p:cNvPr id="11" name="Rounded Rectangle 10"/>
+          <p:cNvSpPr/>
+          <p:nvPr/>
+        </p:nvSpPr>
+        <p:spPr>
+          <a:xfrm>
+            <a:off x="731520" y="3977639"/>
+            <a:ext cx="10728655" cy="2331720"/>
+          </a:xfrm>
+          <a:prstGeom prst="roundRect">
+            <a:avLst/>
+          </a:prstGeom>
+          <a:solidFill>
+            <a:srgbClr val="FFFFFF"/>
+          </a:solidFill>
+          <a:ln w="12700">
+            <a:solidFill>
+              <a:srgbClr val="E2E8F0"/>
+            </a:solidFill>
+          </a:ln>
+        </p:spPr>
+        <p:style>
+          <a:lnRef idx="1">
+            <a:schemeClr val="accent1"/>
+          </a:lnRef>
+          <a:fillRef idx="3">
+            <a:schemeClr val="accent1"/>
+          </a:fillRef>
+          <a:effectRef idx="2">
+            <a:schemeClr val="accent1"/>
+          </a:effectRef>
+          <a:fontRef idx="minor">
+            <a:schemeClr val="lt1"/>
+          </a:fontRef>
+        </p:style>
+        <p:txBody>
+          <a:bodyPr rtlCol="0" anchor="ctr"/>
+          <a:lstStyle/>
+          <a:p>
+            <a:pPr algn="ctr"/>
+          </a:p>
+        </p:txBody>
+      </p:sp>
+      <p:pic>
+        <p:nvPicPr>
+          <p:cNvPr id="12" name="Picture 11" descr="Fig5c_decision_matrix.png"/>
+          <p:cNvPicPr>
+            <a:picLocks noChangeAspect="1"/>
+          </p:cNvPicPr>
+          <p:nvPr/>
+        </p:nvPicPr>
+        <p:blipFill>
+          <a:blip r:embed="rId4"/>
+          <a:stretch>
+            <a:fillRect/>
+          </a:stretch>
+        </p:blipFill>
+        <p:spPr>
+          <a:xfrm>
+            <a:off x="822960" y="4297679"/>
+            <a:ext cx="10545775" cy="1947672"/>
+          </a:xfrm>
+          <a:prstGeom prst="rect">
+            <a:avLst/>
+          </a:prstGeom>
+        </p:spPr>
+      </p:pic>
+      <p:sp>
+        <p:nvSpPr>
+          <p:cNvPr id="13" name="TextBox 12"/>
+          <p:cNvSpPr txBox="1"/>
+          <p:nvPr/>
+        </p:nvSpPr>
+        <p:spPr>
+          <a:xfrm>
+            <a:off x="868680" y="4023359"/>
+            <a:ext cx="10728655" cy="274320"/>
+          </a:xfrm>
+          <a:prstGeom prst="rect">
+            <a:avLst/>
+          </a:prstGeom>
+          <a:noFill/>
+        </p:spPr>
+        <p:txBody>
+          <a:bodyPr wrap="none">
+            <a:spAutoFit/>
+          </a:bodyPr>
+          <a:lstStyle/>
+          <a:p>
+            <a:pPr>
+              <a:defRPr sz="900" b="1">
+                <a:solidFill>
+                  <a:srgbClr val="0284C7"/>
+                </a:solidFill>
+              </a:defRPr>
+            </a:pPr>
+            <a:r>
+              <a:t>(c) Post-Flight Phenotypic Risk Disambiguation Framework (Comparative Matrix)</a:t>
+            </a:r>
+          </a:p>
+        </p:txBody>
+      </p:sp>
+      <p:sp>
+        <p:nvSpPr>
+          <p:cNvPr id="14" name="TextBox 13"/>
+          <p:cNvSpPr txBox="1"/>
+          <p:nvPr/>
+        </p:nvSpPr>
+        <p:spPr>
+          <a:xfrm>
+            <a:off x="731520" y="6446520"/>
+            <a:ext cx="10728655" cy="274320"/>
+          </a:xfrm>
+          <a:prstGeom prst="rect">
+            <a:avLst/>
+          </a:prstGeom>
+          <a:noFill/>
+        </p:spPr>
+        <p:txBody>
+          <a:bodyPr wrap="none">
+            <a:spAutoFit/>
+          </a:bodyPr>
+          <a:lstStyle/>
+          <a:p>
+            <a:pPr>
+              <a:defRPr sz="850">
+                <a:solidFill>
+                  <a:srgbClr val="64748B"/>
+                </a:solidFill>
+              </a:defRPr>
+            </a:pPr>
+            <a:r>
+              <a:t>Life Sciences in Space Research (2026) | Artemis III LEAF Perspective              Slide 12 of 16</a:t>
+            </a:r>
+          </a:p>
+        </p:txBody>
+      </p:sp>
+    </p:spTree>
+  </p:cSld>
+  <p:clrMapOvr>
+    <a:masterClrMapping/>
+  </p:clrMapOvr>
+</p:sld>
+</file>
+
+<file path=ppt/slides/slide13.xml><?xml version="1.0" encoding="utf-8"?>
 <p:sld xmlns:a="http://schemas.openxmlformats.org/drawingml/2006/main" xmlns:p="http://schemas.openxmlformats.org/presentationml/2006/main" xmlns:r="http://schemas.openxmlformats.org/officeDocument/2006/relationships">
   <p:cSld>
     <p:bg>
@@ -6816,485 +7499,7 @@
               </a:defRPr>
             </a:pPr>
             <a:r>
-              <a:t>Life Sciences in Space Research (2026) | Artemis III LEAF Perspective              Slide 12 of 15</a:t>
-            </a:r>
-          </a:p>
-        </p:txBody>
-      </p:sp>
-    </p:spTree>
-  </p:cSld>
-  <p:clrMapOvr>
-    <a:masterClrMapping/>
-  </p:clrMapOvr>
-</p:sld>
-</file>
-
-<file path=ppt/slides/slide13.xml><?xml version="1.0" encoding="utf-8"?>
-<p:sld xmlns:a="http://schemas.openxmlformats.org/drawingml/2006/main" xmlns:p="http://schemas.openxmlformats.org/presentationml/2006/main" xmlns:r="http://schemas.openxmlformats.org/officeDocument/2006/relationships">
-  <p:cSld>
-    <p:bg>
-      <p:bgPr>
-        <a:solidFill>
-          <a:srgbClr val="F8FAFC"/>
-        </a:solidFill>
-        <a:effectLst/>
-      </p:bgPr>
-    </p:bg>
-    <p:spTree>
-      <p:nvGrpSpPr>
-        <p:cNvPr id="1" name=""/>
-        <p:cNvGrpSpPr/>
-        <p:nvPr/>
-      </p:nvGrpSpPr>
-      <p:grpSpPr/>
-      <p:sp>
-        <p:nvSpPr>
-          <p:cNvPr id="2" name="TextBox 1"/>
-          <p:cNvSpPr txBox="1"/>
-          <p:nvPr/>
-        </p:nvSpPr>
-        <p:spPr>
-          <a:xfrm>
-            <a:off x="731520" y="365760"/>
-            <a:ext cx="10728655" cy="320040"/>
-          </a:xfrm>
-          <a:prstGeom prst="rect">
-            <a:avLst/>
-          </a:prstGeom>
-          <a:noFill/>
-        </p:spPr>
-        <p:txBody>
-          <a:bodyPr wrap="square">
-            <a:spAutoFit/>
-          </a:bodyPr>
-          <a:lstStyle/>
-          <a:p>
-            <a:pPr>
-              <a:defRPr sz="950" b="1">
-                <a:solidFill>
-                  <a:srgbClr val="0284C7"/>
-                </a:solidFill>
-              </a:defRPr>
-            </a:pPr>
-            <a:r>
-              <a:t>GRAPHICAL ABSTRACT | LSSR SUBMISSION SUMMARY</a:t>
-            </a:r>
-          </a:p>
-        </p:txBody>
-      </p:sp>
-      <p:sp>
-        <p:nvSpPr>
-          <p:cNvPr id="3" name="TextBox 2"/>
-          <p:cNvSpPr txBox="1"/>
-          <p:nvPr/>
-        </p:nvSpPr>
-        <p:spPr>
-          <a:xfrm>
-            <a:off x="731520" y="658368"/>
-            <a:ext cx="10728655" cy="502920"/>
-          </a:xfrm>
-          <a:prstGeom prst="rect">
-            <a:avLst/>
-          </a:prstGeom>
-          <a:noFill/>
-        </p:spPr>
-        <p:txBody>
-          <a:bodyPr wrap="square">
-            <a:spAutoFit/>
-          </a:bodyPr>
-          <a:lstStyle/>
-          <a:p>
-            <a:pPr>
-              <a:defRPr sz="2000" b="1">
-                <a:solidFill>
-                  <a:srgbClr val="0F172A"/>
-                </a:solidFill>
-              </a:defRPr>
-            </a:pPr>
-            <a:r>
-              <a:t>The Complete Narrative in a Single Glance</a:t>
-            </a:r>
-          </a:p>
-        </p:txBody>
-      </p:sp>
-      <p:sp>
-        <p:nvSpPr>
-          <p:cNvPr id="4" name="TextBox 3"/>
-          <p:cNvSpPr txBox="1"/>
-          <p:nvPr/>
-        </p:nvSpPr>
-        <p:spPr>
-          <a:xfrm>
-            <a:off x="731520" y="1115568"/>
-            <a:ext cx="10728655" cy="365760"/>
-          </a:xfrm>
-          <a:prstGeom prst="rect">
-            <a:avLst/>
-          </a:prstGeom>
-          <a:noFill/>
-        </p:spPr>
-        <p:txBody>
-          <a:bodyPr wrap="square">
-            <a:spAutoFit/>
-          </a:bodyPr>
-          <a:lstStyle/>
-          <a:p>
-            <a:pPr>
-              <a:defRPr sz="1100" i="1">
-                <a:solidFill>
-                  <a:srgbClr val="475569"/>
-                </a:solidFill>
-              </a:defRPr>
-            </a:pPr>
-            <a:r>
-              <a:t>From lunar surface physics to 0–5 day developmental vulnerability and flight risk retirement</a:t>
-            </a:r>
-          </a:p>
-        </p:txBody>
-      </p:sp>
-      <p:sp>
-        <p:nvSpPr>
-          <p:cNvPr id="5" name="Rounded Rectangle 4"/>
-          <p:cNvSpPr/>
-          <p:nvPr/>
-        </p:nvSpPr>
-        <p:spPr>
-          <a:xfrm>
-            <a:off x="731520" y="1645920"/>
-            <a:ext cx="3474720" cy="4663440"/>
-          </a:xfrm>
-          <a:prstGeom prst="roundRect">
-            <a:avLst/>
-          </a:prstGeom>
-          <a:solidFill>
-            <a:srgbClr val="E0F2FE"/>
-          </a:solidFill>
-          <a:ln w="15240">
-            <a:solidFill>
-              <a:srgbClr val="0284C7"/>
-            </a:solidFill>
-          </a:ln>
-        </p:spPr>
-        <p:style>
-          <a:lnRef idx="1">
-            <a:schemeClr val="accent1"/>
-          </a:lnRef>
-          <a:fillRef idx="3">
-            <a:schemeClr val="accent1"/>
-          </a:fillRef>
-          <a:effectRef idx="2">
-            <a:schemeClr val="accent1"/>
-          </a:effectRef>
-          <a:fontRef idx="minor">
-            <a:schemeClr val="lt1"/>
-          </a:fontRef>
-        </p:style>
-        <p:txBody>
-          <a:bodyPr rtlCol="0" anchor="ctr"/>
-          <a:lstStyle/>
-          <a:p>
-            <a:pPr algn="ctr"/>
-          </a:p>
-        </p:txBody>
-      </p:sp>
-      <p:pic>
-        <p:nvPicPr>
-          <p:cNvPr id="6" name="Picture 5" descr="GA_panel1_problem.png"/>
-          <p:cNvPicPr>
-            <a:picLocks noChangeAspect="1"/>
-          </p:cNvPicPr>
-          <p:nvPr/>
-        </p:nvPicPr>
-        <p:blipFill>
-          <a:blip r:embed="rId2"/>
-          <a:stretch>
-            <a:fillRect/>
-          </a:stretch>
-        </p:blipFill>
-        <p:spPr>
-          <a:xfrm>
-            <a:off x="868680" y="2011680"/>
-            <a:ext cx="3200400" cy="4160520"/>
-          </a:xfrm>
-          <a:prstGeom prst="rect">
-            <a:avLst/>
-          </a:prstGeom>
-        </p:spPr>
-      </p:pic>
-      <p:sp>
-        <p:nvSpPr>
-          <p:cNvPr id="7" name="TextBox 6"/>
-          <p:cNvSpPr txBox="1"/>
-          <p:nvPr/>
-        </p:nvSpPr>
-        <p:spPr>
-          <a:xfrm>
-            <a:off x="822960" y="1691640"/>
-            <a:ext cx="3291840" cy="320040"/>
-          </a:xfrm>
-          <a:prstGeom prst="rect">
-            <a:avLst/>
-          </a:prstGeom>
-          <a:noFill/>
-        </p:spPr>
-        <p:txBody>
-          <a:bodyPr wrap="none">
-            <a:spAutoFit/>
-          </a:bodyPr>
-          <a:lstStyle/>
-          <a:p>
-            <a:pPr algn="ctr">
-              <a:defRPr sz="1050" b="1">
-                <a:solidFill>
-                  <a:srgbClr val="0284C7"/>
-                </a:solidFill>
-              </a:defRPr>
-            </a:pPr>
-            <a:r>
-              <a:t>(1) The Lunar Reality (&lt;0.8 nT Void)</a:t>
-            </a:r>
-          </a:p>
-        </p:txBody>
-      </p:sp>
-      <p:sp>
-        <p:nvSpPr>
-          <p:cNvPr id="8" name="Rounded Rectangle 7"/>
-          <p:cNvSpPr/>
-          <p:nvPr/>
-        </p:nvSpPr>
-        <p:spPr>
-          <a:xfrm>
-            <a:off x="4343400" y="1645920"/>
-            <a:ext cx="3474720" cy="4663440"/>
-          </a:xfrm>
-          <a:prstGeom prst="roundRect">
-            <a:avLst/>
-          </a:prstGeom>
-          <a:solidFill>
-            <a:srgbClr val="FEF2F2"/>
-          </a:solidFill>
-          <a:ln w="15240">
-            <a:solidFill>
-              <a:srgbClr val="DC2626"/>
-            </a:solidFill>
-          </a:ln>
-        </p:spPr>
-        <p:style>
-          <a:lnRef idx="1">
-            <a:schemeClr val="accent1"/>
-          </a:lnRef>
-          <a:fillRef idx="3">
-            <a:schemeClr val="accent1"/>
-          </a:fillRef>
-          <a:effectRef idx="2">
-            <a:schemeClr val="accent1"/>
-          </a:effectRef>
-          <a:fontRef idx="minor">
-            <a:schemeClr val="lt1"/>
-          </a:fontRef>
-        </p:style>
-        <p:txBody>
-          <a:bodyPr rtlCol="0" anchor="ctr"/>
-          <a:lstStyle/>
-          <a:p>
-            <a:pPr algn="ctr"/>
-          </a:p>
-        </p:txBody>
-      </p:sp>
-      <p:pic>
-        <p:nvPicPr>
-          <p:cNvPr id="9" name="Picture 8" descr="GA_panel2_mechanism.png"/>
-          <p:cNvPicPr>
-            <a:picLocks noChangeAspect="1"/>
-          </p:cNvPicPr>
-          <p:nvPr/>
-        </p:nvPicPr>
-        <p:blipFill>
-          <a:blip r:embed="rId3"/>
-          <a:stretch>
-            <a:fillRect/>
-          </a:stretch>
-        </p:blipFill>
-        <p:spPr>
-          <a:xfrm>
-            <a:off x="4480560" y="2011680"/>
-            <a:ext cx="3200400" cy="4160520"/>
-          </a:xfrm>
-          <a:prstGeom prst="rect">
-            <a:avLst/>
-          </a:prstGeom>
-        </p:spPr>
-      </p:pic>
-      <p:sp>
-        <p:nvSpPr>
-          <p:cNvPr id="10" name="TextBox 9"/>
-          <p:cNvSpPr txBox="1"/>
-          <p:nvPr/>
-        </p:nvSpPr>
-        <p:spPr>
-          <a:xfrm>
-            <a:off x="4434840" y="1691640"/>
-            <a:ext cx="3291840" cy="320040"/>
-          </a:xfrm>
-          <a:prstGeom prst="rect">
-            <a:avLst/>
-          </a:prstGeom>
-          <a:noFill/>
-        </p:spPr>
-        <p:txBody>
-          <a:bodyPr wrap="none">
-            <a:spAutoFit/>
-          </a:bodyPr>
-          <a:lstStyle/>
-          <a:p>
-            <a:pPr algn="ctr">
-              <a:defRPr sz="1050" b="1">
-                <a:solidFill>
-                  <a:srgbClr val="DC2626"/>
-                </a:solidFill>
-              </a:defRPr>
-            </a:pPr>
-            <a:r>
-              <a:t>(2) The 0–5 Day Vulnerability Bottleneck</a:t>
-            </a:r>
-          </a:p>
-        </p:txBody>
-      </p:sp>
-      <p:sp>
-        <p:nvSpPr>
-          <p:cNvPr id="11" name="Rounded Rectangle 10"/>
-          <p:cNvSpPr/>
-          <p:nvPr/>
-        </p:nvSpPr>
-        <p:spPr>
-          <a:xfrm>
-            <a:off x="7955279" y="1645920"/>
-            <a:ext cx="3474720" cy="4663440"/>
-          </a:xfrm>
-          <a:prstGeom prst="roundRect">
-            <a:avLst/>
-          </a:prstGeom>
-          <a:solidFill>
-            <a:srgbClr val="DCFCE7"/>
-          </a:solidFill>
-          <a:ln w="15240">
-            <a:solidFill>
-              <a:srgbClr val="16A34A"/>
-            </a:solidFill>
-          </a:ln>
-        </p:spPr>
-        <p:style>
-          <a:lnRef idx="1">
-            <a:schemeClr val="accent1"/>
-          </a:lnRef>
-          <a:fillRef idx="3">
-            <a:schemeClr val="accent1"/>
-          </a:fillRef>
-          <a:effectRef idx="2">
-            <a:schemeClr val="accent1"/>
-          </a:effectRef>
-          <a:fontRef idx="minor">
-            <a:schemeClr val="lt1"/>
-          </a:fontRef>
-        </p:style>
-        <p:txBody>
-          <a:bodyPr rtlCol="0" anchor="ctr"/>
-          <a:lstStyle/>
-          <a:p>
-            <a:pPr algn="ctr"/>
-          </a:p>
-        </p:txBody>
-      </p:sp>
-      <p:pic>
-        <p:nvPicPr>
-          <p:cNvPr id="12" name="Picture 11" descr="GA_panel3_solution.png"/>
-          <p:cNvPicPr>
-            <a:picLocks noChangeAspect="1"/>
-          </p:cNvPicPr>
-          <p:nvPr/>
-        </p:nvPicPr>
-        <p:blipFill>
-          <a:blip r:embed="rId4"/>
-          <a:stretch>
-            <a:fillRect/>
-          </a:stretch>
-        </p:blipFill>
-        <p:spPr>
-          <a:xfrm>
-            <a:off x="8092439" y="2011680"/>
-            <a:ext cx="3200400" cy="4160520"/>
-          </a:xfrm>
-          <a:prstGeom prst="rect">
-            <a:avLst/>
-          </a:prstGeom>
-        </p:spPr>
-      </p:pic>
-      <p:sp>
-        <p:nvSpPr>
-          <p:cNvPr id="13" name="TextBox 12"/>
-          <p:cNvSpPr txBox="1"/>
-          <p:nvPr/>
-        </p:nvSpPr>
-        <p:spPr>
-          <a:xfrm>
-            <a:off x="8046719" y="1691640"/>
-            <a:ext cx="3291840" cy="320040"/>
-          </a:xfrm>
-          <a:prstGeom prst="rect">
-            <a:avLst/>
-          </a:prstGeom>
-          <a:noFill/>
-        </p:spPr>
-        <p:txBody>
-          <a:bodyPr wrap="none">
-            <a:spAutoFit/>
-          </a:bodyPr>
-          <a:lstStyle/>
-          <a:p>
-            <a:pPr algn="ctr">
-              <a:defRPr sz="1050" b="1">
-                <a:solidFill>
-                  <a:srgbClr val="16A34A"/>
-                </a:solidFill>
-              </a:defRPr>
-            </a:pPr>
-            <a:r>
-              <a:t>(3) Flight Validation &amp; Risk Retirement</a:t>
-            </a:r>
-          </a:p>
-        </p:txBody>
-      </p:sp>
-      <p:sp>
-        <p:nvSpPr>
-          <p:cNvPr id="14" name="TextBox 13"/>
-          <p:cNvSpPr txBox="1"/>
-          <p:nvPr/>
-        </p:nvSpPr>
-        <p:spPr>
-          <a:xfrm>
-            <a:off x="731520" y="6446520"/>
-            <a:ext cx="10728655" cy="274320"/>
-          </a:xfrm>
-          <a:prstGeom prst="rect">
-            <a:avLst/>
-          </a:prstGeom>
-          <a:noFill/>
-        </p:spPr>
-        <p:txBody>
-          <a:bodyPr wrap="none">
-            <a:spAutoFit/>
-          </a:bodyPr>
-          <a:lstStyle/>
-          <a:p>
-            <a:pPr>
-              <a:defRPr sz="850">
-                <a:solidFill>
-                  <a:srgbClr val="64748B"/>
-                </a:solidFill>
-              </a:defRPr>
-            </a:pPr>
-            <a:r>
-              <a:t>Life Sciences in Space Research (2026) | Artemis III LEAF Perspective              Slide 13 of 15</a:t>
+              <a:t>Life Sciences in Space Research (2026) | Artemis III LEAF Perspective              Slide 13 of 16</a:t>
             </a:r>
           </a:p>
         </p:txBody>
@@ -7355,7 +7560,7 @@
               </a:defRPr>
             </a:pPr>
             <a:r>
-              <a:t>RESEARCH ROADMAP &amp; DISCUSSION</a:t>
+              <a:t>GRAPHICAL ABSTRACT | LSSR SUBMISSION SUMMARY</a:t>
             </a:r>
           </a:p>
         </p:txBody>
@@ -7390,7 +7595,7 @@
               </a:defRPr>
             </a:pPr>
             <a:r>
-              <a:t>Key Questions for the Working Group</a:t>
+              <a:t>The Complete Narrative in a Single Glance</a:t>
             </a:r>
           </a:p>
         </p:txBody>
@@ -7425,7 +7630,7 @@
               </a:defRPr>
             </a:pPr>
             <a:r>
-              <a:t>Strategic priorities for Artemis III LEAF operations and long-duration lunar bioregenerative life support</a:t>
+              <a:t>From lunar surface physics to 0–5 day developmental vulnerability and flight risk retirement</a:t>
             </a:r>
           </a:p>
         </p:txBody>
@@ -7439,7 +7644,7 @@
         <p:spPr>
           <a:xfrm>
             <a:off x="731520" y="1645920"/>
-            <a:ext cx="10728655" cy="1371600"/>
+            <a:ext cx="3474720" cy="4663440"/>
           </a:xfrm>
           <a:prstGeom prst="roundRect">
             <a:avLst/>
@@ -7475,16 +7680,40 @@
           </a:p>
         </p:txBody>
       </p:sp>
-      <p:sp>
-        <p:nvSpPr>
-          <p:cNvPr id="6" name="TextBox 5"/>
+      <p:pic>
+        <p:nvPicPr>
+          <p:cNvPr id="6" name="Picture 5" descr="GA_panel1_problem.png"/>
+          <p:cNvPicPr>
+            <a:picLocks noChangeAspect="1"/>
+          </p:cNvPicPr>
+          <p:nvPr/>
+        </p:nvPicPr>
+        <p:blipFill>
+          <a:blip r:embed="rId2"/>
+          <a:stretch>
+            <a:fillRect/>
+          </a:stretch>
+        </p:blipFill>
+        <p:spPr>
+          <a:xfrm>
+            <a:off x="868680" y="2011680"/>
+            <a:ext cx="3200400" cy="4160520"/>
+          </a:xfrm>
+          <a:prstGeom prst="rect">
+            <a:avLst/>
+          </a:prstGeom>
+        </p:spPr>
+      </p:pic>
+      <p:sp>
+        <p:nvSpPr>
+          <p:cNvPr id="7" name="TextBox 6"/>
           <p:cNvSpPr txBox="1"/>
           <p:nvPr/>
         </p:nvSpPr>
         <p:spPr>
           <a:xfrm>
-            <a:off x="914400" y="1737360"/>
-            <a:ext cx="10362895" cy="1188720"/>
+            <a:off x="822960" y="1691640"/>
+            <a:ext cx="3291840" cy="320040"/>
           </a:xfrm>
           <a:prstGeom prst="rect">
             <a:avLst/>
@@ -7492,64 +7721,44 @@
           <a:noFill/>
         </p:spPr>
         <p:txBody>
-          <a:bodyPr wrap="square">
+          <a:bodyPr wrap="none">
             <a:spAutoFit/>
           </a:bodyPr>
           <a:lstStyle/>
           <a:p>
-            <a:pPr>
-              <a:defRPr sz="1150" b="1">
+            <a:pPr algn="ctr">
+              <a:defRPr sz="1050" b="1">
                 <a:solidFill>
                   <a:srgbClr val="0284C7"/>
                 </a:solidFill>
               </a:defRPr>
             </a:pPr>
             <a:r>
-              <a:t>Question 1: Flight Payload Hardware Integration</a:t>
-            </a:r>
-          </a:p>
-          <a:p>
-            <a:pPr>
-              <a:defRPr sz="950">
-                <a:solidFill>
-                  <a:srgbClr val="0F172A"/>
-                </a:solidFill>
-              </a:defRPr>
-            </a:pPr>
-            <a:r>
-              <a:t>• How should Artemis LEAF and commercial lunar biological payloads integrate 3-axis fluxgate magnetometers without introducing thermal or EMI artifacts?</a:t>
-            </a:r>
-            <a:br/>
-            <a:r>
-              <a:t>• Where is the optimal mounting position relative to seedling cassettes and LEDs?</a:t>
-            </a:r>
-            <a:br/>
-            <a:r>
-              <a:t>• What telemetry sample rates (10 Hz vs. 1 Hz) are necessary to capture AC ripple?</a:t>
-            </a:r>
-          </a:p>
-        </p:txBody>
-      </p:sp>
-      <p:sp>
-        <p:nvSpPr>
-          <p:cNvPr id="7" name="Rounded Rectangle 6"/>
+              <a:t>(1) The Lunar Reality (&lt;0.8 nT Void)</a:t>
+            </a:r>
+          </a:p>
+        </p:txBody>
+      </p:sp>
+      <p:sp>
+        <p:nvSpPr>
+          <p:cNvPr id="8" name="Rounded Rectangle 7"/>
           <p:cNvSpPr/>
           <p:nvPr/>
         </p:nvSpPr>
         <p:spPr>
           <a:xfrm>
-            <a:off x="731520" y="3200400"/>
-            <a:ext cx="10728655" cy="1371600"/>
+            <a:off x="4343400" y="1645920"/>
+            <a:ext cx="3474720" cy="4663440"/>
           </a:xfrm>
           <a:prstGeom prst="roundRect">
             <a:avLst/>
           </a:prstGeom>
           <a:solidFill>
-            <a:srgbClr val="FEF3C7"/>
+            <a:srgbClr val="FEF2F2"/>
           </a:solidFill>
           <a:ln w="15240">
             <a:solidFill>
-              <a:srgbClr val="D97706"/>
+              <a:srgbClr val="DC2626"/>
             </a:solidFill>
           </a:ln>
         </p:spPr>
@@ -7575,16 +7784,40 @@
           </a:p>
         </p:txBody>
       </p:sp>
-      <p:sp>
-        <p:nvSpPr>
-          <p:cNvPr id="8" name="TextBox 7"/>
+      <p:pic>
+        <p:nvPicPr>
+          <p:cNvPr id="9" name="Picture 8" descr="GA_panel2_mechanism.png"/>
+          <p:cNvPicPr>
+            <a:picLocks noChangeAspect="1"/>
+          </p:cNvPicPr>
+          <p:nvPr/>
+        </p:nvPicPr>
+        <p:blipFill>
+          <a:blip r:embed="rId3"/>
+          <a:stretch>
+            <a:fillRect/>
+          </a:stretch>
+        </p:blipFill>
+        <p:spPr>
+          <a:xfrm>
+            <a:off x="4480560" y="2011680"/>
+            <a:ext cx="3200400" cy="4160520"/>
+          </a:xfrm>
+          <a:prstGeom prst="rect">
+            <a:avLst/>
+          </a:prstGeom>
+        </p:spPr>
+      </p:pic>
+      <p:sp>
+        <p:nvSpPr>
+          <p:cNvPr id="10" name="TextBox 9"/>
           <p:cNvSpPr txBox="1"/>
           <p:nvPr/>
         </p:nvSpPr>
         <p:spPr>
           <a:xfrm>
-            <a:off x="914400" y="3291840"/>
-            <a:ext cx="10362895" cy="1188720"/>
+            <a:off x="4434840" y="1691640"/>
+            <a:ext cx="3291840" cy="320040"/>
           </a:xfrm>
           <a:prstGeom prst="rect">
             <a:avLst/>
@@ -7592,54 +7825,34 @@
           <a:noFill/>
         </p:spPr>
         <p:txBody>
-          <a:bodyPr wrap="square">
+          <a:bodyPr wrap="none">
             <a:spAutoFit/>
           </a:bodyPr>
           <a:lstStyle/>
           <a:p>
-            <a:pPr>
-              <a:defRPr sz="1150" b="1">
-                <a:solidFill>
-                  <a:srgbClr val="D97706"/>
+            <a:pPr algn="ctr">
+              <a:defRPr sz="1050" b="1">
+                <a:solidFill>
+                  <a:srgbClr val="DC2626"/>
                 </a:solidFill>
               </a:defRPr>
             </a:pPr>
             <a:r>
-              <a:t>Question 2: Crop Plasticity &amp; Cultivar Selection</a:t>
-            </a:r>
-          </a:p>
-          <a:p>
-            <a:pPr>
-              <a:defRPr sz="950">
-                <a:solidFill>
-                  <a:srgbClr val="0F172A"/>
-                </a:solidFill>
-              </a:defRPr>
-            </a:pPr>
-            <a:r>
-              <a:t>• Which candidate space crops (Arabidopsis, microgreens, dwarf wheat, tomato) demonstrate natural genetic tolerance to near-null magnetic fields?</a:t>
-            </a:r>
-            <a:br/>
-            <a:r>
-              <a:t>• Can pre-flight seed conditioning (magnetic priming or epigenetic pre-exposure) mitigate the Day 0–5 germination and emergence lag?</a:t>
-            </a:r>
-            <a:br/>
-            <a:r>
-              <a:t>• How do mutant lines (e.g. cry1/cry2, hy5, aox1a/d) perform under simulated lunar fields?</a:t>
-            </a:r>
-          </a:p>
-        </p:txBody>
-      </p:sp>
-      <p:sp>
-        <p:nvSpPr>
-          <p:cNvPr id="9" name="Rounded Rectangle 8"/>
+              <a:t>(2) The 0–5 Day Vulnerability Bottleneck</a:t>
+            </a:r>
+          </a:p>
+        </p:txBody>
+      </p:sp>
+      <p:sp>
+        <p:nvSpPr>
+          <p:cNvPr id="11" name="Rounded Rectangle 10"/>
           <p:cNvSpPr/>
           <p:nvPr/>
         </p:nvSpPr>
         <p:spPr>
           <a:xfrm>
-            <a:off x="731520" y="4754880"/>
-            <a:ext cx="10728655" cy="1371600"/>
+            <a:off x="7955279" y="1645920"/>
+            <a:ext cx="3474720" cy="4663440"/>
           </a:xfrm>
           <a:prstGeom prst="roundRect">
             <a:avLst/>
@@ -7675,71 +7888,40 @@
           </a:p>
         </p:txBody>
       </p:sp>
-      <p:sp>
-        <p:nvSpPr>
-          <p:cNvPr id="10" name="TextBox 9"/>
+      <p:pic>
+        <p:nvPicPr>
+          <p:cNvPr id="12" name="Picture 11" descr="GA_panel3_solution.png"/>
+          <p:cNvPicPr>
+            <a:picLocks noChangeAspect="1"/>
+          </p:cNvPicPr>
+          <p:nvPr/>
+        </p:nvPicPr>
+        <p:blipFill>
+          <a:blip r:embed="rId4"/>
+          <a:stretch>
+            <a:fillRect/>
+          </a:stretch>
+        </p:blipFill>
+        <p:spPr>
+          <a:xfrm>
+            <a:off x="8092439" y="2011680"/>
+            <a:ext cx="3200400" cy="4160520"/>
+          </a:xfrm>
+          <a:prstGeom prst="rect">
+            <a:avLst/>
+          </a:prstGeom>
+        </p:spPr>
+      </p:pic>
+      <p:sp>
+        <p:nvSpPr>
+          <p:cNvPr id="13" name="TextBox 12"/>
           <p:cNvSpPr txBox="1"/>
           <p:nvPr/>
         </p:nvSpPr>
         <p:spPr>
           <a:xfrm>
-            <a:off x="914400" y="4846320"/>
-            <a:ext cx="10362895" cy="1188720"/>
-          </a:xfrm>
-          <a:prstGeom prst="rect">
-            <a:avLst/>
-          </a:prstGeom>
-          <a:noFill/>
-        </p:spPr>
-        <p:txBody>
-          <a:bodyPr wrap="square">
-            <a:spAutoFit/>
-          </a:bodyPr>
-          <a:lstStyle/>
-          <a:p>
-            <a:pPr>
-              <a:defRPr sz="1150" b="1">
-                <a:solidFill>
-                  <a:srgbClr val="16A34A"/>
-                </a:solidFill>
-              </a:defRPr>
-            </a:pPr>
-            <a:r>
-              <a:t>Question 3: Active Magnetic Sub-Assemblies for BLSS</a:t>
-            </a:r>
-          </a:p>
-          <a:p>
-            <a:pPr>
-              <a:defRPr sz="950">
-                <a:solidFill>
-                  <a:srgbClr val="0F172A"/>
-                </a:solidFill>
-              </a:defRPr>
-            </a:pPr>
-            <a:r>
-              <a:t>• Should future lunar surface greenhouses incorporate triaxial Helmholtz coils as standard operational infrastructure?</a:t>
-            </a:r>
-            <a:br/>
-            <a:r>
-              <a:t>• What are the mass, volume, and power trade-offs of delivering a continuous 45 µT vector over square meters of plant canopy?</a:t>
-            </a:r>
-            <a:br/>
-            <a:r>
-              <a:t>• Does vector re-application completely restore nutritional quality and secondary metabolite profiles?</a:t>
-            </a:r>
-          </a:p>
-        </p:txBody>
-      </p:sp>
-      <p:sp>
-        <p:nvSpPr>
-          <p:cNvPr id="11" name="TextBox 10"/>
-          <p:cNvSpPr txBox="1"/>
-          <p:nvPr/>
-        </p:nvSpPr>
-        <p:spPr>
-          <a:xfrm>
-            <a:off x="731520" y="6446520"/>
-            <a:ext cx="10728655" cy="274320"/>
+            <a:off x="8046719" y="1691640"/>
+            <a:ext cx="3291840" cy="320040"/>
           </a:xfrm>
           <a:prstGeom prst="rect">
             <a:avLst/>
@@ -7752,6 +7934,41 @@
           </a:bodyPr>
           <a:lstStyle/>
           <a:p>
+            <a:pPr algn="ctr">
+              <a:defRPr sz="1050" b="1">
+                <a:solidFill>
+                  <a:srgbClr val="16A34A"/>
+                </a:solidFill>
+              </a:defRPr>
+            </a:pPr>
+            <a:r>
+              <a:t>(3) Flight Validation &amp; Risk Retirement</a:t>
+            </a:r>
+          </a:p>
+        </p:txBody>
+      </p:sp>
+      <p:sp>
+        <p:nvSpPr>
+          <p:cNvPr id="14" name="TextBox 13"/>
+          <p:cNvSpPr txBox="1"/>
+          <p:nvPr/>
+        </p:nvSpPr>
+        <p:spPr>
+          <a:xfrm>
+            <a:off x="731520" y="6446520"/>
+            <a:ext cx="10728655" cy="274320"/>
+          </a:xfrm>
+          <a:prstGeom prst="rect">
+            <a:avLst/>
+          </a:prstGeom>
+          <a:noFill/>
+        </p:spPr>
+        <p:txBody>
+          <a:bodyPr wrap="none">
+            <a:spAutoFit/>
+          </a:bodyPr>
+          <a:lstStyle/>
+          <a:p>
             <a:pPr>
               <a:defRPr sz="850">
                 <a:solidFill>
@@ -7760,7 +7977,7 @@
               </a:defRPr>
             </a:pPr>
             <a:r>
-              <a:t>Life Sciences in Space Research (2026) | Artemis III LEAF Perspective              Slide 14 of 15</a:t>
+              <a:t>Life Sciences in Space Research (2026) | Artemis III LEAF Perspective              Slide 14 of 16</a:t>
             </a:r>
           </a:p>
         </p:txBody>
@@ -7821,6 +8038,472 @@
               </a:defRPr>
             </a:pPr>
             <a:r>
+              <a:t>RESEARCH ROADMAP &amp; DISCUSSION</a:t>
+            </a:r>
+          </a:p>
+        </p:txBody>
+      </p:sp>
+      <p:sp>
+        <p:nvSpPr>
+          <p:cNvPr id="3" name="TextBox 2"/>
+          <p:cNvSpPr txBox="1"/>
+          <p:nvPr/>
+        </p:nvSpPr>
+        <p:spPr>
+          <a:xfrm>
+            <a:off x="731520" y="658368"/>
+            <a:ext cx="10728655" cy="502920"/>
+          </a:xfrm>
+          <a:prstGeom prst="rect">
+            <a:avLst/>
+          </a:prstGeom>
+          <a:noFill/>
+        </p:spPr>
+        <p:txBody>
+          <a:bodyPr wrap="square">
+            <a:spAutoFit/>
+          </a:bodyPr>
+          <a:lstStyle/>
+          <a:p>
+            <a:pPr>
+              <a:defRPr sz="2000" b="1">
+                <a:solidFill>
+                  <a:srgbClr val="0F172A"/>
+                </a:solidFill>
+              </a:defRPr>
+            </a:pPr>
+            <a:r>
+              <a:t>Key Questions for the Working Group</a:t>
+            </a:r>
+          </a:p>
+        </p:txBody>
+      </p:sp>
+      <p:sp>
+        <p:nvSpPr>
+          <p:cNvPr id="4" name="TextBox 3"/>
+          <p:cNvSpPr txBox="1"/>
+          <p:nvPr/>
+        </p:nvSpPr>
+        <p:spPr>
+          <a:xfrm>
+            <a:off x="731520" y="1115568"/>
+            <a:ext cx="10728655" cy="365760"/>
+          </a:xfrm>
+          <a:prstGeom prst="rect">
+            <a:avLst/>
+          </a:prstGeom>
+          <a:noFill/>
+        </p:spPr>
+        <p:txBody>
+          <a:bodyPr wrap="square">
+            <a:spAutoFit/>
+          </a:bodyPr>
+          <a:lstStyle/>
+          <a:p>
+            <a:pPr>
+              <a:defRPr sz="1100" i="1">
+                <a:solidFill>
+                  <a:srgbClr val="475569"/>
+                </a:solidFill>
+              </a:defRPr>
+            </a:pPr>
+            <a:r>
+              <a:t>Strategic priorities for Artemis III LEAF operations and long-duration lunar bioregenerative life support</a:t>
+            </a:r>
+          </a:p>
+        </p:txBody>
+      </p:sp>
+      <p:sp>
+        <p:nvSpPr>
+          <p:cNvPr id="5" name="Rounded Rectangle 4"/>
+          <p:cNvSpPr/>
+          <p:nvPr/>
+        </p:nvSpPr>
+        <p:spPr>
+          <a:xfrm>
+            <a:off x="731520" y="1645920"/>
+            <a:ext cx="10728655" cy="1371600"/>
+          </a:xfrm>
+          <a:prstGeom prst="roundRect">
+            <a:avLst/>
+          </a:prstGeom>
+          <a:solidFill>
+            <a:srgbClr val="E0F2FE"/>
+          </a:solidFill>
+          <a:ln w="15240">
+            <a:solidFill>
+              <a:srgbClr val="0284C7"/>
+            </a:solidFill>
+          </a:ln>
+        </p:spPr>
+        <p:style>
+          <a:lnRef idx="1">
+            <a:schemeClr val="accent1"/>
+          </a:lnRef>
+          <a:fillRef idx="3">
+            <a:schemeClr val="accent1"/>
+          </a:fillRef>
+          <a:effectRef idx="2">
+            <a:schemeClr val="accent1"/>
+          </a:effectRef>
+          <a:fontRef idx="minor">
+            <a:schemeClr val="lt1"/>
+          </a:fontRef>
+        </p:style>
+        <p:txBody>
+          <a:bodyPr rtlCol="0" anchor="ctr"/>
+          <a:lstStyle/>
+          <a:p>
+            <a:pPr algn="ctr"/>
+          </a:p>
+        </p:txBody>
+      </p:sp>
+      <p:sp>
+        <p:nvSpPr>
+          <p:cNvPr id="6" name="TextBox 5"/>
+          <p:cNvSpPr txBox="1"/>
+          <p:nvPr/>
+        </p:nvSpPr>
+        <p:spPr>
+          <a:xfrm>
+            <a:off x="914400" y="1737360"/>
+            <a:ext cx="10362895" cy="1188720"/>
+          </a:xfrm>
+          <a:prstGeom prst="rect">
+            <a:avLst/>
+          </a:prstGeom>
+          <a:noFill/>
+        </p:spPr>
+        <p:txBody>
+          <a:bodyPr wrap="square">
+            <a:spAutoFit/>
+          </a:bodyPr>
+          <a:lstStyle/>
+          <a:p>
+            <a:pPr>
+              <a:defRPr sz="1150" b="1">
+                <a:solidFill>
+                  <a:srgbClr val="0284C7"/>
+                </a:solidFill>
+              </a:defRPr>
+            </a:pPr>
+            <a:r>
+              <a:t>Question 1: Flight Payload Hardware Integration</a:t>
+            </a:r>
+          </a:p>
+          <a:p>
+            <a:pPr>
+              <a:defRPr sz="950">
+                <a:solidFill>
+                  <a:srgbClr val="0F172A"/>
+                </a:solidFill>
+              </a:defRPr>
+            </a:pPr>
+            <a:r>
+              <a:t>• How should Artemis LEAF and commercial lunar biological payloads integrate 3-axis fluxgate magnetometers without introducing thermal or EMI artifacts?</a:t>
+            </a:r>
+            <a:br/>
+            <a:r>
+              <a:t>• Where is the optimal mounting position relative to seedling cassettes and LEDs?</a:t>
+            </a:r>
+            <a:br/>
+            <a:r>
+              <a:t>• What telemetry sample rates (10 Hz vs. 1 Hz) are necessary to capture AC ripple?</a:t>
+            </a:r>
+          </a:p>
+        </p:txBody>
+      </p:sp>
+      <p:sp>
+        <p:nvSpPr>
+          <p:cNvPr id="7" name="Rounded Rectangle 6"/>
+          <p:cNvSpPr/>
+          <p:nvPr/>
+        </p:nvSpPr>
+        <p:spPr>
+          <a:xfrm>
+            <a:off x="731520" y="3200400"/>
+            <a:ext cx="10728655" cy="1371600"/>
+          </a:xfrm>
+          <a:prstGeom prst="roundRect">
+            <a:avLst/>
+          </a:prstGeom>
+          <a:solidFill>
+            <a:srgbClr val="FEF3C7"/>
+          </a:solidFill>
+          <a:ln w="15240">
+            <a:solidFill>
+              <a:srgbClr val="D97706"/>
+            </a:solidFill>
+          </a:ln>
+        </p:spPr>
+        <p:style>
+          <a:lnRef idx="1">
+            <a:schemeClr val="accent1"/>
+          </a:lnRef>
+          <a:fillRef idx="3">
+            <a:schemeClr val="accent1"/>
+          </a:fillRef>
+          <a:effectRef idx="2">
+            <a:schemeClr val="accent1"/>
+          </a:effectRef>
+          <a:fontRef idx="minor">
+            <a:schemeClr val="lt1"/>
+          </a:fontRef>
+        </p:style>
+        <p:txBody>
+          <a:bodyPr rtlCol="0" anchor="ctr"/>
+          <a:lstStyle/>
+          <a:p>
+            <a:pPr algn="ctr"/>
+          </a:p>
+        </p:txBody>
+      </p:sp>
+      <p:sp>
+        <p:nvSpPr>
+          <p:cNvPr id="8" name="TextBox 7"/>
+          <p:cNvSpPr txBox="1"/>
+          <p:nvPr/>
+        </p:nvSpPr>
+        <p:spPr>
+          <a:xfrm>
+            <a:off x="914400" y="3291840"/>
+            <a:ext cx="10362895" cy="1188720"/>
+          </a:xfrm>
+          <a:prstGeom prst="rect">
+            <a:avLst/>
+          </a:prstGeom>
+          <a:noFill/>
+        </p:spPr>
+        <p:txBody>
+          <a:bodyPr wrap="square">
+            <a:spAutoFit/>
+          </a:bodyPr>
+          <a:lstStyle/>
+          <a:p>
+            <a:pPr>
+              <a:defRPr sz="1150" b="1">
+                <a:solidFill>
+                  <a:srgbClr val="D97706"/>
+                </a:solidFill>
+              </a:defRPr>
+            </a:pPr>
+            <a:r>
+              <a:t>Question 2: Crop Plasticity &amp; Cultivar Selection</a:t>
+            </a:r>
+          </a:p>
+          <a:p>
+            <a:pPr>
+              <a:defRPr sz="950">
+                <a:solidFill>
+                  <a:srgbClr val="0F172A"/>
+                </a:solidFill>
+              </a:defRPr>
+            </a:pPr>
+            <a:r>
+              <a:t>• Which candidate space crops (Arabidopsis, microgreens, dwarf wheat, tomato) demonstrate natural genetic tolerance to near-null magnetic fields?</a:t>
+            </a:r>
+            <a:br/>
+            <a:r>
+              <a:t>• Can pre-flight seed conditioning (magnetic priming or epigenetic pre-exposure) mitigate the Day 0–5 germination and emergence lag?</a:t>
+            </a:r>
+            <a:br/>
+            <a:r>
+              <a:t>• How do mutant lines (e.g. cry1/cry2, hy5, aox1a/d) perform under simulated lunar fields?</a:t>
+            </a:r>
+          </a:p>
+        </p:txBody>
+      </p:sp>
+      <p:sp>
+        <p:nvSpPr>
+          <p:cNvPr id="9" name="Rounded Rectangle 8"/>
+          <p:cNvSpPr/>
+          <p:nvPr/>
+        </p:nvSpPr>
+        <p:spPr>
+          <a:xfrm>
+            <a:off x="731520" y="4754880"/>
+            <a:ext cx="10728655" cy="1371600"/>
+          </a:xfrm>
+          <a:prstGeom prst="roundRect">
+            <a:avLst/>
+          </a:prstGeom>
+          <a:solidFill>
+            <a:srgbClr val="DCFCE7"/>
+          </a:solidFill>
+          <a:ln w="15240">
+            <a:solidFill>
+              <a:srgbClr val="16A34A"/>
+            </a:solidFill>
+          </a:ln>
+        </p:spPr>
+        <p:style>
+          <a:lnRef idx="1">
+            <a:schemeClr val="accent1"/>
+          </a:lnRef>
+          <a:fillRef idx="3">
+            <a:schemeClr val="accent1"/>
+          </a:fillRef>
+          <a:effectRef idx="2">
+            <a:schemeClr val="accent1"/>
+          </a:effectRef>
+          <a:fontRef idx="minor">
+            <a:schemeClr val="lt1"/>
+          </a:fontRef>
+        </p:style>
+        <p:txBody>
+          <a:bodyPr rtlCol="0" anchor="ctr"/>
+          <a:lstStyle/>
+          <a:p>
+            <a:pPr algn="ctr"/>
+          </a:p>
+        </p:txBody>
+      </p:sp>
+      <p:sp>
+        <p:nvSpPr>
+          <p:cNvPr id="10" name="TextBox 9"/>
+          <p:cNvSpPr txBox="1"/>
+          <p:nvPr/>
+        </p:nvSpPr>
+        <p:spPr>
+          <a:xfrm>
+            <a:off x="914400" y="4846320"/>
+            <a:ext cx="10362895" cy="1188720"/>
+          </a:xfrm>
+          <a:prstGeom prst="rect">
+            <a:avLst/>
+          </a:prstGeom>
+          <a:noFill/>
+        </p:spPr>
+        <p:txBody>
+          <a:bodyPr wrap="square">
+            <a:spAutoFit/>
+          </a:bodyPr>
+          <a:lstStyle/>
+          <a:p>
+            <a:pPr>
+              <a:defRPr sz="1150" b="1">
+                <a:solidFill>
+                  <a:srgbClr val="16A34A"/>
+                </a:solidFill>
+              </a:defRPr>
+            </a:pPr>
+            <a:r>
+              <a:t>Question 3: Active Magnetic Sub-Assemblies for BLSS</a:t>
+            </a:r>
+          </a:p>
+          <a:p>
+            <a:pPr>
+              <a:defRPr sz="950">
+                <a:solidFill>
+                  <a:srgbClr val="0F172A"/>
+                </a:solidFill>
+              </a:defRPr>
+            </a:pPr>
+            <a:r>
+              <a:t>• Should future lunar surface greenhouses incorporate triaxial Helmholtz coils as standard operational infrastructure?</a:t>
+            </a:r>
+            <a:br/>
+            <a:r>
+              <a:t>• What are the mass, volume, and power trade-offs of delivering a continuous 45 µT vector over square meters of plant canopy?</a:t>
+            </a:r>
+            <a:br/>
+            <a:r>
+              <a:t>• Does vector re-application completely restore nutritional quality and secondary metabolite profiles?</a:t>
+            </a:r>
+          </a:p>
+        </p:txBody>
+      </p:sp>
+      <p:sp>
+        <p:nvSpPr>
+          <p:cNvPr id="11" name="TextBox 10"/>
+          <p:cNvSpPr txBox="1"/>
+          <p:nvPr/>
+        </p:nvSpPr>
+        <p:spPr>
+          <a:xfrm>
+            <a:off x="731520" y="6446520"/>
+            <a:ext cx="10728655" cy="274320"/>
+          </a:xfrm>
+          <a:prstGeom prst="rect">
+            <a:avLst/>
+          </a:prstGeom>
+          <a:noFill/>
+        </p:spPr>
+        <p:txBody>
+          <a:bodyPr wrap="none">
+            <a:spAutoFit/>
+          </a:bodyPr>
+          <a:lstStyle/>
+          <a:p>
+            <a:pPr>
+              <a:defRPr sz="850">
+                <a:solidFill>
+                  <a:srgbClr val="64748B"/>
+                </a:solidFill>
+              </a:defRPr>
+            </a:pPr>
+            <a:r>
+              <a:t>Life Sciences in Space Research (2026) | Artemis III LEAF Perspective              Slide 15 of 16</a:t>
+            </a:r>
+          </a:p>
+        </p:txBody>
+      </p:sp>
+    </p:spTree>
+  </p:cSld>
+  <p:clrMapOvr>
+    <a:masterClrMapping/>
+  </p:clrMapOvr>
+</p:sld>
+</file>
+
+<file path=ppt/slides/slide16.xml><?xml version="1.0" encoding="utf-8"?>
+<p:sld xmlns:a="http://schemas.openxmlformats.org/drawingml/2006/main" xmlns:p="http://schemas.openxmlformats.org/presentationml/2006/main" xmlns:r="http://schemas.openxmlformats.org/officeDocument/2006/relationships">
+  <p:cSld>
+    <p:bg>
+      <p:bgPr>
+        <a:solidFill>
+          <a:srgbClr val="F8FAFC"/>
+        </a:solidFill>
+        <a:effectLst/>
+      </p:bgPr>
+    </p:bg>
+    <p:spTree>
+      <p:nvGrpSpPr>
+        <p:cNvPr id="1" name=""/>
+        <p:cNvGrpSpPr/>
+        <p:nvPr/>
+      </p:nvGrpSpPr>
+      <p:grpSpPr/>
+      <p:sp>
+        <p:nvSpPr>
+          <p:cNvPr id="2" name="TextBox 1"/>
+          <p:cNvSpPr txBox="1"/>
+          <p:nvPr/>
+        </p:nvSpPr>
+        <p:spPr>
+          <a:xfrm>
+            <a:off x="731520" y="365760"/>
+            <a:ext cx="10728655" cy="320040"/>
+          </a:xfrm>
+          <a:prstGeom prst="rect">
+            <a:avLst/>
+          </a:prstGeom>
+          <a:noFill/>
+        </p:spPr>
+        <p:txBody>
+          <a:bodyPr wrap="square">
+            <a:spAutoFit/>
+          </a:bodyPr>
+          <a:lstStyle/>
+          <a:p>
+            <a:pPr>
+              <a:defRPr sz="950" b="1">
+                <a:solidFill>
+                  <a:srgbClr val="0284C7"/>
+                </a:solidFill>
+              </a:defRPr>
+            </a:pPr>
+            <a:r>
               <a:t>APPENDIX &amp; OPEN SCIENCE</a:t>
             </a:r>
           </a:p>
@@ -8342,7 +9025,7 @@
               </a:defRPr>
             </a:pPr>
             <a:r>
-              <a:t>Life Sciences in Space Research (2026) | Artemis III LEAF Perspective              Slide 15 of 15</a:t>
+              <a:t>Life Sciences in Space Research (2026) | Artemis III LEAF Perspective              Slide 16 of 16</a:t>
             </a:r>
           </a:p>
         </p:txBody>
@@ -8908,7 +9591,7 @@
               </a:defRPr>
             </a:pPr>
             <a:r>
-              <a:t>Life Sciences in Space Research (2026) | Artemis III LEAF Perspective              Slide 2 of 15</a:t>
+              <a:t>Life Sciences in Space Research (2026) | Artemis III LEAF Perspective              Slide 2 of 16</a:t>
             </a:r>
           </a:p>
         </p:txBody>
@@ -9490,7 +10173,7 @@
               </a:defRPr>
             </a:pPr>
             <a:r>
-              <a:t>Life Sciences in Space Research (2026) | Artemis III LEAF Perspective              Slide 3 of 15</a:t>
+              <a:t>Life Sciences in Space Research (2026) | Artemis III LEAF Perspective              Slide 3 of 16</a:t>
             </a:r>
           </a:p>
         </p:txBody>
@@ -9951,7 +10634,7 @@
               </a:defRPr>
             </a:pPr>
             <a:r>
-              <a:t>Life Sciences in Space Research (2026) | Artemis III LEAF Perspective              Slide 4 of 15</a:t>
+              <a:t>Life Sciences in Space Research (2026) | Artemis III LEAF Perspective              Slide 4 of 16</a:t>
             </a:r>
           </a:p>
         </p:txBody>
@@ -10012,7 +10695,7 @@
               </a:defRPr>
             </a:pPr>
             <a:r>
-              <a:t>FIGURE 2 MONTAGE | EDITABLE LAYOUT</a:t>
+              <a:t>FIGURE 2 MONTAGE | REVIEW METHODOLOGY</a:t>
             </a:r>
           </a:p>
         </p:txBody>
@@ -10047,7 +10730,7 @@
               </a:defRPr>
             </a:pPr>
             <a:r>
-              <a:t>The First 5 Days: Early Seedling Kinetics &amp; Pigment Formation</a:t>
+              <a:t>Integrative Review Architecture: From Planetary Voids to Quantum Biology</a:t>
             </a:r>
           </a:p>
         </p:txBody>
@@ -10082,7 +10765,7 @@
               </a:defRPr>
             </a:pPr>
             <a:r>
-              <a:t>0–120 h developmental trajectory, emergence velocity lag (t50), biomass yield penalties, and pigment repression</a:t>
+              <a:t>SANRA-guided multi-scale synthesis bridging 80 audited peer-reviewed publications and 6 public spaceflight/planetary datasets</a:t>
             </a:r>
           </a:p>
         </p:txBody>
@@ -10096,7 +10779,7 @@
         <p:spPr>
           <a:xfrm>
             <a:off x="731520" y="1600200"/>
-            <a:ext cx="5212080" cy="2240280"/>
+            <a:ext cx="5212080" cy="4709160"/>
           </a:xfrm>
           <a:prstGeom prst="roundRect">
             <a:avLst/>
@@ -10134,7 +10817,7 @@
       </p:sp>
       <p:pic>
         <p:nvPicPr>
-          <p:cNvPr id="6" name="Picture 5" descr="Fig2a_5day_timeline.png"/>
+          <p:cNvPr id="6" name="Picture 5" descr="Fig2a_methods_conceptual_framework.png"/>
           <p:cNvPicPr>
             <a:picLocks noChangeAspect="1"/>
           </p:cNvPicPr>
@@ -10149,7 +10832,7 @@
         <p:spPr>
           <a:xfrm>
             <a:off x="822960" y="1920240"/>
-            <a:ext cx="5029200" cy="1856232"/>
+            <a:ext cx="5029200" cy="4325112"/>
           </a:xfrm>
           <a:prstGeom prst="rect">
             <a:avLst/>
@@ -10186,7 +10869,7 @@
               </a:defRPr>
             </a:pPr>
             <a:r>
-              <a:t>(a) 5-Day Developmental Timeline: Imbibition to Autotrophy</a:t>
+              <a:t>(a) Conceptual Framework of the Integrative Review (SANRA Guidelines)</a:t>
             </a:r>
           </a:p>
         </p:txBody>
@@ -10200,7 +10883,7 @@
         <p:spPr>
           <a:xfrm>
             <a:off x="6248095" y="1600200"/>
-            <a:ext cx="5212080" cy="2240280"/>
+            <a:ext cx="5212080" cy="4709160"/>
           </a:xfrm>
           <a:prstGeom prst="roundRect">
             <a:avLst/>
@@ -10238,7 +10921,7 @@
       </p:sp>
       <p:pic>
         <p:nvPicPr>
-          <p:cNvPr id="9" name="Picture 8" descr="Fig2b_germination_kinetics.png"/>
+          <p:cNvPr id="9" name="Picture 8" descr="Fig2b_methods_prisma_flow.png"/>
           <p:cNvPicPr>
             <a:picLocks noChangeAspect="1"/>
           </p:cNvPicPr>
@@ -10253,7 +10936,7 @@
         <p:spPr>
           <a:xfrm>
             <a:off x="6339535" y="1920240"/>
-            <a:ext cx="5029200" cy="1856232"/>
+            <a:ext cx="5029200" cy="4325112"/>
           </a:xfrm>
           <a:prstGeom prst="rect">
             <a:avLst/>
@@ -10290,90 +10973,21 @@
               </a:defRPr>
             </a:pPr>
             <a:r>
-              <a:t>(b) Germination Capacity (#) &amp; Kinetics Lag (t50: +12 to +36 h)</a:t>
-            </a:r>
-          </a:p>
-        </p:txBody>
-      </p:sp>
-      <p:sp>
-        <p:nvSpPr>
-          <p:cNvPr id="11" name="Rounded Rectangle 10"/>
-          <p:cNvSpPr/>
-          <p:nvPr/>
-        </p:nvSpPr>
-        <p:spPr>
-          <a:xfrm>
-            <a:off x="731520" y="4069080"/>
-            <a:ext cx="5212080" cy="2240280"/>
-          </a:xfrm>
-          <a:prstGeom prst="roundRect">
-            <a:avLst/>
-          </a:prstGeom>
-          <a:solidFill>
-            <a:srgbClr val="FFFFFF"/>
-          </a:solidFill>
-          <a:ln w="12700">
-            <a:solidFill>
-              <a:srgbClr val="E2E8F0"/>
-            </a:solidFill>
-          </a:ln>
-        </p:spPr>
-        <p:style>
-          <a:lnRef idx="1">
-            <a:schemeClr val="accent1"/>
-          </a:lnRef>
-          <a:fillRef idx="3">
-            <a:schemeClr val="accent1"/>
-          </a:fillRef>
-          <a:effectRef idx="2">
-            <a:schemeClr val="accent1"/>
-          </a:effectRef>
-          <a:fontRef idx="minor">
-            <a:schemeClr val="lt1"/>
-          </a:fontRef>
-        </p:style>
-        <p:txBody>
-          <a:bodyPr rtlCol="0" anchor="ctr"/>
-          <a:lstStyle/>
-          <a:p>
-            <a:pPr algn="ctr"/>
-          </a:p>
-        </p:txBody>
-      </p:sp>
-      <p:pic>
-        <p:nvPicPr>
-          <p:cNvPr id="12" name="Picture 11" descr="Fig2c_biomass_yield.png"/>
-          <p:cNvPicPr>
-            <a:picLocks noChangeAspect="1"/>
-          </p:cNvPicPr>
-          <p:nvPr/>
-        </p:nvPicPr>
-        <p:blipFill>
-          <a:blip r:embed="rId4"/>
-          <a:stretch>
-            <a:fillRect/>
-          </a:stretch>
-        </p:blipFill>
-        <p:spPr>
-          <a:xfrm>
-            <a:off x="822960" y="4389120"/>
-            <a:ext cx="5029200" cy="1856232"/>
-          </a:xfrm>
-          <a:prstGeom prst="rect">
-            <a:avLst/>
-          </a:prstGeom>
-        </p:spPr>
-      </p:pic>
-      <p:sp>
-        <p:nvSpPr>
-          <p:cNvPr id="13" name="TextBox 12"/>
+              <a:t>(b) Evidence Identification &amp; Selection Flow (PRISMA/SANRA Flow)</a:t>
+            </a:r>
+          </a:p>
+        </p:txBody>
+      </p:sp>
+      <p:sp>
+        <p:nvSpPr>
+          <p:cNvPr id="11" name="TextBox 10"/>
           <p:cNvSpPr txBox="1"/>
           <p:nvPr/>
         </p:nvSpPr>
         <p:spPr>
           <a:xfrm>
-            <a:off x="868680" y="4114800"/>
-            <a:ext cx="5212080" cy="274320"/>
+            <a:off x="731520" y="6446520"/>
+            <a:ext cx="10728655" cy="274320"/>
           </a:xfrm>
           <a:prstGeom prst="rect">
             <a:avLst/>
@@ -10387,153 +11001,14 @@
           <a:lstStyle/>
           <a:p>
             <a:pPr>
-              <a:defRPr sz="900" b="1">
-                <a:solidFill>
-                  <a:srgbClr val="0284C7"/>
+              <a:defRPr sz="850">
+                <a:solidFill>
+                  <a:srgbClr val="64748B"/>
                 </a:solidFill>
               </a:defRPr>
             </a:pPr>
             <a:r>
-              <a:t>(c) Seedling Elongation, Vigor &amp; Harvestable Biomass Yield Penalty</a:t>
-            </a:r>
-          </a:p>
-        </p:txBody>
-      </p:sp>
-      <p:sp>
-        <p:nvSpPr>
-          <p:cNvPr id="14" name="Rounded Rectangle 13"/>
-          <p:cNvSpPr/>
-          <p:nvPr/>
-        </p:nvSpPr>
-        <p:spPr>
-          <a:xfrm>
-            <a:off x="6248095" y="4069080"/>
-            <a:ext cx="5212080" cy="2240280"/>
-          </a:xfrm>
-          <a:prstGeom prst="roundRect">
-            <a:avLst/>
-          </a:prstGeom>
-          <a:solidFill>
-            <a:srgbClr val="FFFFFF"/>
-          </a:solidFill>
-          <a:ln w="12700">
-            <a:solidFill>
-              <a:srgbClr val="E2E8F0"/>
-            </a:solidFill>
-          </a:ln>
-        </p:spPr>
-        <p:style>
-          <a:lnRef idx="1">
-            <a:schemeClr val="accent1"/>
-          </a:lnRef>
-          <a:fillRef idx="3">
-            <a:schemeClr val="accent1"/>
-          </a:fillRef>
-          <a:effectRef idx="2">
-            <a:schemeClr val="accent1"/>
-          </a:effectRef>
-          <a:fontRef idx="minor">
-            <a:schemeClr val="lt1"/>
-          </a:fontRef>
-        </p:style>
-        <p:txBody>
-          <a:bodyPr rtlCol="0" anchor="ctr"/>
-          <a:lstStyle/>
-          <a:p>
-            <a:pPr algn="ctr"/>
-          </a:p>
-        </p:txBody>
-      </p:sp>
-      <p:pic>
-        <p:nvPicPr>
-          <p:cNvPr id="15" name="Picture 14" descr="Fig2d_pigment_pathway.png"/>
-          <p:cNvPicPr>
-            <a:picLocks noChangeAspect="1"/>
-          </p:cNvPicPr>
-          <p:nvPr/>
-        </p:nvPicPr>
-        <p:blipFill>
-          <a:blip r:embed="rId5"/>
-          <a:stretch>
-            <a:fillRect/>
-          </a:stretch>
-        </p:blipFill>
-        <p:spPr>
-          <a:xfrm>
-            <a:off x="6339535" y="4389120"/>
-            <a:ext cx="5029200" cy="1856232"/>
-          </a:xfrm>
-          <a:prstGeom prst="rect">
-            <a:avLst/>
-          </a:prstGeom>
-        </p:spPr>
-      </p:pic>
-      <p:sp>
-        <p:nvSpPr>
-          <p:cNvPr id="16" name="TextBox 15"/>
-          <p:cNvSpPr txBox="1"/>
-          <p:nvPr/>
-        </p:nvSpPr>
-        <p:spPr>
-          <a:xfrm>
-            <a:off x="6385255" y="4114800"/>
-            <a:ext cx="5212080" cy="274320"/>
-          </a:xfrm>
-          <a:prstGeom prst="rect">
-            <a:avLst/>
-          </a:prstGeom>
-          <a:noFill/>
-        </p:spPr>
-        <p:txBody>
-          <a:bodyPr wrap="none">
-            <a:spAutoFit/>
-          </a:bodyPr>
-          <a:lstStyle/>
-          <a:p>
-            <a:pPr>
-              <a:defRPr sz="900" b="1">
-                <a:solidFill>
-                  <a:srgbClr val="0284C7"/>
-                </a:solidFill>
-              </a:defRPr>
-            </a:pPr>
-            <a:r>
-              <a:t>(d) Cryptochrome/HY5 Downregulation &amp; Pigment Repression</a:t>
-            </a:r>
-          </a:p>
-        </p:txBody>
-      </p:sp>
-      <p:sp>
-        <p:nvSpPr>
-          <p:cNvPr id="17" name="TextBox 16"/>
-          <p:cNvSpPr txBox="1"/>
-          <p:nvPr/>
-        </p:nvSpPr>
-        <p:spPr>
-          <a:xfrm>
-            <a:off x="731520" y="6446520"/>
-            <a:ext cx="10728655" cy="274320"/>
-          </a:xfrm>
-          <a:prstGeom prst="rect">
-            <a:avLst/>
-          </a:prstGeom>
-          <a:noFill/>
-        </p:spPr>
-        <p:txBody>
-          <a:bodyPr wrap="none">
-            <a:spAutoFit/>
-          </a:bodyPr>
-          <a:lstStyle/>
-          <a:p>
-            <a:pPr>
-              <a:defRPr sz="850">
-                <a:solidFill>
-                  <a:srgbClr val="64748B"/>
-                </a:solidFill>
-              </a:defRPr>
-            </a:pPr>
-            <a:r>
-              <a:t>Life Sciences in Space Research (2026) | Artemis III LEAF Perspective              Slide 5 of 15</a:t>
+              <a:t>Life Sciences in Space Research (2026) | Artemis III LEAF Perspective              Slide 5 of 16</a:t>
             </a:r>
           </a:p>
         </p:txBody>
@@ -10594,7 +11069,7 @@
               </a:defRPr>
             </a:pPr>
             <a:r>
-              <a:t>FIGURE 2 DEEP DIVE</a:t>
+              <a:t>FIGURE 3 MONTAGE | EDITABLE LAYOUT</a:t>
             </a:r>
           </a:p>
         </p:txBody>
@@ -10629,7 +11104,7 @@
               </a:defRPr>
             </a:pPr>
             <a:r>
-              <a:t>The Day 0–5 Bottleneck: Emergence Kinetics &amp; Biomass Deficits</a:t>
+              <a:t>The First 5 Days: Early Seedling Kinetics &amp; Pigment Formation</a:t>
             </a:r>
           </a:p>
         </p:txBody>
@@ -10664,7 +11139,7 @@
               </a:defRPr>
             </a:pPr>
             <a:r>
-              <a:t>Why early germination delay compounds into substantial yield losses in closed-loop life support systems</a:t>
+              <a:t>0–120 h developmental trajectory, emergence velocity lag (t50), biomass yield penalties, and pigment repression</a:t>
             </a:r>
           </a:p>
         </p:txBody>
@@ -10678,7 +11153,7 @@
         <p:spPr>
           <a:xfrm>
             <a:off x="731520" y="1600200"/>
-            <a:ext cx="5120640" cy="2286000"/>
+            <a:ext cx="5212080" cy="2240280"/>
           </a:xfrm>
           <a:prstGeom prst="roundRect">
             <a:avLst/>
@@ -10716,7 +11191,7 @@
       </p:sp>
       <p:pic>
         <p:nvPicPr>
-          <p:cNvPr id="6" name="Picture 5" descr="Fig2b_germination_kinetics.png"/>
+          <p:cNvPr id="6" name="Picture 5" descr="Fig2a_5day_timeline.png"/>
           <p:cNvPicPr>
             <a:picLocks noChangeAspect="1"/>
           </p:cNvPicPr>
@@ -10730,8 +11205,8 @@
         </p:blipFill>
         <p:spPr>
           <a:xfrm>
-            <a:off x="822960" y="1691640"/>
-            <a:ext cx="4937760" cy="2103120"/>
+            <a:off x="822960" y="1920240"/>
+            <a:ext cx="5029200" cy="1856232"/>
           </a:xfrm>
           <a:prstGeom prst="rect">
             <a:avLst/>
@@ -10740,14 +11215,49 @@
       </p:pic>
       <p:sp>
         <p:nvSpPr>
-          <p:cNvPr id="7" name="Rounded Rectangle 6"/>
+          <p:cNvPr id="7" name="TextBox 6"/>
+          <p:cNvSpPr txBox="1"/>
+          <p:nvPr/>
+        </p:nvSpPr>
+        <p:spPr>
+          <a:xfrm>
+            <a:off x="868680" y="1645920"/>
+            <a:ext cx="5212080" cy="274320"/>
+          </a:xfrm>
+          <a:prstGeom prst="rect">
+            <a:avLst/>
+          </a:prstGeom>
+          <a:noFill/>
+        </p:spPr>
+        <p:txBody>
+          <a:bodyPr wrap="none">
+            <a:spAutoFit/>
+          </a:bodyPr>
+          <a:lstStyle/>
+          <a:p>
+            <a:pPr>
+              <a:defRPr sz="900" b="1">
+                <a:solidFill>
+                  <a:srgbClr val="0284C7"/>
+                </a:solidFill>
+              </a:defRPr>
+            </a:pPr>
+            <a:r>
+              <a:t>(a) 5-Day Developmental Timeline: Imbibition to Autotrophy</a:t>
+            </a:r>
+          </a:p>
+        </p:txBody>
+      </p:sp>
+      <p:sp>
+        <p:nvSpPr>
+          <p:cNvPr id="8" name="Rounded Rectangle 7"/>
           <p:cNvSpPr/>
           <p:nvPr/>
         </p:nvSpPr>
         <p:spPr>
           <a:xfrm>
-            <a:off x="731520" y="4023360"/>
-            <a:ext cx="5120640" cy="2286000"/>
+            <a:off x="6248095" y="1600200"/>
+            <a:ext cx="5212080" cy="2240280"/>
           </a:xfrm>
           <a:prstGeom prst="roundRect">
             <a:avLst/>
@@ -10785,7 +11295,7 @@
       </p:sp>
       <p:pic>
         <p:nvPicPr>
-          <p:cNvPr id="8" name="Picture 7" descr="Fig2c_biomass_yield.png"/>
+          <p:cNvPr id="9" name="Picture 8" descr="Fig2b_germination_kinetics.png"/>
           <p:cNvPicPr>
             <a:picLocks noChangeAspect="1"/>
           </p:cNvPicPr>
@@ -10799,8 +11309,8 @@
         </p:blipFill>
         <p:spPr>
           <a:xfrm>
-            <a:off x="822960" y="4114800"/>
-            <a:ext cx="4937760" cy="2103120"/>
+            <a:off x="6339535" y="1920240"/>
+            <a:ext cx="5029200" cy="1856232"/>
           </a:xfrm>
           <a:prstGeom prst="rect">
             <a:avLst/>
@@ -10809,14 +11319,49 @@
       </p:pic>
       <p:sp>
         <p:nvSpPr>
-          <p:cNvPr id="9" name="Rounded Rectangle 8"/>
+          <p:cNvPr id="10" name="TextBox 9"/>
+          <p:cNvSpPr txBox="1"/>
+          <p:nvPr/>
+        </p:nvSpPr>
+        <p:spPr>
+          <a:xfrm>
+            <a:off x="6385255" y="1645920"/>
+            <a:ext cx="5212080" cy="274320"/>
+          </a:xfrm>
+          <a:prstGeom prst="rect">
+            <a:avLst/>
+          </a:prstGeom>
+          <a:noFill/>
+        </p:spPr>
+        <p:txBody>
+          <a:bodyPr wrap="none">
+            <a:spAutoFit/>
+          </a:bodyPr>
+          <a:lstStyle/>
+          <a:p>
+            <a:pPr>
+              <a:defRPr sz="900" b="1">
+                <a:solidFill>
+                  <a:srgbClr val="0284C7"/>
+                </a:solidFill>
+              </a:defRPr>
+            </a:pPr>
+            <a:r>
+              <a:t>(b) Germination Capacity (#) &amp; Kinetics Lag (t50: +12 to +36 h)</a:t>
+            </a:r>
+          </a:p>
+        </p:txBody>
+      </p:sp>
+      <p:sp>
+        <p:nvSpPr>
+          <p:cNvPr id="11" name="Rounded Rectangle 10"/>
           <p:cNvSpPr/>
           <p:nvPr/>
         </p:nvSpPr>
         <p:spPr>
           <a:xfrm>
-            <a:off x="6035040" y="1600200"/>
-            <a:ext cx="5425135" cy="4709160"/>
+            <a:off x="731520" y="4069080"/>
+            <a:ext cx="5212080" cy="2240280"/>
           </a:xfrm>
           <a:prstGeom prst="roundRect">
             <a:avLst/>
@@ -10852,114 +11397,40 @@
           </a:p>
         </p:txBody>
       </p:sp>
-      <p:sp>
-        <p:nvSpPr>
-          <p:cNvPr id="10" name="TextBox 9"/>
+      <p:pic>
+        <p:nvPicPr>
+          <p:cNvPr id="12" name="Picture 11" descr="Fig2c_biomass_yield.png"/>
+          <p:cNvPicPr>
+            <a:picLocks noChangeAspect="1"/>
+          </p:cNvPicPr>
+          <p:nvPr/>
+        </p:nvPicPr>
+        <p:blipFill>
+          <a:blip r:embed="rId4"/>
+          <a:stretch>
+            <a:fillRect/>
+          </a:stretch>
+        </p:blipFill>
+        <p:spPr>
+          <a:xfrm>
+            <a:off x="822960" y="4389120"/>
+            <a:ext cx="5029200" cy="1856232"/>
+          </a:xfrm>
+          <a:prstGeom prst="rect">
+            <a:avLst/>
+          </a:prstGeom>
+        </p:spPr>
+      </p:pic>
+      <p:sp>
+        <p:nvSpPr>
+          <p:cNvPr id="13" name="TextBox 12"/>
           <p:cNvSpPr txBox="1"/>
           <p:nvPr/>
         </p:nvSpPr>
         <p:spPr>
           <a:xfrm>
-            <a:off x="6217920" y="1737360"/>
-            <a:ext cx="5059375" cy="4434840"/>
-          </a:xfrm>
-          <a:prstGeom prst="rect">
-            <a:avLst/>
-          </a:prstGeom>
-          <a:noFill/>
-        </p:spPr>
-        <p:txBody>
-          <a:bodyPr wrap="square">
-            <a:spAutoFit/>
-          </a:bodyPr>
-          <a:lstStyle/>
-          <a:p>
-            <a:pPr>
-              <a:defRPr sz="1100" b="1">
-                <a:solidFill>
-                  <a:srgbClr val="0284C7"/>
-                </a:solidFill>
-              </a:defRPr>
-            </a:pPr>
-            <a:r>
-              <a:t>AGRONOMIC &amp; CELLULAR CONSEQUENCES OF NNMF:</a:t>
-            </a:r>
-          </a:p>
-          <a:p>
-            <a:pPr>
-              <a:defRPr sz="919">
-                <a:solidFill>
-                  <a:srgbClr val="0F172A"/>
-                </a:solidFill>
-              </a:defRPr>
-            </a:pPr>
-            <a:r>
-              <a:t>1. Emergence Velocity Lag (Δt50 = 12–36 hours):</a:t>
-            </a:r>
-            <a:br/>
-            <a:r>
-              <a:t>   • Delayed water uptake in Phase I and slowed endosperm reserve mobilization.</a:t>
-            </a:r>
-            <a:br/>
-            <a:r>
-              <a:t>   • Testa rupture is postponed, shifting the entire autotrophic transition window.</a:t>
-            </a:r>
-            <a:br/>
-            <a:br/>
-            <a:r>
-              <a:t>2. Cellular Division &amp; Auxin Transport Suppression:</a:t>
-            </a:r>
-            <a:br/>
-            <a:r>
-              <a:t>   • Dampened mitotic index in the root apical meristem (RAM).</a:t>
-            </a:r>
-            <a:br/>
-            <a:r>
-              <a:t>   • Disrupted polar localization of PIN2 auxin efflux carriers causes stunted, disoriented primary roots.</a:t>
-            </a:r>
-            <a:br/>
-            <a:br/>
-            <a:r>
-              <a:t>3. Crop Biomass &amp; Canopy Interception Loss:</a:t>
-            </a:r>
-            <a:br/>
-            <a:r>
-              <a:t>   • Radicle length: -33.0% on Day 3</a:t>
-            </a:r>
-            <a:br/>
-            <a:r>
-              <a:t>   • Hypocotyl height: -31.0% on Day 5</a:t>
-            </a:r>
-            <a:br/>
-            <a:r>
-              <a:t>   • Total fresh biomass: -29.1% deficit on Day 5</a:t>
-            </a:r>
-            <a:br/>
-            <a:br/>
-            <a:r>
-              <a:t>4. Operational BLSS Impact:</a:t>
-            </a:r>
-            <a:br/>
-            <a:r>
-              <a:t>   • Uneven seedling emergence creates patchy canopy architecture.</a:t>
-            </a:r>
-            <a:br/>
-            <a:r>
-              <a:t>   • Sub-optimal light interception dampens net photosynthetic CO2 scrubbing and fresh food yields, threatening tight mission dietary schedules.</a:t>
-            </a:r>
-          </a:p>
-        </p:txBody>
-      </p:sp>
-      <p:sp>
-        <p:nvSpPr>
-          <p:cNvPr id="11" name="TextBox 10"/>
-          <p:cNvSpPr txBox="1"/>
-          <p:nvPr/>
-        </p:nvSpPr>
-        <p:spPr>
-          <a:xfrm>
-            <a:off x="731520" y="6446520"/>
-            <a:ext cx="10728655" cy="274320"/>
+            <a:off x="868680" y="4114800"/>
+            <a:ext cx="5212080" cy="274320"/>
           </a:xfrm>
           <a:prstGeom prst="rect">
             <a:avLst/>
@@ -10973,6 +11444,145 @@
           <a:lstStyle/>
           <a:p>
             <a:pPr>
+              <a:defRPr sz="900" b="1">
+                <a:solidFill>
+                  <a:srgbClr val="0284C7"/>
+                </a:solidFill>
+              </a:defRPr>
+            </a:pPr>
+            <a:r>
+              <a:t>(c) Seedling Elongation, Vigor &amp; Harvestable Biomass Yield Penalty</a:t>
+            </a:r>
+          </a:p>
+        </p:txBody>
+      </p:sp>
+      <p:sp>
+        <p:nvSpPr>
+          <p:cNvPr id="14" name="Rounded Rectangle 13"/>
+          <p:cNvSpPr/>
+          <p:nvPr/>
+        </p:nvSpPr>
+        <p:spPr>
+          <a:xfrm>
+            <a:off x="6248095" y="4069080"/>
+            <a:ext cx="5212080" cy="2240280"/>
+          </a:xfrm>
+          <a:prstGeom prst="roundRect">
+            <a:avLst/>
+          </a:prstGeom>
+          <a:solidFill>
+            <a:srgbClr val="FFFFFF"/>
+          </a:solidFill>
+          <a:ln w="12700">
+            <a:solidFill>
+              <a:srgbClr val="E2E8F0"/>
+            </a:solidFill>
+          </a:ln>
+        </p:spPr>
+        <p:style>
+          <a:lnRef idx="1">
+            <a:schemeClr val="accent1"/>
+          </a:lnRef>
+          <a:fillRef idx="3">
+            <a:schemeClr val="accent1"/>
+          </a:fillRef>
+          <a:effectRef idx="2">
+            <a:schemeClr val="accent1"/>
+          </a:effectRef>
+          <a:fontRef idx="minor">
+            <a:schemeClr val="lt1"/>
+          </a:fontRef>
+        </p:style>
+        <p:txBody>
+          <a:bodyPr rtlCol="0" anchor="ctr"/>
+          <a:lstStyle/>
+          <a:p>
+            <a:pPr algn="ctr"/>
+          </a:p>
+        </p:txBody>
+      </p:sp>
+      <p:pic>
+        <p:nvPicPr>
+          <p:cNvPr id="15" name="Picture 14" descr="Fig2d_pigment_pathway.png"/>
+          <p:cNvPicPr>
+            <a:picLocks noChangeAspect="1"/>
+          </p:cNvPicPr>
+          <p:nvPr/>
+        </p:nvPicPr>
+        <p:blipFill>
+          <a:blip r:embed="rId5"/>
+          <a:stretch>
+            <a:fillRect/>
+          </a:stretch>
+        </p:blipFill>
+        <p:spPr>
+          <a:xfrm>
+            <a:off x="6339535" y="4389120"/>
+            <a:ext cx="5029200" cy="1856232"/>
+          </a:xfrm>
+          <a:prstGeom prst="rect">
+            <a:avLst/>
+          </a:prstGeom>
+        </p:spPr>
+      </p:pic>
+      <p:sp>
+        <p:nvSpPr>
+          <p:cNvPr id="16" name="TextBox 15"/>
+          <p:cNvSpPr txBox="1"/>
+          <p:nvPr/>
+        </p:nvSpPr>
+        <p:spPr>
+          <a:xfrm>
+            <a:off x="6385255" y="4114800"/>
+            <a:ext cx="5212080" cy="274320"/>
+          </a:xfrm>
+          <a:prstGeom prst="rect">
+            <a:avLst/>
+          </a:prstGeom>
+          <a:noFill/>
+        </p:spPr>
+        <p:txBody>
+          <a:bodyPr wrap="none">
+            <a:spAutoFit/>
+          </a:bodyPr>
+          <a:lstStyle/>
+          <a:p>
+            <a:pPr>
+              <a:defRPr sz="900" b="1">
+                <a:solidFill>
+                  <a:srgbClr val="0284C7"/>
+                </a:solidFill>
+              </a:defRPr>
+            </a:pPr>
+            <a:r>
+              <a:t>(d) Cryptochrome/HY5 Downregulation &amp; Pigment Repression</a:t>
+            </a:r>
+          </a:p>
+        </p:txBody>
+      </p:sp>
+      <p:sp>
+        <p:nvSpPr>
+          <p:cNvPr id="17" name="TextBox 16"/>
+          <p:cNvSpPr txBox="1"/>
+          <p:nvPr/>
+        </p:nvSpPr>
+        <p:spPr>
+          <a:xfrm>
+            <a:off x="731520" y="6446520"/>
+            <a:ext cx="10728655" cy="274320"/>
+          </a:xfrm>
+          <a:prstGeom prst="rect">
+            <a:avLst/>
+          </a:prstGeom>
+          <a:noFill/>
+        </p:spPr>
+        <p:txBody>
+          <a:bodyPr wrap="none">
+            <a:spAutoFit/>
+          </a:bodyPr>
+          <a:lstStyle/>
+          <a:p>
+            <a:pPr>
               <a:defRPr sz="850">
                 <a:solidFill>
                   <a:srgbClr val="64748B"/>
@@ -10980,7 +11590,7 @@
               </a:defRPr>
             </a:pPr>
             <a:r>
-              <a:t>Life Sciences in Space Research (2026) | Artemis III LEAF Perspective              Slide 6 of 15</a:t>
+              <a:t>Life Sciences in Space Research (2026) | Artemis III LEAF Perspective              Slide 6 of 16</a:t>
             </a:r>
           </a:p>
         </p:txBody>
@@ -11041,7 +11651,7 @@
               </a:defRPr>
             </a:pPr>
             <a:r>
-              <a:t>FIGURE 3 MONTAGE | EDITABLE LAYOUT</a:t>
+              <a:t>FIGURE 3 DEEP DIVE</a:t>
             </a:r>
           </a:p>
         </p:txBody>
@@ -11076,7 +11686,7 @@
               </a:defRPr>
             </a:pPr>
             <a:r>
-              <a:t>Quantum Molecular Biology of the 0–5 Day Window</a:t>
+              <a:t>The Day 0–5 Bottleneck: Emergence Kinetics &amp; Biomass Deficits</a:t>
             </a:r>
           </a:p>
         </p:txBody>
@@ -11111,7 +11721,7 @@
               </a:defRPr>
             </a:pPr>
             <a:r>
-              <a:t>Peroxisomal reserve mobilization (QBM-06), evidentiary tiers (T1–T4), and organellar electron transport hubs</a:t>
+              <a:t>Why early germination delay compounds into substantial yield losses in closed-loop life support systems</a:t>
             </a:r>
           </a:p>
         </p:txBody>
@@ -11125,7 +11735,7 @@
         <p:spPr>
           <a:xfrm>
             <a:off x="731520" y="1600200"/>
-            <a:ext cx="10728655" cy="2240280"/>
+            <a:ext cx="5120640" cy="2286000"/>
           </a:xfrm>
           <a:prstGeom prst="roundRect">
             <a:avLst/>
@@ -11163,7 +11773,7 @@
       </p:sp>
       <p:pic>
         <p:nvPicPr>
-          <p:cNvPr id="6" name="Picture 5" descr="Fig3a_qbm06_pathway.png"/>
+          <p:cNvPr id="6" name="Picture 5" descr="Fig2b_germination_kinetics.png"/>
           <p:cNvPicPr>
             <a:picLocks noChangeAspect="1"/>
           </p:cNvPicPr>
@@ -11177,8 +11787,8 @@
         </p:blipFill>
         <p:spPr>
           <a:xfrm>
-            <a:off x="822960" y="1920240"/>
-            <a:ext cx="10545775" cy="1856232"/>
+            <a:off x="822960" y="1691640"/>
+            <a:ext cx="4937760" cy="2103120"/>
           </a:xfrm>
           <a:prstGeom prst="rect">
             <a:avLst/>
@@ -11187,49 +11797,14 @@
       </p:pic>
       <p:sp>
         <p:nvSpPr>
-          <p:cNvPr id="7" name="TextBox 6"/>
-          <p:cNvSpPr txBox="1"/>
-          <p:nvPr/>
-        </p:nvSpPr>
-        <p:spPr>
-          <a:xfrm>
-            <a:off x="868680" y="1645920"/>
-            <a:ext cx="10728655" cy="274320"/>
-          </a:xfrm>
-          <a:prstGeom prst="rect">
-            <a:avLst/>
-          </a:prstGeom>
-          <a:noFill/>
-        </p:spPr>
-        <p:txBody>
-          <a:bodyPr wrap="none">
-            <a:spAutoFit/>
-          </a:bodyPr>
-          <a:lstStyle/>
-          <a:p>
-            <a:pPr>
-              <a:defRPr sz="900" b="1">
-                <a:solidFill>
-                  <a:srgbClr val="0284C7"/>
-                </a:solidFill>
-              </a:defRPr>
-            </a:pPr>
-            <a:r>
-              <a:t>(a) QBM-06 Pathway: Reserve Mobilization, Peroxisomal β-Oxidation &amp; Mitochondrial Respiration (0–72 h)</a:t>
-            </a:r>
-          </a:p>
-        </p:txBody>
-      </p:sp>
-      <p:sp>
-        <p:nvSpPr>
-          <p:cNvPr id="8" name="Rounded Rectangle 7"/>
+          <p:cNvPr id="7" name="Rounded Rectangle 6"/>
           <p:cNvSpPr/>
           <p:nvPr/>
         </p:nvSpPr>
         <p:spPr>
           <a:xfrm>
-            <a:off x="731520" y="4069080"/>
-            <a:ext cx="5212080" cy="2240280"/>
+            <a:off x="731520" y="4023360"/>
+            <a:ext cx="5120640" cy="2286000"/>
           </a:xfrm>
           <a:prstGeom prst="roundRect">
             <a:avLst/>
@@ -11267,7 +11842,7 @@
       </p:sp>
       <p:pic>
         <p:nvPicPr>
-          <p:cNvPr id="9" name="Picture 8" descr="Fig3b_evidentiary_tiers.png"/>
+          <p:cNvPr id="8" name="Picture 7" descr="Fig2c_biomass_yield.png"/>
           <p:cNvPicPr>
             <a:picLocks noChangeAspect="1"/>
           </p:cNvPicPr>
@@ -11281,8 +11856,8 @@
         </p:blipFill>
         <p:spPr>
           <a:xfrm>
-            <a:off x="822960" y="4389120"/>
-            <a:ext cx="5029200" cy="1856232"/>
+            <a:off x="822960" y="4114800"/>
+            <a:ext cx="4937760" cy="2103120"/>
           </a:xfrm>
           <a:prstGeom prst="rect">
             <a:avLst/>
@@ -11291,49 +11866,14 @@
       </p:pic>
       <p:sp>
         <p:nvSpPr>
-          <p:cNvPr id="10" name="TextBox 9"/>
-          <p:cNvSpPr txBox="1"/>
-          <p:nvPr/>
-        </p:nvSpPr>
-        <p:spPr>
-          <a:xfrm>
-            <a:off x="868680" y="4114800"/>
-            <a:ext cx="5212080" cy="274320"/>
-          </a:xfrm>
-          <a:prstGeom prst="rect">
-            <a:avLst/>
-          </a:prstGeom>
-          <a:noFill/>
-        </p:spPr>
-        <p:txBody>
-          <a:bodyPr wrap="none">
-            <a:spAutoFit/>
-          </a:bodyPr>
-          <a:lstStyle/>
-          <a:p>
-            <a:pPr>
-              <a:defRPr sz="900" b="1">
-                <a:solidFill>
-                  <a:srgbClr val="0284C7"/>
-                </a:solidFill>
-              </a:defRPr>
-            </a:pPr>
-            <a:r>
-              <a:t>(b) Evidentiary Tier Hierarchy (T1 Demonstrated to T4 Context)</a:t>
-            </a:r>
-          </a:p>
-        </p:txBody>
-      </p:sp>
-      <p:sp>
-        <p:nvSpPr>
-          <p:cNvPr id="11" name="Rounded Rectangle 10"/>
+          <p:cNvPr id="9" name="Rounded Rectangle 8"/>
           <p:cNvSpPr/>
           <p:nvPr/>
         </p:nvSpPr>
         <p:spPr>
           <a:xfrm>
-            <a:off x="6248095" y="4069080"/>
-            <a:ext cx="5212080" cy="2240280"/>
+            <a:off x="6035040" y="1600200"/>
+            <a:ext cx="5425135" cy="4709160"/>
           </a:xfrm>
           <a:prstGeom prst="roundRect">
             <a:avLst/>
@@ -11369,40 +11909,114 @@
           </a:p>
         </p:txBody>
       </p:sp>
-      <p:pic>
-        <p:nvPicPr>
-          <p:cNvPr id="12" name="Picture 11" descr="Fig3c_organellar_etc.png"/>
-          <p:cNvPicPr>
-            <a:picLocks noChangeAspect="1"/>
-          </p:cNvPicPr>
-          <p:nvPr/>
-        </p:nvPicPr>
-        <p:blipFill>
-          <a:blip r:embed="rId4"/>
-          <a:stretch>
-            <a:fillRect/>
-          </a:stretch>
-        </p:blipFill>
-        <p:spPr>
-          <a:xfrm>
-            <a:off x="6339535" y="4389120"/>
-            <a:ext cx="5029200" cy="1856232"/>
-          </a:xfrm>
-          <a:prstGeom prst="rect">
-            <a:avLst/>
-          </a:prstGeom>
-        </p:spPr>
-      </p:pic>
-      <p:sp>
-        <p:nvSpPr>
-          <p:cNvPr id="13" name="TextBox 12"/>
+      <p:sp>
+        <p:nvSpPr>
+          <p:cNvPr id="10" name="TextBox 9"/>
           <p:cNvSpPr txBox="1"/>
           <p:nvPr/>
         </p:nvSpPr>
         <p:spPr>
           <a:xfrm>
-            <a:off x="6385255" y="4114800"/>
-            <a:ext cx="5212080" cy="274320"/>
+            <a:off x="6217920" y="1737360"/>
+            <a:ext cx="5059375" cy="4434840"/>
+          </a:xfrm>
+          <a:prstGeom prst="rect">
+            <a:avLst/>
+          </a:prstGeom>
+          <a:noFill/>
+        </p:spPr>
+        <p:txBody>
+          <a:bodyPr wrap="square">
+            <a:spAutoFit/>
+          </a:bodyPr>
+          <a:lstStyle/>
+          <a:p>
+            <a:pPr>
+              <a:defRPr sz="1100" b="1">
+                <a:solidFill>
+                  <a:srgbClr val="0284C7"/>
+                </a:solidFill>
+              </a:defRPr>
+            </a:pPr>
+            <a:r>
+              <a:t>AGRONOMIC &amp; CELLULAR CONSEQUENCES OF NNMF:</a:t>
+            </a:r>
+          </a:p>
+          <a:p>
+            <a:pPr>
+              <a:defRPr sz="919">
+                <a:solidFill>
+                  <a:srgbClr val="0F172A"/>
+                </a:solidFill>
+              </a:defRPr>
+            </a:pPr>
+            <a:r>
+              <a:t>1. Emergence Velocity Lag (Δt50 = 12–36 hours):</a:t>
+            </a:r>
+            <a:br/>
+            <a:r>
+              <a:t>   • Delayed water uptake in Phase I and slowed endosperm reserve mobilization.</a:t>
+            </a:r>
+            <a:br/>
+            <a:r>
+              <a:t>   • Testa rupture is postponed, shifting the entire autotrophic transition window.</a:t>
+            </a:r>
+            <a:br/>
+            <a:br/>
+            <a:r>
+              <a:t>2. Cellular Division &amp; Auxin Transport Suppression:</a:t>
+            </a:r>
+            <a:br/>
+            <a:r>
+              <a:t>   • Dampened mitotic index in the root apical meristem (RAM).</a:t>
+            </a:r>
+            <a:br/>
+            <a:r>
+              <a:t>   • Disrupted polar localization of PIN2 auxin efflux carriers causes stunted, disoriented primary roots.</a:t>
+            </a:r>
+            <a:br/>
+            <a:br/>
+            <a:r>
+              <a:t>3. Crop Biomass &amp; Canopy Interception Loss:</a:t>
+            </a:r>
+            <a:br/>
+            <a:r>
+              <a:t>   • Radicle length: -33.0% on Day 3</a:t>
+            </a:r>
+            <a:br/>
+            <a:r>
+              <a:t>   • Hypocotyl height: -31.0% on Day 5</a:t>
+            </a:r>
+            <a:br/>
+            <a:r>
+              <a:t>   • Total fresh biomass: -29.1% deficit on Day 5</a:t>
+            </a:r>
+            <a:br/>
+            <a:br/>
+            <a:r>
+              <a:t>4. Operational BLSS Impact:</a:t>
+            </a:r>
+            <a:br/>
+            <a:r>
+              <a:t>   • Uneven seedling emergence creates patchy canopy architecture.</a:t>
+            </a:r>
+            <a:br/>
+            <a:r>
+              <a:t>   • Sub-optimal light interception dampens net photosynthetic CO2 scrubbing and fresh food yields, threatening tight mission dietary schedules.</a:t>
+            </a:r>
+          </a:p>
+        </p:txBody>
+      </p:sp>
+      <p:sp>
+        <p:nvSpPr>
+          <p:cNvPr id="11" name="TextBox 10"/>
+          <p:cNvSpPr txBox="1"/>
+          <p:nvPr/>
+        </p:nvSpPr>
+        <p:spPr>
+          <a:xfrm>
+            <a:off x="731520" y="6446520"/>
+            <a:ext cx="10728655" cy="274320"/>
           </a:xfrm>
           <a:prstGeom prst="rect">
             <a:avLst/>
@@ -11416,49 +12030,14 @@
           <a:lstStyle/>
           <a:p>
             <a:pPr>
-              <a:defRPr sz="900" b="1">
-                <a:solidFill>
-                  <a:srgbClr val="0284C7"/>
+              <a:defRPr sz="850">
+                <a:solidFill>
+                  <a:srgbClr val="64748B"/>
                 </a:solidFill>
               </a:defRPr>
             </a:pPr>
             <a:r>
-              <a:t>(c) Organellar Electron Transport Hubs (Chloroplast PETC &amp; Mitochondrial AOX)</a:t>
-            </a:r>
-          </a:p>
-        </p:txBody>
-      </p:sp>
-      <p:sp>
-        <p:nvSpPr>
-          <p:cNvPr id="14" name="TextBox 13"/>
-          <p:cNvSpPr txBox="1"/>
-          <p:nvPr/>
-        </p:nvSpPr>
-        <p:spPr>
-          <a:xfrm>
-            <a:off x="731520" y="6446520"/>
-            <a:ext cx="10728655" cy="274320"/>
-          </a:xfrm>
-          <a:prstGeom prst="rect">
-            <a:avLst/>
-          </a:prstGeom>
-          <a:noFill/>
-        </p:spPr>
-        <p:txBody>
-          <a:bodyPr wrap="none">
-            <a:spAutoFit/>
-          </a:bodyPr>
-          <a:lstStyle/>
-          <a:p>
-            <a:pPr>
-              <a:defRPr sz="850">
-                <a:solidFill>
-                  <a:srgbClr val="64748B"/>
-                </a:solidFill>
-              </a:defRPr>
-            </a:pPr>
-            <a:r>
-              <a:t>Life Sciences in Space Research (2026) | Artemis III LEAF Perspective              Slide 7 of 15</a:t>
+              <a:t>Life Sciences in Space Research (2026) | Artemis III LEAF Perspective              Slide 7 of 16</a:t>
             </a:r>
           </a:p>
         </p:txBody>
@@ -11519,7 +12098,7 @@
               </a:defRPr>
             </a:pPr>
             <a:r>
-              <a:t>FIGURE 3 DEEP DIVE</a:t>
+              <a:t>FIGURE 4 MONTAGE | EDITABLE LAYOUT</a:t>
             </a:r>
           </a:p>
         </p:txBody>
@@ -11554,7 +12133,7 @@
               </a:defRPr>
             </a:pPr>
             <a:r>
-              <a:t>Cryptochrome Spin Dynamics &amp; Evidentiary Rigor</a:t>
+              <a:t>Quantum Molecular Biology of the 0–5 Day Window</a:t>
             </a:r>
           </a:p>
         </p:txBody>
@@ -11589,7 +12168,7 @@
               </a:defRPr>
             </a:pPr>
             <a:r>
-              <a:t>Separating rigorously demonstrated radical pair quantum biology (T1/T2) from speculative claims (T3/T4)</a:t>
+              <a:t>Peroxisomal reserve mobilization (QBM-06), evidentiary tiers (T1–T4), and organellar electron transport hubs</a:t>
             </a:r>
           </a:p>
         </p:txBody>
@@ -11603,7 +12182,7 @@
         <p:spPr>
           <a:xfrm>
             <a:off x="731520" y="1600200"/>
-            <a:ext cx="5120640" cy="2286000"/>
+            <a:ext cx="10728655" cy="2240280"/>
           </a:xfrm>
           <a:prstGeom prst="roundRect">
             <a:avLst/>
@@ -11641,7 +12220,7 @@
       </p:sp>
       <p:pic>
         <p:nvPicPr>
-          <p:cNvPr id="6" name="Picture 5" descr="Fig3b_evidentiary_tiers.png"/>
+          <p:cNvPr id="6" name="Picture 5" descr="Fig3a_qbm06_pathway.png"/>
           <p:cNvPicPr>
             <a:picLocks noChangeAspect="1"/>
           </p:cNvPicPr>
@@ -11655,8 +12234,8 @@
         </p:blipFill>
         <p:spPr>
           <a:xfrm>
-            <a:off x="822960" y="1691640"/>
-            <a:ext cx="4937760" cy="2103120"/>
+            <a:off x="822960" y="1920240"/>
+            <a:ext cx="10545775" cy="1856232"/>
           </a:xfrm>
           <a:prstGeom prst="rect">
             <a:avLst/>
@@ -11665,14 +12244,49 @@
       </p:pic>
       <p:sp>
         <p:nvSpPr>
-          <p:cNvPr id="7" name="Rounded Rectangle 6"/>
+          <p:cNvPr id="7" name="TextBox 6"/>
+          <p:cNvSpPr txBox="1"/>
+          <p:nvPr/>
+        </p:nvSpPr>
+        <p:spPr>
+          <a:xfrm>
+            <a:off x="868680" y="1645920"/>
+            <a:ext cx="10728655" cy="274320"/>
+          </a:xfrm>
+          <a:prstGeom prst="rect">
+            <a:avLst/>
+          </a:prstGeom>
+          <a:noFill/>
+        </p:spPr>
+        <p:txBody>
+          <a:bodyPr wrap="none">
+            <a:spAutoFit/>
+          </a:bodyPr>
+          <a:lstStyle/>
+          <a:p>
+            <a:pPr>
+              <a:defRPr sz="900" b="1">
+                <a:solidFill>
+                  <a:srgbClr val="0284C7"/>
+                </a:solidFill>
+              </a:defRPr>
+            </a:pPr>
+            <a:r>
+              <a:t>(a) QBM-06 Pathway: Reserve Mobilization, Peroxisomal β-Oxidation &amp; Mitochondrial Respiration (0–72 h)</a:t>
+            </a:r>
+          </a:p>
+        </p:txBody>
+      </p:sp>
+      <p:sp>
+        <p:nvSpPr>
+          <p:cNvPr id="8" name="Rounded Rectangle 7"/>
           <p:cNvSpPr/>
           <p:nvPr/>
         </p:nvSpPr>
         <p:spPr>
           <a:xfrm>
-            <a:off x="731520" y="4023360"/>
-            <a:ext cx="5120640" cy="2286000"/>
+            <a:off x="731520" y="4069080"/>
+            <a:ext cx="5212080" cy="2240280"/>
           </a:xfrm>
           <a:prstGeom prst="roundRect">
             <a:avLst/>
@@ -11710,7 +12324,7 @@
       </p:sp>
       <p:pic>
         <p:nvPicPr>
-          <p:cNvPr id="8" name="Picture 7" descr="Fig3c_organellar_etc.png"/>
+          <p:cNvPr id="9" name="Picture 8" descr="Fig3b_evidentiary_tiers.png"/>
           <p:cNvPicPr>
             <a:picLocks noChangeAspect="1"/>
           </p:cNvPicPr>
@@ -11724,8 +12338,8 @@
         </p:blipFill>
         <p:spPr>
           <a:xfrm>
-            <a:off x="822960" y="4114800"/>
-            <a:ext cx="4937760" cy="2103120"/>
+            <a:off x="822960" y="4389120"/>
+            <a:ext cx="5029200" cy="1856232"/>
           </a:xfrm>
           <a:prstGeom prst="rect">
             <a:avLst/>
@@ -11734,14 +12348,49 @@
       </p:pic>
       <p:sp>
         <p:nvSpPr>
-          <p:cNvPr id="9" name="Rounded Rectangle 8"/>
+          <p:cNvPr id="10" name="TextBox 9"/>
+          <p:cNvSpPr txBox="1"/>
+          <p:nvPr/>
+        </p:nvSpPr>
+        <p:spPr>
+          <a:xfrm>
+            <a:off x="868680" y="4114800"/>
+            <a:ext cx="5212080" cy="274320"/>
+          </a:xfrm>
+          <a:prstGeom prst="rect">
+            <a:avLst/>
+          </a:prstGeom>
+          <a:noFill/>
+        </p:spPr>
+        <p:txBody>
+          <a:bodyPr wrap="none">
+            <a:spAutoFit/>
+          </a:bodyPr>
+          <a:lstStyle/>
+          <a:p>
+            <a:pPr>
+              <a:defRPr sz="900" b="1">
+                <a:solidFill>
+                  <a:srgbClr val="0284C7"/>
+                </a:solidFill>
+              </a:defRPr>
+            </a:pPr>
+            <a:r>
+              <a:t>(b) Evidentiary Tier Hierarchy (T1 Demonstrated to T4 Context)</a:t>
+            </a:r>
+          </a:p>
+        </p:txBody>
+      </p:sp>
+      <p:sp>
+        <p:nvSpPr>
+          <p:cNvPr id="11" name="Rounded Rectangle 10"/>
           <p:cNvSpPr/>
           <p:nvPr/>
         </p:nvSpPr>
         <p:spPr>
           <a:xfrm>
-            <a:off x="6035040" y="1600200"/>
-            <a:ext cx="5425135" cy="4709160"/>
+            <a:off x="6248095" y="4069080"/>
+            <a:ext cx="5212080" cy="2240280"/>
           </a:xfrm>
           <a:prstGeom prst="roundRect">
             <a:avLst/>
@@ -11777,122 +12426,40 @@
           </a:p>
         </p:txBody>
       </p:sp>
-      <p:sp>
-        <p:nvSpPr>
-          <p:cNvPr id="10" name="TextBox 9"/>
+      <p:pic>
+        <p:nvPicPr>
+          <p:cNvPr id="12" name="Picture 11" descr="Fig3c_organellar_etc.png"/>
+          <p:cNvPicPr>
+            <a:picLocks noChangeAspect="1"/>
+          </p:cNvPicPr>
+          <p:nvPr/>
+        </p:nvPicPr>
+        <p:blipFill>
+          <a:blip r:embed="rId4"/>
+          <a:stretch>
+            <a:fillRect/>
+          </a:stretch>
+        </p:blipFill>
+        <p:spPr>
+          <a:xfrm>
+            <a:off x="6339535" y="4389120"/>
+            <a:ext cx="5029200" cy="1856232"/>
+          </a:xfrm>
+          <a:prstGeom prst="rect">
+            <a:avLst/>
+          </a:prstGeom>
+        </p:spPr>
+      </p:pic>
+      <p:sp>
+        <p:nvSpPr>
+          <p:cNvPr id="13" name="TextBox 12"/>
           <p:cNvSpPr txBox="1"/>
           <p:nvPr/>
         </p:nvSpPr>
         <p:spPr>
           <a:xfrm>
-            <a:off x="6217920" y="1737360"/>
-            <a:ext cx="5059375" cy="4434840"/>
-          </a:xfrm>
-          <a:prstGeom prst="rect">
-            <a:avLst/>
-          </a:prstGeom>
-          <a:noFill/>
-        </p:spPr>
-        <p:txBody>
-          <a:bodyPr wrap="square">
-            <a:spAutoFit/>
-          </a:bodyPr>
-          <a:lstStyle/>
-          <a:p>
-            <a:pPr>
-              <a:defRPr sz="1100" b="1">
-                <a:solidFill>
-                  <a:srgbClr val="0284C7"/>
-                </a:solidFill>
-              </a:defRPr>
-            </a:pPr>
-            <a:r>
-              <a:t>THE RADICAL PAIR SPIN-CHEMICAL MECHANISM:</a:t>
-            </a:r>
-          </a:p>
-          <a:p>
-            <a:pPr>
-              <a:defRPr sz="900">
-                <a:solidFill>
-                  <a:srgbClr val="0F172A"/>
-                </a:solidFill>
-              </a:defRPr>
-            </a:pPr>
-            <a:r>
-              <a:t>1. Radical Pair Formation:</a:t>
-            </a:r>
-            <a:br/>
-            <a:r>
-              <a:t>   • Photon absorption (450 nm blue light) promotes electron transfer:</a:t>
-            </a:r>
-            <a:br/>
-            <a:r>
-              <a:t>     FAD + TrpH → [FAD•- ... TrpH•+]</a:t>
-            </a:r>
-            <a:br/>
-            <a:r>
-              <a:t>   • Generates a spin-correlated singlet-triplet pair.</a:t>
-            </a:r>
-            <a:br/>
-            <a:br/>
-            <a:r>
-              <a:t>2. Zeeman &amp; Hyperfine Modulation:</a:t>
-            </a:r>
-            <a:br/>
-            <a:r>
-              <a:t>   • In Earth's GMF (45 µT), external Zeeman splitting alters singlet-to-triplet interconversion rates.</a:t>
-            </a:r>
-            <a:br/>
-            <a:r>
-              <a:t>   • In Near-Null Fields (&lt;0.8 nT), Zeeman mixing collapses, altering radical pair lifetimes and yields.</a:t>
-            </a:r>
-            <a:br/>
-            <a:br/>
-            <a:r>
-              <a:t>3. Downstream Signaling Attenuation:</a:t>
-            </a:r>
-            <a:br/>
-            <a:r>
-              <a:t>   • Reduced cryptochrome active signaling decreases COP1/SPA1 dissociation.</a:t>
-            </a:r>
-            <a:br/>
-            <a:r>
-              <a:t>   • Less HY5 transcription factor is stabilized in the nucleus.</a:t>
-            </a:r>
-            <a:br/>
-            <a:r>
-              <a:t>   • Direct repression of HEMA1, POR, CHS, and CHI (chlorophyll and anthocyanin chlorosis).</a:t>
-            </a:r>
-            <a:br/>
-            <a:br/>
-            <a:r>
-              <a:t>4. Critical Evidentiary Tiers:</a:t>
-            </a:r>
-            <a:br/>
-            <a:r>
-              <a:t>   • T1 (Solid): Cryptochrome FAD•- in vitro magnetic sensitivity.</a:t>
-            </a:r>
-            <a:br/>
-            <a:r>
-              <a:t>   • T2 (Plausible): Peroxisomal flavin oxidase radical pairs.</a:t>
-            </a:r>
-            <a:br/>
-            <a:r>
-              <a:t>   • T3/T4 (Speculative): Mitochondrial DNA quantum coherence.</a:t>
-            </a:r>
-          </a:p>
-        </p:txBody>
-      </p:sp>
-      <p:sp>
-        <p:nvSpPr>
-          <p:cNvPr id="11" name="TextBox 10"/>
-          <p:cNvSpPr txBox="1"/>
-          <p:nvPr/>
-        </p:nvSpPr>
-        <p:spPr>
-          <a:xfrm>
-            <a:off x="731520" y="6446520"/>
-            <a:ext cx="10728655" cy="274320"/>
+            <a:off x="6385255" y="4114800"/>
+            <a:ext cx="5212080" cy="274320"/>
           </a:xfrm>
           <a:prstGeom prst="rect">
             <a:avLst/>
@@ -11906,6 +12473,41 @@
           <a:lstStyle/>
           <a:p>
             <a:pPr>
+              <a:defRPr sz="900" b="1">
+                <a:solidFill>
+                  <a:srgbClr val="0284C7"/>
+                </a:solidFill>
+              </a:defRPr>
+            </a:pPr>
+            <a:r>
+              <a:t>(c) Organellar Electron Transport Hubs (Chloroplast PETC &amp; Mitochondrial AOX)</a:t>
+            </a:r>
+          </a:p>
+        </p:txBody>
+      </p:sp>
+      <p:sp>
+        <p:nvSpPr>
+          <p:cNvPr id="14" name="TextBox 13"/>
+          <p:cNvSpPr txBox="1"/>
+          <p:nvPr/>
+        </p:nvSpPr>
+        <p:spPr>
+          <a:xfrm>
+            <a:off x="731520" y="6446520"/>
+            <a:ext cx="10728655" cy="274320"/>
+          </a:xfrm>
+          <a:prstGeom prst="rect">
+            <a:avLst/>
+          </a:prstGeom>
+          <a:noFill/>
+        </p:spPr>
+        <p:txBody>
+          <a:bodyPr wrap="none">
+            <a:spAutoFit/>
+          </a:bodyPr>
+          <a:lstStyle/>
+          <a:p>
+            <a:pPr>
               <a:defRPr sz="850">
                 <a:solidFill>
                   <a:srgbClr val="64748B"/>
@@ -11913,7 +12515,7 @@
               </a:defRPr>
             </a:pPr>
             <a:r>
-              <a:t>Life Sciences in Space Research (2026) | Artemis III LEAF Perspective              Slide 8 of 15</a:t>
+              <a:t>Life Sciences in Space Research (2026) | Artemis III LEAF Perspective              Slide 8 of 16</a:t>
             </a:r>
           </a:p>
         </p:txBody>
@@ -11974,7 +12576,7 @@
               </a:defRPr>
             </a:pPr>
             <a:r>
-              <a:t>FIGURE 4 MONTAGE | EDITABLE LAYOUT</a:t>
+              <a:t>FIGURE 4 DEEP DIVE</a:t>
             </a:r>
           </a:p>
         </p:txBody>
@@ -12009,7 +12611,7 @@
               </a:defRPr>
             </a:pPr>
             <a:r>
-              <a:t>Multi-Stressor Convergence: The CO2 &lt;-&gt; O2 &lt;-&gt; ROS Nexus</a:t>
+              <a:t>Cryptochrome Spin Dynamics &amp; Evidentiary Rigor</a:t>
             </a:r>
           </a:p>
         </p:txBody>
@@ -12044,7 +12646,7 @@
               </a:defRPr>
             </a:pPr>
             <a:r>
-              <a:t>Exploration atmospheres, hypomagnetic fields, and ionizing radiation converge on mitochondrial Alternative Oxidase (AOX1D)</a:t>
+              <a:t>Separating rigorously demonstrated radical pair quantum biology (T1/T2) from speculative claims (T3/T4)</a:t>
             </a:r>
           </a:p>
         </p:txBody>
@@ -12058,7 +12660,7 @@
         <p:spPr>
           <a:xfrm>
             <a:off x="731520" y="1600200"/>
-            <a:ext cx="5212080" cy="2240280"/>
+            <a:ext cx="5120640" cy="2286000"/>
           </a:xfrm>
           <a:prstGeom prst="roundRect">
             <a:avLst/>
@@ -12096,7 +12698,7 @@
       </p:sp>
       <p:pic>
         <p:nvPicPr>
-          <p:cNvPr id="6" name="Picture 5" descr="Fig4a_multistressor_space.png"/>
+          <p:cNvPr id="6" name="Picture 5" descr="Fig3b_evidentiary_tiers.png"/>
           <p:cNvPicPr>
             <a:picLocks noChangeAspect="1"/>
           </p:cNvPicPr>
@@ -12110,8 +12712,8 @@
         </p:blipFill>
         <p:spPr>
           <a:xfrm>
-            <a:off x="822960" y="1920240"/>
-            <a:ext cx="5029200" cy="1856232"/>
+            <a:off x="822960" y="1691640"/>
+            <a:ext cx="4937760" cy="2103120"/>
           </a:xfrm>
           <a:prstGeom prst="rect">
             <a:avLst/>
@@ -12120,49 +12722,14 @@
       </p:pic>
       <p:sp>
         <p:nvSpPr>
-          <p:cNvPr id="7" name="TextBox 6"/>
-          <p:cNvSpPr txBox="1"/>
-          <p:nvPr/>
-        </p:nvSpPr>
-        <p:spPr>
-          <a:xfrm>
-            <a:off x="868680" y="1645920"/>
-            <a:ext cx="5212080" cy="274320"/>
-          </a:xfrm>
-          <a:prstGeom prst="rect">
-            <a:avLst/>
-          </a:prstGeom>
-          <a:noFill/>
-        </p:spPr>
-        <p:txBody>
-          <a:bodyPr wrap="none">
-            <a:spAutoFit/>
-          </a:bodyPr>
-          <a:lstStyle/>
-          <a:p>
-            <a:pPr>
-              <a:defRPr sz="900" b="1">
-                <a:solidFill>
-                  <a:srgbClr val="0284C7"/>
-                </a:solidFill>
-              </a:defRPr>
-            </a:pPr>
-            <a:r>
-              <a:t>(a) Multi-Stressor Space: Exploration Atmosphere, NNMF &amp; Radiation</a:t>
-            </a:r>
-          </a:p>
-        </p:txBody>
-      </p:sp>
-      <p:sp>
-        <p:nvSpPr>
-          <p:cNvPr id="8" name="Rounded Rectangle 7"/>
+          <p:cNvPr id="7" name="Rounded Rectangle 6"/>
           <p:cNvSpPr/>
           <p:nvPr/>
         </p:nvSpPr>
         <p:spPr>
           <a:xfrm>
-            <a:off x="6248095" y="1600200"/>
-            <a:ext cx="5212080" cy="2240280"/>
+            <a:off x="731520" y="4023360"/>
+            <a:ext cx="5120640" cy="2286000"/>
           </a:xfrm>
           <a:prstGeom prst="roundRect">
             <a:avLst/>
@@ -12200,7 +12767,7 @@
       </p:sp>
       <p:pic>
         <p:nvPicPr>
-          <p:cNvPr id="9" name="Picture 8" descr="Fig4b_bioenergetic_engine.png"/>
+          <p:cNvPr id="8" name="Picture 7" descr="Fig3c_organellar_etc.png"/>
           <p:cNvPicPr>
             <a:picLocks noChangeAspect="1"/>
           </p:cNvPicPr>
@@ -12214,8 +12781,8 @@
         </p:blipFill>
         <p:spPr>
           <a:xfrm>
-            <a:off x="6339535" y="1920240"/>
-            <a:ext cx="5029200" cy="1856232"/>
+            <a:off x="822960" y="4114800"/>
+            <a:ext cx="4937760" cy="2103120"/>
           </a:xfrm>
           <a:prstGeom prst="rect">
             <a:avLst/>
@@ -12224,49 +12791,14 @@
       </p:pic>
       <p:sp>
         <p:nvSpPr>
-          <p:cNvPr id="10" name="TextBox 9"/>
-          <p:cNvSpPr txBox="1"/>
-          <p:nvPr/>
-        </p:nvSpPr>
-        <p:spPr>
-          <a:xfrm>
-            <a:off x="6385255" y="1645920"/>
-            <a:ext cx="5212080" cy="274320"/>
-          </a:xfrm>
-          <a:prstGeom prst="rect">
-            <a:avLst/>
-          </a:prstGeom>
-          <a:noFill/>
-        </p:spPr>
-        <p:txBody>
-          <a:bodyPr wrap="none">
-            <a:spAutoFit/>
-          </a:bodyPr>
-          <a:lstStyle/>
-          <a:p>
-            <a:pPr>
-              <a:defRPr sz="900" b="1">
-                <a:solidFill>
-                  <a:srgbClr val="0284C7"/>
-                </a:solidFill>
-              </a:defRPr>
-            </a:pPr>
-            <a:r>
-              <a:t>(b) The Mitochondrial &amp; Peroxisomal CO2 &lt;-&gt; O2 &lt;-&gt; ROS Engine</a:t>
-            </a:r>
-          </a:p>
-        </p:txBody>
-      </p:sp>
-      <p:sp>
-        <p:nvSpPr>
-          <p:cNvPr id="11" name="Rounded Rectangle 10"/>
+          <p:cNvPr id="9" name="Rounded Rectangle 8"/>
           <p:cNvSpPr/>
           <p:nvPr/>
         </p:nvSpPr>
         <p:spPr>
           <a:xfrm>
-            <a:off x="731520" y="4069080"/>
-            <a:ext cx="5212080" cy="2240280"/>
+            <a:off x="6035040" y="1600200"/>
+            <a:ext cx="5425135" cy="4709160"/>
           </a:xfrm>
           <a:prstGeom prst="roundRect">
             <a:avLst/>
@@ -12302,40 +12834,122 @@
           </a:p>
         </p:txBody>
       </p:sp>
-      <p:pic>
-        <p:nvPicPr>
-          <p:cNvPr id="12" name="Picture 11" descr="Fig4c_multiomics_overlap.png"/>
-          <p:cNvPicPr>
-            <a:picLocks noChangeAspect="1"/>
-          </p:cNvPicPr>
-          <p:nvPr/>
-        </p:nvPicPr>
-        <p:blipFill>
-          <a:blip r:embed="rId4"/>
-          <a:stretch>
-            <a:fillRect/>
-          </a:stretch>
-        </p:blipFill>
-        <p:spPr>
-          <a:xfrm>
-            <a:off x="822960" y="4389120"/>
-            <a:ext cx="5029200" cy="1856232"/>
-          </a:xfrm>
-          <a:prstGeom prst="rect">
-            <a:avLst/>
-          </a:prstGeom>
-        </p:spPr>
-      </p:pic>
-      <p:sp>
-        <p:nvSpPr>
-          <p:cNvPr id="13" name="TextBox 12"/>
+      <p:sp>
+        <p:nvSpPr>
+          <p:cNvPr id="10" name="TextBox 9"/>
           <p:cNvSpPr txBox="1"/>
           <p:nvPr/>
         </p:nvSpPr>
         <p:spPr>
           <a:xfrm>
-            <a:off x="868680" y="4114800"/>
-            <a:ext cx="5212080" cy="274320"/>
+            <a:off x="6217920" y="1737360"/>
+            <a:ext cx="5059375" cy="4434840"/>
+          </a:xfrm>
+          <a:prstGeom prst="rect">
+            <a:avLst/>
+          </a:prstGeom>
+          <a:noFill/>
+        </p:spPr>
+        <p:txBody>
+          <a:bodyPr wrap="square">
+            <a:spAutoFit/>
+          </a:bodyPr>
+          <a:lstStyle/>
+          <a:p>
+            <a:pPr>
+              <a:defRPr sz="1100" b="1">
+                <a:solidFill>
+                  <a:srgbClr val="0284C7"/>
+                </a:solidFill>
+              </a:defRPr>
+            </a:pPr>
+            <a:r>
+              <a:t>THE RADICAL PAIR SPIN-CHEMICAL MECHANISM:</a:t>
+            </a:r>
+          </a:p>
+          <a:p>
+            <a:pPr>
+              <a:defRPr sz="900">
+                <a:solidFill>
+                  <a:srgbClr val="0F172A"/>
+                </a:solidFill>
+              </a:defRPr>
+            </a:pPr>
+            <a:r>
+              <a:t>1. Radical Pair Formation:</a:t>
+            </a:r>
+            <a:br/>
+            <a:r>
+              <a:t>   • Photon absorption (450 nm blue light) promotes electron transfer:</a:t>
+            </a:r>
+            <a:br/>
+            <a:r>
+              <a:t>     FAD + TrpH → [FAD•- ... TrpH•+]</a:t>
+            </a:r>
+            <a:br/>
+            <a:r>
+              <a:t>   • Generates a spin-correlated singlet-triplet pair.</a:t>
+            </a:r>
+            <a:br/>
+            <a:br/>
+            <a:r>
+              <a:t>2. Zeeman &amp; Hyperfine Modulation:</a:t>
+            </a:r>
+            <a:br/>
+            <a:r>
+              <a:t>   • In Earth's GMF (45 µT), external Zeeman splitting alters singlet-to-triplet interconversion rates.</a:t>
+            </a:r>
+            <a:br/>
+            <a:r>
+              <a:t>   • In Near-Null Fields (&lt;0.8 nT), Zeeman mixing collapses, altering radical pair lifetimes and yields.</a:t>
+            </a:r>
+            <a:br/>
+            <a:br/>
+            <a:r>
+              <a:t>3. Downstream Signaling Attenuation:</a:t>
+            </a:r>
+            <a:br/>
+            <a:r>
+              <a:t>   • Reduced cryptochrome active signaling decreases COP1/SPA1 dissociation.</a:t>
+            </a:r>
+            <a:br/>
+            <a:r>
+              <a:t>   • Less HY5 transcription factor is stabilized in the nucleus.</a:t>
+            </a:r>
+            <a:br/>
+            <a:r>
+              <a:t>   • Direct repression of HEMA1, POR, CHS, and CHI (chlorophyll and anthocyanin chlorosis).</a:t>
+            </a:r>
+            <a:br/>
+            <a:br/>
+            <a:r>
+              <a:t>4. Critical Evidentiary Tiers:</a:t>
+            </a:r>
+            <a:br/>
+            <a:r>
+              <a:t>   • T1 (Solid): Cryptochrome FAD•- in vitro magnetic sensitivity.</a:t>
+            </a:r>
+            <a:br/>
+            <a:r>
+              <a:t>   • T2 (Plausible): Peroxisomal flavin oxidase radical pairs.</a:t>
+            </a:r>
+            <a:br/>
+            <a:r>
+              <a:t>   • T3/T4 (Speculative): Mitochondrial DNA quantum coherence.</a:t>
+            </a:r>
+          </a:p>
+        </p:txBody>
+      </p:sp>
+      <p:sp>
+        <p:nvSpPr>
+          <p:cNvPr id="11" name="TextBox 10"/>
+          <p:cNvSpPr txBox="1"/>
+          <p:nvPr/>
+        </p:nvSpPr>
+        <p:spPr>
+          <a:xfrm>
+            <a:off x="731520" y="6446520"/>
+            <a:ext cx="10728655" cy="274320"/>
           </a:xfrm>
           <a:prstGeom prst="rect">
             <a:avLst/>
@@ -12349,153 +12963,14 @@
           <a:lstStyle/>
           <a:p>
             <a:pPr>
-              <a:defRPr sz="900" b="1">
-                <a:solidFill>
-                  <a:srgbClr val="0284C7"/>
+              <a:defRPr sz="850">
+                <a:solidFill>
+                  <a:srgbClr val="64748B"/>
                 </a:solidFill>
               </a:defRPr>
             </a:pPr>
             <a:r>
-              <a:t>(c) Multi-Omics Empirical Overlap: OSD-782 Radiation vs. NNMF Loci</a:t>
-            </a:r>
-          </a:p>
-        </p:txBody>
-      </p:sp>
-      <p:sp>
-        <p:nvSpPr>
-          <p:cNvPr id="14" name="Rounded Rectangle 13"/>
-          <p:cNvSpPr/>
-          <p:nvPr/>
-        </p:nvSpPr>
-        <p:spPr>
-          <a:xfrm>
-            <a:off x="6248095" y="4069080"/>
-            <a:ext cx="5212080" cy="2240280"/>
-          </a:xfrm>
-          <a:prstGeom prst="roundRect">
-            <a:avLst/>
-          </a:prstGeom>
-          <a:solidFill>
-            <a:srgbClr val="FFFFFF"/>
-          </a:solidFill>
-          <a:ln w="12700">
-            <a:solidFill>
-              <a:srgbClr val="E2E8F0"/>
-            </a:solidFill>
-          </a:ln>
-        </p:spPr>
-        <p:style>
-          <a:lnRef idx="1">
-            <a:schemeClr val="accent1"/>
-          </a:lnRef>
-          <a:fillRef idx="3">
-            <a:schemeClr val="accent1"/>
-          </a:fillRef>
-          <a:effectRef idx="2">
-            <a:schemeClr val="accent1"/>
-          </a:effectRef>
-          <a:fontRef idx="minor">
-            <a:schemeClr val="lt1"/>
-          </a:fontRef>
-        </p:style>
-        <p:txBody>
-          <a:bodyPr rtlCol="0" anchor="ctr"/>
-          <a:lstStyle/>
-          <a:p>
-            <a:pPr algn="ctr"/>
-          </a:p>
-        </p:txBody>
-      </p:sp>
-      <p:pic>
-        <p:nvPicPr>
-          <p:cNvPr id="15" name="Picture 14" descr="Fig4d_crosskingdom_astronaut.png"/>
-          <p:cNvPicPr>
-            <a:picLocks noChangeAspect="1"/>
-          </p:cNvPicPr>
-          <p:nvPr/>
-        </p:nvPicPr>
-        <p:blipFill>
-          <a:blip r:embed="rId5"/>
-          <a:stretch>
-            <a:fillRect/>
-          </a:stretch>
-        </p:blipFill>
-        <p:spPr>
-          <a:xfrm>
-            <a:off x="6339535" y="4389120"/>
-            <a:ext cx="5029200" cy="1856232"/>
-          </a:xfrm>
-          <a:prstGeom prst="rect">
-            <a:avLst/>
-          </a:prstGeom>
-        </p:spPr>
-      </p:pic>
-      <p:sp>
-        <p:nvSpPr>
-          <p:cNvPr id="16" name="TextBox 15"/>
-          <p:cNvSpPr txBox="1"/>
-          <p:nvPr/>
-        </p:nvSpPr>
-        <p:spPr>
-          <a:xfrm>
-            <a:off x="6385255" y="4114800"/>
-            <a:ext cx="5212080" cy="274320"/>
-          </a:xfrm>
-          <a:prstGeom prst="rect">
-            <a:avLst/>
-          </a:prstGeom>
-          <a:noFill/>
-        </p:spPr>
-        <p:txBody>
-          <a:bodyPr wrap="none">
-            <a:spAutoFit/>
-          </a:bodyPr>
-          <a:lstStyle/>
-          <a:p>
-            <a:pPr>
-              <a:defRPr sz="900" b="1">
-                <a:solidFill>
-                  <a:srgbClr val="0284C7"/>
-                </a:solidFill>
-              </a:defRPr>
-            </a:pPr>
-            <a:r>
-              <a:t>(d) Cross-Kingdom Convergence: Plant BLSS &amp; Human Astronaut Health</a:t>
-            </a:r>
-          </a:p>
-        </p:txBody>
-      </p:sp>
-      <p:sp>
-        <p:nvSpPr>
-          <p:cNvPr id="17" name="TextBox 16"/>
-          <p:cNvSpPr txBox="1"/>
-          <p:nvPr/>
-        </p:nvSpPr>
-        <p:spPr>
-          <a:xfrm>
-            <a:off x="731520" y="6446520"/>
-            <a:ext cx="10728655" cy="274320"/>
-          </a:xfrm>
-          <a:prstGeom prst="rect">
-            <a:avLst/>
-          </a:prstGeom>
-          <a:noFill/>
-        </p:spPr>
-        <p:txBody>
-          <a:bodyPr wrap="none">
-            <a:spAutoFit/>
-          </a:bodyPr>
-          <a:lstStyle/>
-          <a:p>
-            <a:pPr>
-              <a:defRPr sz="850">
-                <a:solidFill>
-                  <a:srgbClr val="64748B"/>
-                </a:solidFill>
-              </a:defRPr>
-            </a:pPr>
-            <a:r>
-              <a:t>Life Sciences in Space Research (2026) | Artemis III LEAF Perspective              Slide 9 of 15</a:t>
+              <a:t>Life Sciences in Space Research (2026) | Artemis III LEAF Perspective              Slide 9 of 16</a:t>
             </a:r>
           </a:p>
         </p:txBody>

--- a/Near_Null_Magnetic_Fields_Lunar_Plant_Biology_Presentation.pptx
+++ b/Near_Null_Magnetic_Fields_Lunar_Plant_Biology_Presentation.pptx
@@ -532,7 +532,7 @@
           </a:p>
           <a:p>
             <a:r>
-              <a:t>• Co-authored with Marshall Porterfield, Caue Borlina, Aubrey O'Rourke, Adriana Sanchez, Manisha Dagar, Sofia Leiva Aldana, Ray Wheeler, Gioia Massa, Barbara Demmig-Adams, Marta Peirats-Llobet, Pamela Flores, Anirudha Dixit, and Christine Chamberlain.</a:t>
+              <a:t>• Co-authored with Marshall Porterfield, Caue Borlina, Aubrey O'Rourke, Adriana Sanchez, Manisha Dagar, Ray Wheeler, Gioia Massa, Barbara Demmig-Adams, Marta Peirats-Llobet, Pamela Flores, Anirudha Dixit, and Christine Chamberlain.</a:t>
             </a:r>
           </a:p>
           <a:p>
@@ -5206,7 +5206,7 @@
               </a:defRPr>
             </a:pPr>
             <a:r>
-              <a:t>D. Marshall Porterfield*, Richard J. Barker*, Caue Borlina, Aubrey O’Rourke, Adriana Sanchez, Manisha Dagar, Sofia Leiva Aldana,</a:t>
+              <a:t>D. Marshall Porterfield*, Richard J. Barker*, Caue Borlina, Aubrey O’Rourke, Adriana Sanchez, Manisha Dagar,</a:t>
             </a:r>
             <a:br/>
             <a:r>

--- a/Near_Null_Magnetic_Fields_Lunar_Plant_Biology_Presentation.pptx
+++ b/Near_Null_Magnetic_Fields_Lunar_Plant_Biology_Presentation.pptx
@@ -1497,7 +1497,7 @@
           </a:p>
           <a:p>
             <a:r>
-              <a:t>• Notice from Table 1 that every single candidate landing site for Artemis III and future Artemis missions has a crustal magnetic field below 1 nanotesla.</a:t>
+              <a:t>• Notice from Table 1 that every single candidate landing site for Artemis missions has a crustal magnetic field below 1 nanotesla.</a:t>
             </a:r>
           </a:p>
           <a:p>
@@ -1797,7 +1797,7 @@
           </a:p>
           <a:p>
             <a:r>
-              <a:t>• In field agriculture on Earth, seeds have excess time and buffer. In a tightly scheduled spaceflight payload like LEAF on Artemis III, or a lunar greenhouse, mission timelines are strictly constrained.</a:t>
+              <a:t>• In field agriculture on Earth, seeds have excess time and buffer. In a tightly scheduled spaceflight payload like LEAF on Artemis missions, or a lunar greenhouse, mission timelines are strictly constrained.</a:t>
             </a:r>
           </a:p>
           <a:p>
@@ -5101,7 +5101,7 @@
               </a:defRPr>
             </a:pPr>
             <a:r>
-              <a:t>COSPAR / ELSEVIER REVIEW ARTICLE — ARTEMIS III LEAF PERSPECTIVE</a:t>
+              <a:t>COSPAR / ELSEVIER REVIEW ARTICLE — ARTEMIS MISSIONS LEAF PERSPECTIVE</a:t>
             </a:r>
           </a:p>
         </p:txBody>
@@ -5261,7 +5261,7 @@
               </a:defRPr>
             </a:pPr>
             <a:r>
-              <a:t>Target Journal: Life Sciences in Space Research (LSSR)  |  Mission Context: Artemis III LEAF Payload  |  FAIR Repository &amp; CoSE Portal Ready</a:t>
+              <a:t>Target Journal: Life Sciences in Space Research (LSSR)  |  Mission Context: Artemis Missions LEAF Payload  |  FAIR Repository &amp; CoSE Portal Ready</a:t>
             </a:r>
           </a:p>
         </p:txBody>
@@ -5296,7 +5296,7 @@
               </a:defRPr>
             </a:pPr>
             <a:r>
-              <a:t>Life Sciences in Space Research (2026) | Artemis III LEAF Perspective              Slide 1 of 16</a:t>
+              <a:t>Life Sciences in Space Research (2026) | Artemis Missions LEAF Perspective        Slide 1 of 16</a:t>
             </a:r>
           </a:p>
         </p:txBody>
@@ -5878,7 +5878,7 @@
               </a:defRPr>
             </a:pPr>
             <a:r>
-              <a:t>Life Sciences in Space Research (2026) | Artemis III LEAF Perspective              Slide 10 of 16</a:t>
+              <a:t>Life Sciences in Space Research (2026) | Artemis Missions LEAF Perspective        Slide 10 of 16</a:t>
             </a:r>
           </a:p>
         </p:txBody>
@@ -6316,7 +6316,7 @@
               </a:defRPr>
             </a:pPr>
             <a:r>
-              <a:t>Life Sciences in Space Research (2026) | Artemis III LEAF Perspective              Slide 11 of 16</a:t>
+              <a:t>Life Sciences in Space Research (2026) | Artemis Missions LEAF Perspective        Slide 11 of 16</a:t>
             </a:r>
           </a:p>
         </p:txBody>
@@ -6794,7 +6794,7 @@
               </a:defRPr>
             </a:pPr>
             <a:r>
-              <a:t>Life Sciences in Space Research (2026) | Artemis III LEAF Perspective              Slide 12 of 16</a:t>
+              <a:t>Life Sciences in Space Research (2026) | Artemis Missions LEAF Perspective        Slide 12 of 16</a:t>
             </a:r>
           </a:p>
         </p:txBody>
@@ -7499,7 +7499,7 @@
               </a:defRPr>
             </a:pPr>
             <a:r>
-              <a:t>Life Sciences in Space Research (2026) | Artemis III LEAF Perspective              Slide 13 of 16</a:t>
+              <a:t>Life Sciences in Space Research (2026) | Artemis Missions LEAF Perspective        Slide 13 of 16</a:t>
             </a:r>
           </a:p>
         </p:txBody>
@@ -7977,7 +7977,7 @@
               </a:defRPr>
             </a:pPr>
             <a:r>
-              <a:t>Life Sciences in Space Research (2026) | Artemis III LEAF Perspective              Slide 14 of 16</a:t>
+              <a:t>Life Sciences in Space Research (2026) | Artemis Missions LEAF Perspective        Slide 14 of 16</a:t>
             </a:r>
           </a:p>
         </p:txBody>
@@ -8108,7 +8108,7 @@
               </a:defRPr>
             </a:pPr>
             <a:r>
-              <a:t>Strategic priorities for Artemis III LEAF operations and long-duration lunar bioregenerative life support</a:t>
+              <a:t>Strategic priorities for Artemis missions LEAF operations and long-duration lunar bioregenerative life support</a:t>
             </a:r>
           </a:p>
         </p:txBody>
@@ -8443,7 +8443,7 @@
               </a:defRPr>
             </a:pPr>
             <a:r>
-              <a:t>Life Sciences in Space Research (2026) | Artemis III LEAF Perspective              Slide 15 of 16</a:t>
+              <a:t>Life Sciences in Space Research (2026) | Artemis Missions LEAF Perspective        Slide 15 of 16</a:t>
             </a:r>
           </a:p>
         </p:txBody>
@@ -9025,7 +9025,7 @@
               </a:defRPr>
             </a:pPr>
             <a:r>
-              <a:t>Life Sciences in Space Research (2026) | Artemis III LEAF Perspective              Slide 16 of 16</a:t>
+              <a:t>Life Sciences in Space Research (2026) | Artemis Missions LEAF Perspective        Slide 16 of 16</a:t>
             </a:r>
           </a:p>
         </p:txBody>
@@ -9591,7 +9591,7 @@
               </a:defRPr>
             </a:pPr>
             <a:r>
-              <a:t>Life Sciences in Space Research (2026) | Artemis III LEAF Perspective              Slide 2 of 16</a:t>
+              <a:t>Life Sciences in Space Research (2026) | Artemis Missions LEAF Perspective        Slide 2 of 16</a:t>
             </a:r>
           </a:p>
         </p:txBody>
@@ -10173,7 +10173,7 @@
               </a:defRPr>
             </a:pPr>
             <a:r>
-              <a:t>Life Sciences in Space Research (2026) | Artemis III LEAF Perspective              Slide 3 of 16</a:t>
+              <a:t>Life Sciences in Space Research (2026) | Artemis Missions LEAF Perspective        Slide 3 of 16</a:t>
             </a:r>
           </a:p>
         </p:txBody>
@@ -10634,7 +10634,7 @@
               </a:defRPr>
             </a:pPr>
             <a:r>
-              <a:t>Life Sciences in Space Research (2026) | Artemis III LEAF Perspective              Slide 4 of 16</a:t>
+              <a:t>Life Sciences in Space Research (2026) | Artemis Missions LEAF Perspective        Slide 4 of 16</a:t>
             </a:r>
           </a:p>
         </p:txBody>
@@ -11008,7 +11008,7 @@
               </a:defRPr>
             </a:pPr>
             <a:r>
-              <a:t>Life Sciences in Space Research (2026) | Artemis III LEAF Perspective              Slide 5 of 16</a:t>
+              <a:t>Life Sciences in Space Research (2026) | Artemis Missions LEAF Perspective        Slide 5 of 16</a:t>
             </a:r>
           </a:p>
         </p:txBody>
@@ -11590,7 +11590,7 @@
               </a:defRPr>
             </a:pPr>
             <a:r>
-              <a:t>Life Sciences in Space Research (2026) | Artemis III LEAF Perspective              Slide 6 of 16</a:t>
+              <a:t>Life Sciences in Space Research (2026) | Artemis Missions LEAF Perspective        Slide 6 of 16</a:t>
             </a:r>
           </a:p>
         </p:txBody>
@@ -12037,7 +12037,7 @@
               </a:defRPr>
             </a:pPr>
             <a:r>
-              <a:t>Life Sciences in Space Research (2026) | Artemis III LEAF Perspective              Slide 7 of 16</a:t>
+              <a:t>Life Sciences in Space Research (2026) | Artemis Missions LEAF Perspective        Slide 7 of 16</a:t>
             </a:r>
           </a:p>
         </p:txBody>
@@ -12515,7 +12515,7 @@
               </a:defRPr>
             </a:pPr>
             <a:r>
-              <a:t>Life Sciences in Space Research (2026) | Artemis III LEAF Perspective              Slide 8 of 16</a:t>
+              <a:t>Life Sciences in Space Research (2026) | Artemis Missions LEAF Perspective        Slide 8 of 16</a:t>
             </a:r>
           </a:p>
         </p:txBody>
@@ -12970,7 +12970,7 @@
               </a:defRPr>
             </a:pPr>
             <a:r>
-              <a:t>Life Sciences in Space Research (2026) | Artemis III LEAF Perspective              Slide 9 of 16</a:t>
+              <a:t>Life Sciences in Space Research (2026) | Artemis Missions LEAF Perspective        Slide 9 of 16</a:t>
             </a:r>
           </a:p>
         </p:txBody>
